--- a/docs/demo/annona-demo.pptx
+++ b/docs/demo/annona-demo.pptx
@@ -116,30 +116,30 @@
   <p:extLst>
     <p:ext uri="{521415D9-36F7-43E2-AB2F-B90AF26B5E84}">
       <p14:sectionLst xmlns:p14="http://schemas.microsoft.com/office/powerpoint/2010/main">
-        <p14:section name="Open" id="{7595fe85-4aa4-86b6-db16-da079a707843}">
+        <p14:section name="Open" id="{ca4be1c7-52bb-df26-26e3-12f58b4cab98}">
           <p14:sldIdLst>
             <p14:sldId id="256"/>
           </p14:sldIdLst>
         </p14:section>
-        <p14:section name="Why" id="{50440ac2-45d8-d935-94a3-2e92e34f94fc}">
+        <p14:section name="Why" id="{25b07e98-9a4d-a916-9ab6-34323fabea8c}">
           <p14:sldIdLst>
             <p14:sldId id="257"/>
           </p14:sldIdLst>
         </p14:section>
-        <p14:section name="Product" id="{cb55f454-6f50-5736-8b95-60c771376761}">
+        <p14:section name="Product" id="{62f31ac0-1db9-7840-868f-ab063708fe85}">
           <p14:sldIdLst>
             <p14:sldId id="258"/>
             <p14:sldId id="259"/>
           </p14:sldIdLst>
         </p14:section>
-        <p14:section name="Live demo" id="{67e9c33d-fa67-f0e5-ea25-141e8c0d1198}">
+        <p14:section name="Live demo" id="{46ddf84a-f71b-81af-e14f-bcfed1aa1fac}">
           <p14:sldIdLst>
             <p14:sldId id="260"/>
             <p14:sldId id="261"/>
             <p14:sldId id="262"/>
           </p14:sldIdLst>
         </p14:section>
-        <p14:section name="Honesty" id="{96a922af-6282-b984-8d65-6691ffcc983d}">
+        <p14:section name="Honesty" id="{cc02bf23-0260-b580-b7b7-9f7ddd3a562e}">
           <p14:sldIdLst>
             <p14:sldId id="263"/>
             <p14:sldId id="264"/>
@@ -4201,12 +4201,12 @@
         </p:nvSpPr>
         <p:spPr>
           <a:xfrm>
-            <a:off x="548640" y="1371600"/>
-            <a:ext cx="8046720" cy="603504"/>
+            <a:off x="548640" y="1280160"/>
+            <a:ext cx="8046720" cy="493776"/>
           </a:xfrm>
           <a:prstGeom prst="roundRect">
             <a:avLst>
-              <a:gd name="adj" fmla="val 18182"/>
+              <a:gd name="adj" fmla="val 22222"/>
             </a:avLst>
           </a:prstGeom>
           <a:solidFill>
@@ -4235,7 +4235,7 @@
         </p:nvSpPr>
         <p:spPr>
           <a:xfrm>
-            <a:off x="685800" y="1490472"/>
+            <a:off x="685800" y="1344168"/>
             <a:ext cx="365760" cy="365760"/>
           </a:xfrm>
           <a:prstGeom prst="ellipse">
@@ -4260,7 +4260,7 @@
         </p:nvSpPr>
         <p:spPr>
           <a:xfrm>
-            <a:off x="685800" y="1490472"/>
+            <a:off x="685800" y="1344168"/>
             <a:ext cx="365760" cy="365760"/>
           </a:xfrm>
           <a:prstGeom prst="rect">
@@ -4296,8 +4296,8 @@
         </p:nvSpPr>
         <p:spPr>
           <a:xfrm>
-            <a:off x="1234440" y="1444752"/>
-            <a:ext cx="1737360" cy="457200"/>
+            <a:off x="1234440" y="1280160"/>
+            <a:ext cx="1554480" cy="493776"/>
           </a:xfrm>
           <a:prstGeom prst="rect">
             <a:avLst/>
@@ -4332,8 +4332,8 @@
         </p:nvSpPr>
         <p:spPr>
           <a:xfrm>
-            <a:off x="3017520" y="1444752"/>
-            <a:ext cx="5440680" cy="457200"/>
+            <a:off x="2834640" y="1280160"/>
+            <a:ext cx="5623560" cy="493776"/>
           </a:xfrm>
           <a:prstGeom prst="rect">
             <a:avLst/>
@@ -4354,7 +4354,7 @@
                   <a:schemeClr val="tx1"/>
                 </a:solidFill>
               </a:rPr>
-              <a:t>Texts a photo of a refrigerated sandwich and wrap platter</a:t>
+              <a:t>Texts a photo of a refrigerated sandwich platter</a:t>
             </a:r>
             <a:endParaRPr lang="en-US" sz="1400" dirty="0"/>
           </a:p>
@@ -4368,12 +4368,12 @@
         </p:nvSpPr>
         <p:spPr>
           <a:xfrm>
-            <a:off x="548640" y="2084832"/>
-            <a:ext cx="8046720" cy="603504"/>
+            <a:off x="548640" y="1865376"/>
+            <a:ext cx="8046720" cy="493776"/>
           </a:xfrm>
           <a:prstGeom prst="roundRect">
             <a:avLst>
-              <a:gd name="adj" fmla="val 18182"/>
+              <a:gd name="adj" fmla="val 22222"/>
             </a:avLst>
           </a:prstGeom>
           <a:solidFill>
@@ -4402,7 +4402,7 @@
         </p:nvSpPr>
         <p:spPr>
           <a:xfrm>
-            <a:off x="685800" y="2203704"/>
+            <a:off x="685800" y="1929384"/>
             <a:ext cx="365760" cy="365760"/>
           </a:xfrm>
           <a:prstGeom prst="ellipse">
@@ -4427,7 +4427,7 @@
         </p:nvSpPr>
         <p:spPr>
           <a:xfrm>
-            <a:off x="685800" y="2203704"/>
+            <a:off x="685800" y="1929384"/>
             <a:ext cx="365760" cy="365760"/>
           </a:xfrm>
           <a:prstGeom prst="rect">
@@ -4463,8 +4463,8 @@
         </p:nvSpPr>
         <p:spPr>
           <a:xfrm>
-            <a:off x="1234440" y="2157984"/>
-            <a:ext cx="1737360" cy="457200"/>
+            <a:off x="1234440" y="1865376"/>
+            <a:ext cx="1554480" cy="493776"/>
           </a:xfrm>
           <a:prstGeom prst="rect">
             <a:avLst/>
@@ -4499,8 +4499,8 @@
         </p:nvSpPr>
         <p:spPr>
           <a:xfrm>
-            <a:off x="3017520" y="2157984"/>
-            <a:ext cx="5440680" cy="457200"/>
+            <a:off x="2834640" y="1865376"/>
+            <a:ext cx="5623560" cy="493776"/>
           </a:xfrm>
           <a:prstGeom prst="rect">
             <a:avLst/>
@@ -4535,12 +4535,12 @@
         </p:nvSpPr>
         <p:spPr>
           <a:xfrm>
-            <a:off x="548640" y="2798064"/>
-            <a:ext cx="8046720" cy="603504"/>
+            <a:off x="548640" y="2450592"/>
+            <a:ext cx="8046720" cy="493776"/>
           </a:xfrm>
           <a:prstGeom prst="roundRect">
             <a:avLst>
-              <a:gd name="adj" fmla="val 18182"/>
+              <a:gd name="adj" fmla="val 22222"/>
             </a:avLst>
           </a:prstGeom>
           <a:solidFill>
@@ -4569,7 +4569,7 @@
         </p:nvSpPr>
         <p:spPr>
           <a:xfrm>
-            <a:off x="685800" y="2916936"/>
+            <a:off x="685800" y="2514600"/>
             <a:ext cx="365760" cy="365760"/>
           </a:xfrm>
           <a:prstGeom prst="ellipse">
@@ -4594,7 +4594,7 @@
         </p:nvSpPr>
         <p:spPr>
           <a:xfrm>
-            <a:off x="685800" y="2916936"/>
+            <a:off x="685800" y="2514600"/>
             <a:ext cx="365760" cy="365760"/>
           </a:xfrm>
           <a:prstGeom prst="rect">
@@ -4630,8 +4630,8 @@
         </p:nvSpPr>
         <p:spPr>
           <a:xfrm>
-            <a:off x="1234440" y="2871216"/>
-            <a:ext cx="1737360" cy="457200"/>
+            <a:off x="1234440" y="2450592"/>
+            <a:ext cx="1554480" cy="493776"/>
           </a:xfrm>
           <a:prstGeom prst="rect">
             <a:avLst/>
@@ -4666,8 +4666,8 @@
         </p:nvSpPr>
         <p:spPr>
           <a:xfrm>
-            <a:off x="3017520" y="2871216"/>
-            <a:ext cx="5440680" cy="457200"/>
+            <a:off x="2834640" y="2450592"/>
+            <a:ext cx="5623560" cy="493776"/>
           </a:xfrm>
           <a:prstGeom prst="rect">
             <a:avLst/>
@@ -4688,7 +4688,7 @@
                   <a:schemeClr val="tx1"/>
                 </a:solidFill>
               </a:rPr>
-              <a:t>Corrects servings to 24, declares all nine allergens, attests handling</a:t>
+              <a:t>Sets servings to 24, declares allergens and handling</a:t>
             </a:r>
             <a:endParaRPr lang="en-US" sz="1400" dirty="0"/>
           </a:p>
@@ -4702,12 +4702,12 @@
         </p:nvSpPr>
         <p:spPr>
           <a:xfrm>
-            <a:off x="548640" y="3511296"/>
-            <a:ext cx="8046720" cy="603504"/>
+            <a:off x="548640" y="3035808"/>
+            <a:ext cx="8046720" cy="493776"/>
           </a:xfrm>
           <a:prstGeom prst="roundRect">
             <a:avLst>
-              <a:gd name="adj" fmla="val 18182"/>
+              <a:gd name="adj" fmla="val 22222"/>
             </a:avLst>
           </a:prstGeom>
           <a:solidFill>
@@ -4736,7 +4736,7 @@
         </p:nvSpPr>
         <p:spPr>
           <a:xfrm>
-            <a:off x="685800" y="3630168"/>
+            <a:off x="685800" y="3099816"/>
             <a:ext cx="365760" cy="365760"/>
           </a:xfrm>
           <a:prstGeom prst="ellipse">
@@ -4761,7 +4761,7 @@
         </p:nvSpPr>
         <p:spPr>
           <a:xfrm>
-            <a:off x="685800" y="3630168"/>
+            <a:off x="685800" y="3099816"/>
             <a:ext cx="365760" cy="365760"/>
           </a:xfrm>
           <a:prstGeom prst="rect">
@@ -4797,8 +4797,8 @@
         </p:nvSpPr>
         <p:spPr>
           <a:xfrm>
-            <a:off x="1234440" y="3584448"/>
-            <a:ext cx="1737360" cy="457200"/>
+            <a:off x="1234440" y="3035808"/>
+            <a:ext cx="1554480" cy="493776"/>
           </a:xfrm>
           <a:prstGeom prst="rect">
             <a:avLst/>
@@ -4833,8 +4833,8 @@
         </p:nvSpPr>
         <p:spPr>
           <a:xfrm>
-            <a:off x="3017520" y="3584448"/>
-            <a:ext cx="5440680" cy="457200"/>
+            <a:off x="2834640" y="3035808"/>
+            <a:ext cx="5623560" cy="493776"/>
           </a:xfrm>
           <a:prstGeom prst="rect">
             <a:avLst/>
@@ -4869,12 +4869,12 @@
         </p:nvSpPr>
         <p:spPr>
           <a:xfrm>
-            <a:off x="548640" y="4224528"/>
-            <a:ext cx="8046720" cy="603504"/>
+            <a:off x="548640" y="3621024"/>
+            <a:ext cx="8046720" cy="493776"/>
           </a:xfrm>
           <a:prstGeom prst="roundRect">
             <a:avLst>
-              <a:gd name="adj" fmla="val 18182"/>
+              <a:gd name="adj" fmla="val 22222"/>
             </a:avLst>
           </a:prstGeom>
           <a:solidFill>
@@ -4903,7 +4903,7 @@
         </p:nvSpPr>
         <p:spPr>
           <a:xfrm>
-            <a:off x="685800" y="4343400"/>
+            <a:off x="685800" y="3685032"/>
             <a:ext cx="365760" cy="365760"/>
           </a:xfrm>
           <a:prstGeom prst="ellipse">
@@ -4928,7 +4928,7 @@
         </p:nvSpPr>
         <p:spPr>
           <a:xfrm>
-            <a:off x="685800" y="4343400"/>
+            <a:off x="685800" y="3685032"/>
             <a:ext cx="365760" cy="365760"/>
           </a:xfrm>
           <a:prstGeom prst="rect">
@@ -4964,8 +4964,8 @@
         </p:nvSpPr>
         <p:spPr>
           <a:xfrm>
-            <a:off x="1234440" y="4297680"/>
-            <a:ext cx="1737360" cy="457200"/>
+            <a:off x="1234440" y="3621024"/>
+            <a:ext cx="1554480" cy="493776"/>
           </a:xfrm>
           <a:prstGeom prst="rect">
             <a:avLst/>
@@ -5000,8 +5000,8 @@
         </p:nvSpPr>
         <p:spPr>
           <a:xfrm>
-            <a:off x="3017520" y="4297680"/>
-            <a:ext cx="5440680" cy="457200"/>
+            <a:off x="2834640" y="3621024"/>
+            <a:ext cx="5623560" cy="493776"/>
           </a:xfrm>
           <a:prstGeom prst="rect">
             <a:avLst/>
@@ -5022,7 +5022,7 @@
                   <a:schemeClr val="tx1"/>
                 </a:solidFill>
               </a:rPr>
-              <a:t>Gets a time-limited offer, replies YES with the code</a:t>
+              <a:t>Gets a timed offer, replies YES with the code</a:t>
             </a:r>
             <a:endParaRPr lang="en-US" sz="1400" dirty="0"/>
           </a:p>
@@ -5036,12 +5036,12 @@
         </p:nvSpPr>
         <p:spPr>
           <a:xfrm>
-            <a:off x="548640" y="4937760"/>
-            <a:ext cx="8046720" cy="603504"/>
+            <a:off x="548640" y="4206240"/>
+            <a:ext cx="8046720" cy="493776"/>
           </a:xfrm>
           <a:prstGeom prst="roundRect">
             <a:avLst>
-              <a:gd name="adj" fmla="val 18182"/>
+              <a:gd name="adj" fmla="val 22222"/>
             </a:avLst>
           </a:prstGeom>
           <a:solidFill>
@@ -5070,7 +5070,7 @@
         </p:nvSpPr>
         <p:spPr>
           <a:xfrm>
-            <a:off x="685800" y="5056632"/>
+            <a:off x="685800" y="4270248"/>
             <a:ext cx="365760" cy="365760"/>
           </a:xfrm>
           <a:prstGeom prst="ellipse">
@@ -5095,7 +5095,7 @@
         </p:nvSpPr>
         <p:spPr>
           <a:xfrm>
-            <a:off x="685800" y="5056632"/>
+            <a:off x="685800" y="4270248"/>
             <a:ext cx="365760" cy="365760"/>
           </a:xfrm>
           <a:prstGeom prst="rect">
@@ -5131,8 +5131,8 @@
         </p:nvSpPr>
         <p:spPr>
           <a:xfrm>
-            <a:off x="1234440" y="5010912"/>
-            <a:ext cx="1737360" cy="457200"/>
+            <a:off x="1234440" y="4206240"/>
+            <a:ext cx="1554480" cy="493776"/>
           </a:xfrm>
           <a:prstGeom prst="rect">
             <a:avLst/>
@@ -5167,8 +5167,8 @@
         </p:nvSpPr>
         <p:spPr>
           <a:xfrm>
-            <a:off x="3017520" y="5010912"/>
-            <a:ext cx="5440680" cy="457200"/>
+            <a:off x="2834640" y="4206240"/>
+            <a:ext cx="5623560" cy="493776"/>
           </a:xfrm>
           <a:prstGeom prst="rect">
             <a:avLst/>
@@ -5189,7 +5189,7 @@
                   <a:schemeClr val="tx1"/>
                 </a:solidFill>
               </a:rPr>
-              <a:t>Claimed. Operator marks simulated pickup and delivery</a:t>
+              <a:t>Claimed; pickup and delivery are simulated</a:t>
             </a:r>
             <a:endParaRPr lang="en-US" sz="1400" dirty="0"/>
           </a:p>
@@ -5311,12 +5311,12 @@
         </p:nvSpPr>
         <p:spPr>
           <a:xfrm>
-            <a:off x="548640" y="1371600"/>
-            <a:ext cx="8046720" cy="603504"/>
+            <a:off x="548640" y="1280160"/>
+            <a:ext cx="8046720" cy="621792"/>
           </a:xfrm>
           <a:prstGeom prst="roundRect">
             <a:avLst>
-              <a:gd name="adj" fmla="val 18182"/>
+              <a:gd name="adj" fmla="val 17647"/>
             </a:avLst>
           </a:prstGeom>
           <a:solidFill>
@@ -5345,7 +5345,7 @@
         </p:nvSpPr>
         <p:spPr>
           <a:xfrm>
-            <a:off x="685800" y="1490472"/>
+            <a:off x="685800" y="1408176"/>
             <a:ext cx="365760" cy="365760"/>
           </a:xfrm>
           <a:prstGeom prst="ellipse">
@@ -5370,7 +5370,7 @@
         </p:nvSpPr>
         <p:spPr>
           <a:xfrm>
-            <a:off x="685800" y="1490472"/>
+            <a:off x="685800" y="1408176"/>
             <a:ext cx="365760" cy="365760"/>
           </a:xfrm>
           <a:prstGeom prst="rect">
@@ -5406,8 +5406,8 @@
         </p:nvSpPr>
         <p:spPr>
           <a:xfrm>
-            <a:off x="1234440" y="1444752"/>
-            <a:ext cx="1737360" cy="457200"/>
+            <a:off x="1234440" y="1280160"/>
+            <a:ext cx="1554480" cy="621792"/>
           </a:xfrm>
           <a:prstGeom prst="rect">
             <a:avLst/>
@@ -5442,8 +5442,8 @@
         </p:nvSpPr>
         <p:spPr>
           <a:xfrm>
-            <a:off x="3017520" y="1444752"/>
-            <a:ext cx="5440680" cy="457200"/>
+            <a:off x="2834640" y="1280160"/>
+            <a:ext cx="5623560" cy="621792"/>
           </a:xfrm>
           <a:prstGeom prst="rect">
             <a:avLst/>
@@ -5478,12 +5478,12 @@
         </p:nvSpPr>
         <p:spPr>
           <a:xfrm>
-            <a:off x="548640" y="2084832"/>
-            <a:ext cx="8046720" cy="603504"/>
+            <a:off x="548640" y="1993392"/>
+            <a:ext cx="8046720" cy="621792"/>
           </a:xfrm>
           <a:prstGeom prst="roundRect">
             <a:avLst>
-              <a:gd name="adj" fmla="val 18182"/>
+              <a:gd name="adj" fmla="val 17647"/>
             </a:avLst>
           </a:prstGeom>
           <a:solidFill>
@@ -5512,7 +5512,7 @@
         </p:nvSpPr>
         <p:spPr>
           <a:xfrm>
-            <a:off x="685800" y="2203704"/>
+            <a:off x="685800" y="2121408"/>
             <a:ext cx="365760" cy="365760"/>
           </a:xfrm>
           <a:prstGeom prst="ellipse">
@@ -5537,7 +5537,7 @@
         </p:nvSpPr>
         <p:spPr>
           <a:xfrm>
-            <a:off x="685800" y="2203704"/>
+            <a:off x="685800" y="2121408"/>
             <a:ext cx="365760" cy="365760"/>
           </a:xfrm>
           <a:prstGeom prst="rect">
@@ -5573,8 +5573,8 @@
         </p:nvSpPr>
         <p:spPr>
           <a:xfrm>
-            <a:off x="1234440" y="2157984"/>
-            <a:ext cx="1737360" cy="457200"/>
+            <a:off x="1234440" y="1993392"/>
+            <a:ext cx="1554480" cy="621792"/>
           </a:xfrm>
           <a:prstGeom prst="rect">
             <a:avLst/>
@@ -5609,8 +5609,8 @@
         </p:nvSpPr>
         <p:spPr>
           <a:xfrm>
-            <a:off x="3017520" y="2157984"/>
-            <a:ext cx="5440680" cy="457200"/>
+            <a:off x="2834640" y="1993392"/>
+            <a:ext cx="5623560" cy="621792"/>
           </a:xfrm>
           <a:prstGeom prst="rect">
             <a:avLst/>
@@ -5645,12 +5645,12 @@
         </p:nvSpPr>
         <p:spPr>
           <a:xfrm>
-            <a:off x="548640" y="2798064"/>
-            <a:ext cx="8046720" cy="603504"/>
+            <a:off x="548640" y="2706624"/>
+            <a:ext cx="8046720" cy="621792"/>
           </a:xfrm>
           <a:prstGeom prst="roundRect">
             <a:avLst>
-              <a:gd name="adj" fmla="val 18182"/>
+              <a:gd name="adj" fmla="val 17647"/>
             </a:avLst>
           </a:prstGeom>
           <a:solidFill>
@@ -5679,7 +5679,7 @@
         </p:nvSpPr>
         <p:spPr>
           <a:xfrm>
-            <a:off x="685800" y="2916936"/>
+            <a:off x="685800" y="2834640"/>
             <a:ext cx="365760" cy="365760"/>
           </a:xfrm>
           <a:prstGeom prst="ellipse">
@@ -5704,7 +5704,7 @@
         </p:nvSpPr>
         <p:spPr>
           <a:xfrm>
-            <a:off x="685800" y="2916936"/>
+            <a:off x="685800" y="2834640"/>
             <a:ext cx="365760" cy="365760"/>
           </a:xfrm>
           <a:prstGeom prst="rect">
@@ -5740,8 +5740,8 @@
         </p:nvSpPr>
         <p:spPr>
           <a:xfrm>
-            <a:off x="1234440" y="2871216"/>
-            <a:ext cx="1737360" cy="457200"/>
+            <a:off x="1234440" y="2706624"/>
+            <a:ext cx="1554480" cy="621792"/>
           </a:xfrm>
           <a:prstGeom prst="rect">
             <a:avLst/>
@@ -5776,8 +5776,8 @@
         </p:nvSpPr>
         <p:spPr>
           <a:xfrm>
-            <a:off x="3017520" y="2871216"/>
-            <a:ext cx="5440680" cy="457200"/>
+            <a:off x="2834640" y="2706624"/>
+            <a:ext cx="5623560" cy="621792"/>
           </a:xfrm>
           <a:prstGeom prst="rect">
             <a:avLst/>
@@ -5812,12 +5812,12 @@
         </p:nvSpPr>
         <p:spPr>
           <a:xfrm>
-            <a:off x="548640" y="3511296"/>
-            <a:ext cx="8046720" cy="603504"/>
+            <a:off x="548640" y="3419856"/>
+            <a:ext cx="8046720" cy="621792"/>
           </a:xfrm>
           <a:prstGeom prst="roundRect">
             <a:avLst>
-              <a:gd name="adj" fmla="val 18182"/>
+              <a:gd name="adj" fmla="val 17647"/>
             </a:avLst>
           </a:prstGeom>
           <a:solidFill>
@@ -5846,7 +5846,7 @@
         </p:nvSpPr>
         <p:spPr>
           <a:xfrm>
-            <a:off x="685800" y="3630168"/>
+            <a:off x="685800" y="3547872"/>
             <a:ext cx="365760" cy="365760"/>
           </a:xfrm>
           <a:prstGeom prst="ellipse">
@@ -5871,7 +5871,7 @@
         </p:nvSpPr>
         <p:spPr>
           <a:xfrm>
-            <a:off x="685800" y="3630168"/>
+            <a:off x="685800" y="3547872"/>
             <a:ext cx="365760" cy="365760"/>
           </a:xfrm>
           <a:prstGeom prst="rect">
@@ -5907,8 +5907,8 @@
         </p:nvSpPr>
         <p:spPr>
           <a:xfrm>
-            <a:off x="1234440" y="3584448"/>
-            <a:ext cx="1737360" cy="457200"/>
+            <a:off x="1234440" y="3419856"/>
+            <a:ext cx="1554480" cy="621792"/>
           </a:xfrm>
           <a:prstGeom prst="rect">
             <a:avLst/>
@@ -5943,8 +5943,8 @@
         </p:nvSpPr>
         <p:spPr>
           <a:xfrm>
-            <a:off x="3017520" y="3584448"/>
-            <a:ext cx="5440680" cy="457200"/>
+            <a:off x="2834640" y="3419856"/>
+            <a:ext cx="5623560" cy="621792"/>
           </a:xfrm>
           <a:prstGeom prst="rect">
             <a:avLst/>

--- a/docs/demo/annona-demo.pptx
+++ b/docs/demo/annona-demo.pptx
@@ -14,10 +14,9 @@
     <p:sldId id="262" r:id="rId8"/>
     <p:sldId id="263" r:id="rId9"/>
     <p:sldId id="264" r:id="rId10"/>
-    <p:sldId id="265" r:id="rId11"/>
   </p:sldIdLst>
   <p:notesMasterIdLst>
-    <p:notesMasterId r:id="rId12"/>
+    <p:notesMasterId r:id="rId11"/>
   </p:notesMasterIdLst>
   <p:sldSz cx="9144000" cy="5143500"/>
   <p:notesSz cx="5143500" cy="9144000"/>
@@ -116,34 +115,29 @@
   <p:extLst>
     <p:ext uri="{521415D9-36F7-43E2-AB2F-B90AF26B5E84}">
       <p14:sectionLst xmlns:p14="http://schemas.microsoft.com/office/powerpoint/2010/main">
-        <p14:section name="Open" id="{ca4be1c7-52bb-df26-26e3-12f58b4cab98}">
+        <p14:section name="Open" id="{31503e6a-c0a9-b45e-871f-d25fc5a281d1}">
           <p14:sldIdLst>
             <p14:sldId id="256"/>
           </p14:sldIdLst>
         </p14:section>
-        <p14:section name="Why" id="{25b07e98-9a4d-a916-9ab6-34323fabea8c}">
+        <p14:section name="Product" id="{d57975f8-533c-6fe8-6b07-2aead1b6bc41}">
           <p14:sldIdLst>
             <p14:sldId id="257"/>
+            <p14:sldId id="258"/>
           </p14:sldIdLst>
         </p14:section>
-        <p14:section name="Product" id="{62f31ac0-1db9-7840-868f-ab063708fe85}">
+        <p14:section name="Live demo" id="{569afb3e-0c10-a618-e032-5b26c5c8c3d9}">
           <p14:sldIdLst>
-            <p14:sldId id="258"/>
             <p14:sldId id="259"/>
+            <p14:sldId id="260"/>
+            <p14:sldId id="261"/>
           </p14:sldIdLst>
         </p14:section>
-        <p14:section name="Live demo" id="{46ddf84a-f71b-81af-e14f-bcfed1aa1fac}">
+        <p14:section name="Honesty" id="{ca600705-0c72-5d3f-5e6f-0cba324419be}">
           <p14:sldIdLst>
-            <p14:sldId id="260"/>
-            <p14:sldId id="261"/>
             <p14:sldId id="262"/>
-          </p14:sldIdLst>
-        </p14:section>
-        <p14:section name="Honesty" id="{cc02bf23-0260-b580-b7b7-9f7ddd3a562e}">
-          <p14:sldIdLst>
             <p14:sldId id="263"/>
             <p14:sldId id="264"/>
-            <p14:sldId id="265"/>
           </p14:sldIdLst>
         </p14:section>
       </p14:sectionLst>
@@ -592,94 +586,6 @@
 </p:notes>
 </file>
 
-<file path=ppt/notesSlides/notesSlide10.xml><?xml version="1.0" encoding="utf-8"?>
-<p:notes xmlns:a="http://schemas.openxmlformats.org/drawingml/2006/main" xmlns:r="http://schemas.openxmlformats.org/officeDocument/2006/relationships" xmlns:p="http://schemas.openxmlformats.org/presentationml/2006/main">
-  <p:cSld>
-    <p:spTree>
-      <p:nvGrpSpPr>
-        <p:cNvPr id="1" name=""/>
-        <p:cNvGrpSpPr/>
-        <p:nvPr/>
-      </p:nvGrpSpPr>
-      <p:grpSpPr>
-        <a:xfrm>
-          <a:off x="0" y="0"/>
-          <a:ext cx="0" cy="0"/>
-          <a:chOff x="0" y="0"/>
-          <a:chExt cx="0" cy="0"/>
-        </a:xfrm>
-      </p:grpSpPr>
-      <p:sp>
-        <p:nvSpPr>
-          <p:cNvPr id="2" name="Slide Image Placeholder 1"/>
-          <p:cNvSpPr>
-            <a:spLocks noGrp="1" noRot="1" noChangeAspect="1"/>
-          </p:cNvSpPr>
-          <p:nvPr>
-            <p:ph type="sldImg"/>
-          </p:nvPr>
-        </p:nvSpPr>
-        <p:spPr/>
-      </p:sp>
-      <p:sp>
-        <p:nvSpPr>
-          <p:cNvPr id="3" name="Notes Placeholder 2"/>
-          <p:cNvSpPr>
-            <a:spLocks noGrp="1"/>
-          </p:cNvSpPr>
-          <p:nvPr>
-            <p:ph type="body" idx="1"/>
-          </p:nvPr>
-        </p:nvSpPr>
-        <p:spPr/>
-        <p:txBody>
-          <a:bodyPr/>
-          <a:lstStyle/>
-          <a:p>
-            <a:r>
-              <a:rPr lang="en-US" dirty="0"/>
-              <a:t>Close on the principle, restate it is a prototype with synthetic data, and invite questions.</a:t>
-            </a:r>
-            <a:endParaRPr lang="en-US" dirty="0"/>
-          </a:p>
-        </p:txBody>
-      </p:sp>
-      <p:sp>
-        <p:nvSpPr>
-          <p:cNvPr id="4" name="Slide Number Placeholder 3"/>
-          <p:cNvSpPr>
-            <a:spLocks noGrp="1"/>
-          </p:cNvSpPr>
-          <p:nvPr>
-            <p:ph type="sldNum" sz="quarter" idx="10"/>
-          </p:nvPr>
-        </p:nvSpPr>
-        <p:spPr/>
-        <p:txBody>
-          <a:bodyPr/>
-          <a:lstStyle/>
-          <a:p>
-            <a:fld id="{F7021451-1387-4CA6-816F-3879F97B5CBC}" type="slidenum">
-              <a:rPr lang="en-US"/>
-              <a:t>10</a:t>
-            </a:fld>
-            <a:endParaRPr lang="en-US"/>
-          </a:p>
-        </p:txBody>
-      </p:sp>
-    </p:spTree>
-    <p:extLst>
-      <p:ext uri="{BB962C8B-B14F-4D97-AF65-F5344CB8AC3E}">
-        <p14:creationId xmlns:p14="http://schemas.microsoft.com/office/powerpoint/2010/main" val="1024086991"/>
-      </p:ext>
-    </p:extLst>
-  </p:cSld>
-  <p:clrMapOvr>
-    <a:masterClrMapping/>
-  </p:clrMapOvr>
-</p:notes>
-</file>
-
 <file path=ppt/notesSlides/notesSlide2.xml><?xml version="1.0" encoding="utf-8"?>
 <p:notes xmlns:a="http://schemas.openxmlformats.org/drawingml/2006/main" xmlns:r="http://schemas.openxmlformats.org/officeDocument/2006/relationships" xmlns:p="http://schemas.openxmlformats.org/presentationml/2006/main">
   <p:cSld>
@@ -726,7 +632,7 @@
           <a:p>
             <a:r>
               <a:rPr lang="en-US" dirty="0"/>
-              <a:t>Frame the problem as small, time-boxed, last-minute lots. Be careful: say 'may miss', this is an assumption we have not validated. 30 seconds.</a:t>
+              <a:t>Walk left to right. The gate in the middle is deterministic code, not the AI. 30 seconds.</a:t>
             </a:r>
             <a:endParaRPr lang="en-US" dirty="0"/>
           </a:p>
@@ -814,7 +720,7 @@
           <a:p>
             <a:r>
               <a:rPr lang="en-US" dirty="0"/>
-              <a:t>Walk left to right. The gate in the middle is deterministic code, not the AI. 30 seconds.</a:t>
+              <a:t>This is the safety story. No photo or model output ever establishes food safety or allergen freedom. 30 seconds.</a:t>
             </a:r>
             <a:endParaRPr lang="en-US" dirty="0"/>
           </a:p>
@@ -902,7 +808,7 @@
           <a:p>
             <a:r>
               <a:rPr lang="en-US" dirty="0"/>
-              <a:t>This is the safety story. No photo or model output ever establishes food safety or allergen freedom. 30 seconds.</a:t>
+              <a:t>Rainier Catering (synthetic) -&gt; Eastlake Community Pantry (synthetic). Point out the AI estimate of 18-30 servings versus the donor's 24. Fallback: same photo through web upload. Handoff steps are simulated and labeled. 90 seconds.</a:t>
             </a:r>
             <a:endParaRPr lang="en-US" dirty="0"/>
           </a:p>
@@ -990,7 +896,7 @@
           <a:p>
             <a:r>
               <a:rPr lang="en-US" dirty="0"/>
-              <a:t>Rainier Catering (synthetic) -&gt; Eastlake Community Pantry (synthetic). Point out the AI estimate of 18-30 servings versus the donor's 24. Fallback: same photo through web upload. Handoff steps are simulated and labeled. 90 seconds.</a:t>
+              <a:t>Timers are accelerated and labeled DEMO on screen. The point: deadlines are enforced by the server, and a late or repeated YES cannot create a second assignment. 45 seconds.</a:t>
             </a:r>
             <a:endParaRPr lang="en-US" dirty="0"/>
           </a:p>
@@ -1078,7 +984,7 @@
           <a:p>
             <a:r>
               <a:rPr lang="en-US" dirty="0"/>
-              <a:t>Timers are accelerated and labeled DEMO on screen. The point: deadlines are enforced by the server, and a late or repeated YES cannot create a second assignment. 45 seconds.</a:t>
+              <a:t>This is the scene that earns trust. The tray looks great but the facts are unknown, so the system refuses to dispatch. Optional fourth scene: a previously served buffet tray is rejected. 45 seconds.</a:t>
             </a:r>
             <a:endParaRPr lang="en-US" dirty="0"/>
           </a:p>
@@ -1166,7 +1072,7 @@
           <a:p>
             <a:r>
               <a:rPr lang="en-US" dirty="0"/>
-              <a:t>This is the scene that earns trust. The tray looks great but the facts are unknown, so the system refuses to dispatch. Optional fourth scene: a previously served buffet tray is rejected. 45 seconds.</a:t>
+              <a:t>Source: docs/handoffs/dev-1.md (Gemini on Vertex, real HEIC), dev-3.md (Photon SP-1, SP-14). BEFORE PRESENTING: confirm the real-Postgres claim race test (T-CO-17) status in PROJECT_STATE and add 'claims are race-safe' only if it passed. Update this slide if a provider ends up in fake mode on demo day.</a:t>
             </a:r>
             <a:endParaRPr lang="en-US" dirty="0"/>
           </a:p>
@@ -1254,7 +1160,7 @@
           <a:p>
             <a:r>
               <a:rPr lang="en-US" dirty="0"/>
-              <a:t>Source: docs/handoffs/dev-1.md (Gemini on Vertex, real HEIC), dev-3.md (Photon SP-1, SP-14). BEFORE PRESENTING: confirm the real-Postgres claim race test (T-CO-17) status in PROJECT_STATE and add 'claims are race-safe' only if it passed. Update this slide if a provider ends up in fake mode on demo day.</a:t>
+              <a:t>Only claim tracks we genuinely use. Do not add VEYZL or SideShift here unless the evidence exists (see CLAUDE.md sponsor claims). 20 seconds.</a:t>
             </a:r>
             <a:endParaRPr lang="en-US" dirty="0"/>
           </a:p>
@@ -1342,7 +1248,7 @@
           <a:p>
             <a:r>
               <a:rPr lang="en-US" dirty="0"/>
-              <a:t>Only claim tracks we genuinely use. Do not add VEYZL or SideShift here unless the evidence exists (see CLAUDE.md sponsor claims). 20 seconds.</a:t>
+              <a:t>Close on the principle, restate it is a prototype with synthetic data, and invite questions.</a:t>
             </a:r>
             <a:endParaRPr lang="en-US" dirty="0"/>
           </a:p>
@@ -1948,9 +1854,36 @@
           <a:chExt cx="0" cy="0"/>
         </a:xfrm>
       </p:grpSpPr>
+      <p:sp>
+        <p:nvSpPr>
+          <p:cNvPr id="2" name="logo-card"/>
+          <p:cNvSpPr/>
+          <p:nvPr/>
+        </p:nvSpPr>
+        <p:spPr>
+          <a:xfrm>
+            <a:off x="5852160" y="1097280"/>
+            <a:ext cx="2651760" cy="2154156"/>
+          </a:xfrm>
+          <a:prstGeom prst="roundRect">
+            <a:avLst>
+              <a:gd name="adj" fmla="val 5943"/>
+            </a:avLst>
+          </a:prstGeom>
+          <a:solidFill>
+            <a:schemeClr val="bg1"/>
+          </a:solidFill>
+          <a:ln w="12700">
+            <a:solidFill>
+              <a:schemeClr val="bg1"/>
+            </a:solidFill>
+            <a:prstDash val="solid"/>
+          </a:ln>
+        </p:spPr>
+      </p:sp>
       <p:pic>
         <p:nvPicPr>
-          <p:cNvPr id="2" name="Image 0" descr="Annona leaf mark">    </p:cNvPr>
+          <p:cNvPr id="3" name="Image 0" descr="Annona logo">    </p:cNvPr>
           <p:cNvPicPr>
             <a:picLocks noChangeAspect="1"/>
           </p:cNvPicPr>
@@ -1964,8 +1897,8 @@
         </p:blipFill>
         <p:spPr>
           <a:xfrm>
-            <a:off x="640080" y="1051560"/>
-            <a:ext cx="640080" cy="640080"/>
+            <a:off x="5989320" y="1234440"/>
+            <a:ext cx="2377440" cy="1879836"/>
           </a:xfrm>
           <a:prstGeom prst="rect">
             <a:avLst/>
@@ -1974,14 +1907,14 @@
       </p:pic>
       <p:sp>
         <p:nvSpPr>
-          <p:cNvPr id="3" name="Text 0"/>
+          <p:cNvPr id="4" name="Text 1"/>
           <p:cNvSpPr txBox="1"/>
           <p:nvPr/>
         </p:nvSpPr>
         <p:spPr>
           <a:xfrm>
-            <a:off x="640080" y="1783080"/>
-            <a:ext cx="7315200" cy="1005840"/>
+            <a:off x="640080" y="1371600"/>
+            <a:ext cx="4937760" cy="1005840"/>
           </a:xfrm>
           <a:prstGeom prst="rect">
             <a:avLst/>
@@ -2013,48 +1946,48 @@
       </p:sp>
       <p:sp>
         <p:nvSpPr>
-          <p:cNvPr id="4" name="Text 1"/>
-          <p:cNvSpPr txBox="1"/>
-          <p:nvPr/>
-        </p:nvSpPr>
-        <p:spPr>
-          <a:xfrm>
-            <a:off x="640080" y="2788920"/>
-            <a:ext cx="7315200" cy="457200"/>
-          </a:xfrm>
-          <a:prstGeom prst="rect">
-            <a:avLst/>
-          </a:prstGeom>
-          <a:noFill/>
-          <a:ln/>
-        </p:spPr>
-        <p:txBody>
-          <a:bodyPr wrap="square" lIns="0" tIns="0" rIns="0" bIns="0" rtlCol="0" anchor="ctr"/>
-          <a:lstStyle/>
-          <a:p>
-            <a:pPr indent="0" marL="0">
-              <a:buNone/>
-            </a:pPr>
-            <a:r>
-              <a:rPr lang="en-US" sz="2400" dirty="0">
-                <a:solidFill>
-                  <a:schemeClr val="accent3"/>
-                </a:solidFill>
-              </a:rPr>
-              <a:t>Surplus food, routed responsibly.</a:t>
-            </a:r>
-            <a:endParaRPr lang="en-US" sz="2400" dirty="0"/>
-          </a:p>
-        </p:txBody>
-      </p:sp>
-      <p:sp>
-        <p:nvSpPr>
           <p:cNvPr id="5" name="Text 2"/>
           <p:cNvSpPr txBox="1"/>
           <p:nvPr/>
         </p:nvSpPr>
         <p:spPr>
           <a:xfrm>
+            <a:off x="640080" y="2377440"/>
+            <a:ext cx="4937760" cy="822960"/>
+          </a:xfrm>
+          <a:prstGeom prst="rect">
+            <a:avLst/>
+          </a:prstGeom>
+          <a:noFill/>
+          <a:ln/>
+        </p:spPr>
+        <p:txBody>
+          <a:bodyPr wrap="square" lIns="0" tIns="0" rIns="0" bIns="0" rtlCol="0" anchor="t"/>
+          <a:lstStyle/>
+          <a:p>
+            <a:pPr indent="0" marL="0">
+              <a:buNone/>
+            </a:pPr>
+            <a:r>
+              <a:rPr lang="en-US" sz="2400" dirty="0">
+                <a:solidFill>
+                  <a:schemeClr val="accent3"/>
+                </a:solidFill>
+              </a:rPr>
+              <a:t>Surplus food, routed responsibly.</a:t>
+            </a:r>
+            <a:endParaRPr lang="en-US" sz="2400" dirty="0"/>
+          </a:p>
+        </p:txBody>
+      </p:sp>
+      <p:sp>
+        <p:nvSpPr>
+          <p:cNvPr id="6" name="Text 3"/>
+          <p:cNvSpPr txBox="1"/>
+          <p:nvPr/>
+        </p:nvSpPr>
+        <p:spPr>
+          <a:xfrm>
             <a:off x="640080" y="3429000"/>
             <a:ext cx="6949440" cy="548640"/>
           </a:xfrm>
@@ -2085,7 +2018,7 @@
       </p:sp>
       <p:sp>
         <p:nvSpPr>
-          <p:cNvPr id="6" name="Text 3"/>
+          <p:cNvPr id="7" name="Text 4"/>
           <p:cNvSpPr txBox="1"/>
           <p:nvPr/>
         </p:nvSpPr>
@@ -2159,211 +2092,6 @@
             <a:fld id="{F7021451-1387-4CA6-816F-3879F97B5CBC}" type="slidenum">
               <a:rPr b="0" lang="en-US"/>
               <a:t>1</a:t>
-            </a:fld>
-            <a:endParaRPr lang="en-US"/>
-          </a:p>
-        </p:txBody>
-      </p:sp>
-    </p:spTree>
-  </p:cSld>
-  <p:clrMapOvr>
-    <a:masterClrMapping/>
-  </p:clrMapOvr>
-</p:sld>
-</file>
-
-<file path=ppt/slides/slide10.xml><?xml version="1.0" encoding="utf-8"?>
-<p:sld xmlns:a="http://schemas.openxmlformats.org/drawingml/2006/main" xmlns:r="http://schemas.openxmlformats.org/officeDocument/2006/relationships" xmlns:p="http://schemas.openxmlformats.org/presentationml/2006/main">
-  <p:cSld name="Slide 10">
-    <p:spTree>
-      <p:nvGrpSpPr>
-        <p:cNvPr id="1" name=""/>
-        <p:cNvGrpSpPr/>
-        <p:nvPr/>
-      </p:nvGrpSpPr>
-      <p:grpSpPr>
-        <a:xfrm>
-          <a:off x="0" y="0"/>
-          <a:ext cx="0" cy="0"/>
-          <a:chOff x="0" y="0"/>
-          <a:chExt cx="0" cy="0"/>
-        </a:xfrm>
-      </p:grpSpPr>
-      <p:pic>
-        <p:nvPicPr>
-          <p:cNvPr id="2" name="Image 0" descr="Annona leaf mark">    </p:cNvPr>
-          <p:cNvPicPr>
-            <a:picLocks noChangeAspect="1"/>
-          </p:cNvPicPr>
-          <p:nvPr/>
-        </p:nvPicPr>
-        <p:blipFill>
-          <a:blip r:embed="rId1"/>
-          <a:stretch>
-            <a:fillRect/>
-          </a:stretch>
-        </p:blipFill>
-        <p:spPr>
-          <a:xfrm>
-            <a:off x="640080" y="1097280"/>
-            <a:ext cx="548640" cy="548640"/>
-          </a:xfrm>
-          <a:prstGeom prst="rect">
-            <a:avLst/>
-          </a:prstGeom>
-        </p:spPr>
-      </p:pic>
-      <p:sp>
-        <p:nvSpPr>
-          <p:cNvPr id="3" name="Text 0"/>
-          <p:cNvSpPr txBox="1"/>
-          <p:nvPr/>
-        </p:nvSpPr>
-        <p:spPr>
-          <a:xfrm>
-            <a:off x="640080" y="1828800"/>
-            <a:ext cx="7680960" cy="1280160"/>
-          </a:xfrm>
-          <a:prstGeom prst="rect">
-            <a:avLst/>
-          </a:prstGeom>
-          <a:noFill/>
-          <a:ln/>
-        </p:spPr>
-        <p:txBody>
-          <a:bodyPr wrap="square" lIns="0" tIns="0" rIns="0" bIns="0" rtlCol="0" anchor="t"/>
-          <a:lstStyle/>
-          <a:p>
-            <a:pPr indent="0" marL="0">
-              <a:buNone/>
-            </a:pPr>
-            <a:r>
-              <a:rPr lang="en-US" sz="3600" b="1" dirty="0">
-                <a:solidFill>
-                  <a:schemeClr val="bg1"/>
-                </a:solidFill>
-                <a:latin typeface="Cambria" pitchFamily="34" charset="0"/>
-                <a:ea typeface="Cambria" pitchFamily="34" charset="-122"/>
-                <a:cs typeface="Cambria" pitchFamily="34" charset="-120"/>
-              </a:rPr>
-              <a:t>Fast when it is safe. Stopped when it is not.</a:t>
-            </a:r>
-            <a:endParaRPr lang="en-US" sz="3600" dirty="0"/>
-          </a:p>
-        </p:txBody>
-      </p:sp>
-      <p:sp>
-        <p:nvSpPr>
-          <p:cNvPr id="4" name="Text 1"/>
-          <p:cNvSpPr txBox="1"/>
-          <p:nvPr/>
-        </p:nvSpPr>
-        <p:spPr>
-          <a:xfrm>
-            <a:off x="640080" y="3291840"/>
-            <a:ext cx="7498080" cy="457200"/>
-          </a:xfrm>
-          <a:prstGeom prst="rect">
-            <a:avLst/>
-          </a:prstGeom>
-          <a:noFill/>
-          <a:ln/>
-        </p:spPr>
-        <p:txBody>
-          <a:bodyPr wrap="square" lIns="0" tIns="0" rIns="0" bIns="0" rtlCol="0" anchor="ctr"/>
-          <a:lstStyle/>
-          <a:p>
-            <a:pPr indent="0" marL="0">
-              <a:buNone/>
-            </a:pPr>
-            <a:r>
-              <a:rPr lang="en-US" sz="1800" dirty="0">
-                <a:solidFill>
-                  <a:schemeClr val="accent3"/>
-                </a:solidFill>
-              </a:rPr>
-              <a:t>Next: partner and food-safety review before any real deployment.</a:t>
-            </a:r>
-            <a:endParaRPr lang="en-US" sz="1800" dirty="0"/>
-          </a:p>
-        </p:txBody>
-      </p:sp>
-      <p:sp>
-        <p:nvSpPr>
-          <p:cNvPr id="5" name="Text 2"/>
-          <p:cNvSpPr txBox="1"/>
-          <p:nvPr/>
-        </p:nvSpPr>
-        <p:spPr>
-          <a:xfrm>
-            <a:off x="640080" y="4114800"/>
-            <a:ext cx="5486400" cy="365760"/>
-          </a:xfrm>
-          <a:prstGeom prst="rect">
-            <a:avLst/>
-          </a:prstGeom>
-          <a:noFill/>
-          <a:ln/>
-        </p:spPr>
-        <p:txBody>
-          <a:bodyPr wrap="square" lIns="0" tIns="0" rIns="0" bIns="0" rtlCol="0" anchor="ctr"/>
-          <a:lstStyle/>
-          <a:p>
-            <a:pPr indent="0" marL="0">
-              <a:buNone/>
-            </a:pPr>
-            <a:r>
-              <a:rPr lang="en-US" sz="1600" dirty="0">
-                <a:solidFill>
-                  <a:schemeClr val="bg2"/>
-                </a:solidFill>
-              </a:rPr>
-              <a:t>Thank you. Questions?</a:t>
-            </a:r>
-            <a:endParaRPr lang="en-US" sz="1600" dirty="0"/>
-          </a:p>
-        </p:txBody>
-      </p:sp>
-      <p:sp>
-        <p:nvSpPr>
-          <p:cNvPr id="25" name="Slide Number Placeholder 0"/>
-          <p:cNvSpPr>
-            <a:spLocks noGrp="1"/>
-          </p:cNvSpPr>
-          <p:nvPr>
-            <p:ph type="sldNum" sz="quarter" idx="4294967295"/>
-          </p:nvPr>
-        </p:nvSpPr>
-        <p:spPr>
-          <a:xfrm>
-            <a:off x="8412480" y="4754880"/>
-            <a:ext cx="457200" cy="274320"/>
-          </a:xfrm>
-          <a:prstGeom prst="rect">
-            <a:avLst/>
-          </a:prstGeom>
-          <a:extLst>
-            <a:ext uri="{C572A759-6A51-4108-AA02-DFA0A04FC94B}">
-              <ma14:wrappingTextBoxFlag xmlns:ma14="http://schemas.microsoft.com/office/mac/drawingml/2011/main" val="0"/>
-            </a:ext>
-          </a:extLst>
-        </p:spPr>
-        <p:txBody>
-          <a:bodyPr/>
-          <a:lstStyle>
-            <a:lvl1pPr>
-              <a:defRPr sz="1000">
-                <a:solidFill>
-                  <a:schemeClr val="accent5"/>
-                </a:solidFill>
-              </a:defRPr>
-            </a:lvl1pPr>
-          </a:lstStyle>
-          <a:p>
-            <a:pPr algn="r"/>
-            <a:fld id="{F7021451-1387-4CA6-816F-3879F97B5CBC}" type="slidenum">
-              <a:rPr b="0" lang="en-US"/>
-              <a:t>10</a:t>
             </a:fld>
             <a:endParaRPr lang="en-US"/>
           </a:p>
@@ -2426,7 +2154,7 @@
                   <a:schemeClr val="tx2"/>
                 </a:solidFill>
               </a:rPr>
-              <a:t>Small lots fall through the cracks</a:t>
+              <a:t>One flow, five steps</a:t>
             </a:r>
             <a:endParaRPr lang="en-US" sz="3000" dirty="0"/>
           </a:p>
@@ -2434,48 +2162,14 @@
       </p:sp>
       <p:sp>
         <p:nvSpPr>
-          <p:cNvPr id="3" name="problem-card-1"/>
+          <p:cNvPr id="3" name="step-icon-bg-1"/>
           <p:cNvSpPr/>
           <p:nvPr/>
         </p:nvSpPr>
         <p:spPr>
           <a:xfrm>
-            <a:off x="548640" y="1463040"/>
-            <a:ext cx="2560320" cy="2834640"/>
-          </a:xfrm>
-          <a:prstGeom prst="roundRect">
-            <a:avLst>
-              <a:gd name="adj" fmla="val 4286"/>
-            </a:avLst>
-          </a:prstGeom>
-          <a:solidFill>
-            <a:schemeClr val="bg1"/>
-          </a:solidFill>
-          <a:ln w="12700">
-            <a:solidFill>
-              <a:schemeClr val="bg1"/>
-            </a:solidFill>
-            <a:prstDash val="solid"/>
-          </a:ln>
-          <a:effectLst>
-            <a:outerShdw sx="100000" sy="100000" kx="0" ky="0" algn="bl" rotWithShape="0" blurRad="101600" dist="25400" dir="5400000">
-              <a:srgbClr val="17301F">
-                <a:alpha val="12000"/>
-              </a:srgbClr>
-            </a:outerShdw>
-          </a:effectLst>
-        </p:spPr>
-      </p:sp>
-      <p:sp>
-        <p:nvSpPr>
-          <p:cNvPr id="4" name="problem-icon-bg-1"/>
-          <p:cNvSpPr/>
-          <p:nvPr/>
-        </p:nvSpPr>
-        <p:spPr>
-          <a:xfrm>
-            <a:off x="777240" y="1691640"/>
-            <a:ext cx="640080" cy="640080"/>
+            <a:off x="859536" y="1554480"/>
+            <a:ext cx="822960" cy="822960"/>
           </a:xfrm>
           <a:prstGeom prst="ellipse">
             <a:avLst/>
@@ -2493,7 +2187,7 @@
       </p:sp>
       <p:pic>
         <p:nvPicPr>
-          <p:cNvPr id="5" name="Image 0" descr="Minutes, not days">    </p:cNvPr>
+          <p:cNvPr id="4" name="Image 0" descr="Photo">    </p:cNvPr>
           <p:cNvPicPr>
             <a:picLocks noChangeAspect="1"/>
           </p:cNvPicPr>
@@ -2507,8 +2201,8 @@
         </p:blipFill>
         <p:spPr>
           <a:xfrm>
-            <a:off x="941832" y="1856232"/>
-            <a:ext cx="310896" cy="310896"/>
+            <a:off x="1088136" y="1783080"/>
+            <a:ext cx="365760" cy="365760"/>
           </a:xfrm>
           <a:prstGeom prst="rect">
             <a:avLst/>
@@ -2517,14 +2211,14 @@
       </p:pic>
       <p:sp>
         <p:nvSpPr>
-          <p:cNvPr id="6" name="Text 3"/>
+          <p:cNvPr id="5" name="Text 2"/>
           <p:cNvSpPr txBox="1"/>
           <p:nvPr/>
         </p:nvSpPr>
         <p:spPr>
           <a:xfrm>
-            <a:off x="777240" y="2468880"/>
-            <a:ext cx="2103120" cy="457200"/>
+            <a:off x="548640" y="2606040"/>
+            <a:ext cx="1444752" cy="365760"/>
           </a:xfrm>
           <a:prstGeom prst="rect">
             <a:avLst/>
@@ -2536,7 +2230,7 @@
           <a:bodyPr wrap="square" lIns="0" tIns="0" rIns="0" bIns="0" rtlCol="0" anchor="ctr"/>
           <a:lstStyle/>
           <a:p>
-            <a:pPr indent="0" marL="0">
+            <a:pPr algn="ctr" indent="0" marL="0">
               <a:buNone/>
             </a:pPr>
             <a:r>
@@ -2548,7 +2242,7 @@
                 <a:ea typeface="Cambria" pitchFamily="34" charset="-122"/>
                 <a:cs typeface="Cambria" pitchFamily="34" charset="-120"/>
               </a:rPr>
-              <a:t>Minutes, not days</a:t>
+              <a:t>1  Photo</a:t>
             </a:r>
             <a:endParaRPr lang="en-US" sz="1800" dirty="0"/>
           </a:p>
@@ -2556,14 +2250,14 @@
       </p:sp>
       <p:sp>
         <p:nvSpPr>
-          <p:cNvPr id="7" name="Text 4"/>
+          <p:cNvPr id="6" name="Text 3"/>
           <p:cNvSpPr txBox="1"/>
           <p:nvPr/>
         </p:nvSpPr>
         <p:spPr>
           <a:xfrm>
-            <a:off x="777240" y="2971800"/>
-            <a:ext cx="2103120" cy="1234440"/>
+            <a:off x="548640" y="3017520"/>
+            <a:ext cx="1444752" cy="822960"/>
           </a:xfrm>
           <a:prstGeom prst="rect">
             <a:avLst/>
@@ -2575,7 +2269,7 @@
           <a:bodyPr wrap="square" lIns="0" tIns="0" rIns="0" bIns="0" rtlCol="0" anchor="t"/>
           <a:lstStyle/>
           <a:p>
-            <a:pPr indent="0" marL="0">
+            <a:pPr algn="ctr" indent="0" marL="0">
               <a:buNone/>
             </a:pPr>
             <a:r>
@@ -2584,7 +2278,7 @@
                   <a:schemeClr val="tx1"/>
                 </a:solidFill>
               </a:rPr>
-              <a:t>A licensed kitchen ends an event with refrigerated trays and a short handover window. Scheduled rescue routes may miss last-minute lots.</a:t>
+              <a:t>Donor texts a photo</a:t>
             </a:r>
             <a:endParaRPr lang="en-US" sz="1400" dirty="0"/>
           </a:p>
@@ -2592,48 +2286,14 @@
       </p:sp>
       <p:sp>
         <p:nvSpPr>
-          <p:cNvPr id="8" name="problem-card-2"/>
+          <p:cNvPr id="7" name="step-icon-bg-2"/>
           <p:cNvSpPr/>
           <p:nvPr/>
         </p:nvSpPr>
         <p:spPr>
           <a:xfrm>
-            <a:off x="3291840" y="1463040"/>
-            <a:ext cx="2560320" cy="2834640"/>
-          </a:xfrm>
-          <a:prstGeom prst="roundRect">
-            <a:avLst>
-              <a:gd name="adj" fmla="val 4286"/>
-            </a:avLst>
-          </a:prstGeom>
-          <a:solidFill>
-            <a:schemeClr val="bg1"/>
-          </a:solidFill>
-          <a:ln w="12700">
-            <a:solidFill>
-              <a:schemeClr val="bg1"/>
-            </a:solidFill>
-            <a:prstDash val="solid"/>
-          </a:ln>
-          <a:effectLst>
-            <a:outerShdw sx="100000" sy="100000" kx="0" ky="0" algn="bl" rotWithShape="0" blurRad="101600" dist="25400" dir="5400000">
-              <a:srgbClr val="17301F">
-                <a:alpha val="12000"/>
-              </a:srgbClr>
-            </a:outerShdw>
-          </a:effectLst>
-        </p:spPr>
-      </p:sp>
-      <p:sp>
-        <p:nvSpPr>
-          <p:cNvPr id="9" name="problem-icon-bg-2"/>
-          <p:cNvSpPr/>
-          <p:nvPr/>
-        </p:nvSpPr>
-        <p:spPr>
-          <a:xfrm>
-            <a:off x="3520440" y="1691640"/>
-            <a:ext cx="640080" cy="640080"/>
+            <a:off x="2487168" y="1554480"/>
+            <a:ext cx="822960" cy="822960"/>
           </a:xfrm>
           <a:prstGeom prst="ellipse">
             <a:avLst/>
@@ -2651,7 +2311,7 @@
       </p:sp>
       <p:pic>
         <p:nvPicPr>
-          <p:cNvPr id="10" name="Image 1" descr="A photo is not a fact">    </p:cNvPr>
+          <p:cNvPr id="8" name="Image 1" descr="AI draft">    </p:cNvPr>
           <p:cNvPicPr>
             <a:picLocks noChangeAspect="1"/>
           </p:cNvPicPr>
@@ -2665,8 +2325,8 @@
         </p:blipFill>
         <p:spPr>
           <a:xfrm>
-            <a:off x="3685032" y="1856232"/>
-            <a:ext cx="310896" cy="310896"/>
+            <a:off x="2715768" y="1783080"/>
+            <a:ext cx="365760" cy="365760"/>
           </a:xfrm>
           <a:prstGeom prst="rect">
             <a:avLst/>
@@ -2675,14 +2335,14 @@
       </p:pic>
       <p:sp>
         <p:nvSpPr>
-          <p:cNvPr id="11" name="Text 7"/>
+          <p:cNvPr id="9" name="Text 5"/>
           <p:cNvSpPr txBox="1"/>
           <p:nvPr/>
         </p:nvSpPr>
         <p:spPr>
           <a:xfrm>
-            <a:off x="3520440" y="2468880"/>
-            <a:ext cx="2103120" cy="457200"/>
+            <a:off x="2176272" y="2606040"/>
+            <a:ext cx="1444752" cy="365760"/>
           </a:xfrm>
           <a:prstGeom prst="rect">
             <a:avLst/>
@@ -2694,7 +2354,7 @@
           <a:bodyPr wrap="square" lIns="0" tIns="0" rIns="0" bIns="0" rtlCol="0" anchor="ctr"/>
           <a:lstStyle/>
           <a:p>
-            <a:pPr indent="0" marL="0">
+            <a:pPr algn="ctr" indent="0" marL="0">
               <a:buNone/>
             </a:pPr>
             <a:r>
@@ -2706,7 +2366,7 @@
                 <a:ea typeface="Cambria" pitchFamily="34" charset="-122"/>
                 <a:cs typeface="Cambria" pitchFamily="34" charset="-120"/>
               </a:rPr>
-              <a:t>A photo is not a fact</a:t>
+              <a:t>2  AI draft</a:t>
             </a:r>
             <a:endParaRPr lang="en-US" sz="1800" dirty="0"/>
           </a:p>
@@ -2714,14 +2374,14 @@
       </p:sp>
       <p:sp>
         <p:nvSpPr>
-          <p:cNvPr id="12" name="Text 8"/>
+          <p:cNvPr id="10" name="Text 6"/>
           <p:cNvSpPr txBox="1"/>
           <p:nvPr/>
         </p:nvSpPr>
         <p:spPr>
           <a:xfrm>
-            <a:off x="3520440" y="2971800"/>
-            <a:ext cx="2103120" cy="1234440"/>
+            <a:off x="2176272" y="3017520"/>
+            <a:ext cx="1444752" cy="822960"/>
           </a:xfrm>
           <a:prstGeom prst="rect">
             <a:avLst/>
@@ -2733,7 +2393,7 @@
           <a:bodyPr wrap="square" lIns="0" tIns="0" rIns="0" bIns="0" rtlCol="0" anchor="t"/>
           <a:lstStyle/>
           <a:p>
-            <a:pPr indent="0" marL="0">
+            <a:pPr algn="ctr" indent="0" marL="0">
               <a:buNone/>
             </a:pPr>
             <a:r>
@@ -2742,7 +2402,7 @@
                   <a:schemeClr val="tx1"/>
                 </a:solidFill>
               </a:rPr>
-              <a:t>An image cannot show ingredients, hidden allergens, cross-contact or how the food was held.</a:t>
+              <a:t>Gemini guesses, marked uncertain</a:t>
             </a:r>
             <a:endParaRPr lang="en-US" sz="1400" dirty="0"/>
           </a:p>
@@ -2750,48 +2410,14 @@
       </p:sp>
       <p:sp>
         <p:nvSpPr>
-          <p:cNvPr id="13" name="problem-card-3"/>
+          <p:cNvPr id="11" name="step-icon-bg-3"/>
           <p:cNvSpPr/>
           <p:nvPr/>
         </p:nvSpPr>
         <p:spPr>
           <a:xfrm>
-            <a:off x="6035040" y="1463040"/>
-            <a:ext cx="2560320" cy="2834640"/>
-          </a:xfrm>
-          <a:prstGeom prst="roundRect">
-            <a:avLst>
-              <a:gd name="adj" fmla="val 4286"/>
-            </a:avLst>
-          </a:prstGeom>
-          <a:solidFill>
-            <a:schemeClr val="bg1"/>
-          </a:solidFill>
-          <a:ln w="12700">
-            <a:solidFill>
-              <a:schemeClr val="bg1"/>
-            </a:solidFill>
-            <a:prstDash val="solid"/>
-          </a:ln>
-          <a:effectLst>
-            <a:outerShdw sx="100000" sy="100000" kx="0" ky="0" algn="bl" rotWithShape="0" blurRad="101600" dist="25400" dir="5400000">
-              <a:srgbClr val="17301F">
-                <a:alpha val="12000"/>
-              </a:srgbClr>
-            </a:outerShdw>
-          </a:effectLst>
-        </p:spPr>
-      </p:sp>
-      <p:sp>
-        <p:nvSpPr>
-          <p:cNvPr id="14" name="problem-icon-bg-3"/>
-          <p:cNvSpPr/>
-          <p:nvPr/>
-        </p:nvSpPr>
-        <p:spPr>
-          <a:xfrm>
-            <a:off x="6263640" y="1691640"/>
-            <a:ext cx="640080" cy="640080"/>
+            <a:off x="4114800" y="1554480"/>
+            <a:ext cx="822960" cy="822960"/>
           </a:xfrm>
           <a:prstGeom prst="ellipse">
             <a:avLst/>
@@ -2809,7 +2435,7 @@
       </p:sp>
       <p:pic>
         <p:nvPicPr>
-          <p:cNvPr id="15" name="Image 2" descr="&quot;Keep offering&quot; breaks down">    </p:cNvPr>
+          <p:cNvPr id="12" name="Image 2" descr="Verify">    </p:cNvPr>
           <p:cNvPicPr>
             <a:picLocks noChangeAspect="1"/>
           </p:cNvPicPr>
@@ -2823,8 +2449,8 @@
         </p:blipFill>
         <p:spPr>
           <a:xfrm>
-            <a:off x="6428232" y="1856232"/>
-            <a:ext cx="310896" cy="310896"/>
+            <a:off x="4343400" y="1783080"/>
+            <a:ext cx="365760" cy="365760"/>
           </a:xfrm>
           <a:prstGeom prst="rect">
             <a:avLst/>
@@ -2833,14 +2459,14 @@
       </p:pic>
       <p:sp>
         <p:nvSpPr>
-          <p:cNvPr id="16" name="Text 11"/>
+          <p:cNvPr id="13" name="Text 8"/>
           <p:cNvSpPr txBox="1"/>
           <p:nvPr/>
         </p:nvSpPr>
         <p:spPr>
           <a:xfrm>
-            <a:off x="6263640" y="2468880"/>
-            <a:ext cx="2103120" cy="457200"/>
+            <a:off x="3803904" y="2606040"/>
+            <a:ext cx="1444752" cy="365760"/>
           </a:xfrm>
           <a:prstGeom prst="rect">
             <a:avLst/>
@@ -2852,7 +2478,7 @@
           <a:bodyPr wrap="square" lIns="0" tIns="0" rIns="0" bIns="0" rtlCol="0" anchor="ctr"/>
           <a:lstStyle/>
           <a:p>
-            <a:pPr indent="0" marL="0">
+            <a:pPr algn="ctr" indent="0" marL="0">
               <a:buNone/>
             </a:pPr>
             <a:r>
@@ -2864,7 +2490,7 @@
                 <a:ea typeface="Cambria" pitchFamily="34" charset="-122"/>
                 <a:cs typeface="Cambria" pitchFamily="34" charset="-120"/>
               </a:rPr>
-              <a:t>"Keep offering" breaks down</a:t>
+              <a:t>3  Verify</a:t>
             </a:r>
             <a:endParaRPr lang="en-US" sz="1800" dirty="0"/>
           </a:p>
@@ -2872,14 +2498,14 @@
       </p:sp>
       <p:sp>
         <p:nvSpPr>
-          <p:cNvPr id="17" name="Text 12"/>
+          <p:cNvPr id="14" name="Text 9"/>
           <p:cNvSpPr txBox="1"/>
           <p:nvPr/>
         </p:nvSpPr>
         <p:spPr>
           <a:xfrm>
-            <a:off x="6263640" y="2971800"/>
-            <a:ext cx="2103120" cy="1234440"/>
+            <a:off x="3803904" y="3017520"/>
+            <a:ext cx="1444752" cy="822960"/>
           </a:xfrm>
           <a:prstGeom prst="rect">
             <a:avLst/>
@@ -2891,16 +2517,300 @@
           <a:bodyPr wrap="square" lIns="0" tIns="0" rIns="0" bIns="0" rtlCol="0" anchor="t"/>
           <a:lstStyle/>
           <a:p>
+            <a:pPr algn="ctr" indent="0" marL="0">
+              <a:buNone/>
+            </a:pPr>
+            <a:r>
+              <a:rPr lang="en-US" sz="1400" dirty="0">
+                <a:solidFill>
+                  <a:schemeClr val="tx1"/>
+                </a:solidFill>
+              </a:rPr>
+              <a:t>Donor confirms on a checklist</a:t>
+            </a:r>
+            <a:endParaRPr lang="en-US" sz="1400" dirty="0"/>
+          </a:p>
+        </p:txBody>
+      </p:sp>
+      <p:sp>
+        <p:nvSpPr>
+          <p:cNvPr id="15" name="step-icon-bg-4"/>
+          <p:cNvSpPr/>
+          <p:nvPr/>
+        </p:nvSpPr>
+        <p:spPr>
+          <a:xfrm>
+            <a:off x="5742432" y="1554480"/>
+            <a:ext cx="822960" cy="822960"/>
+          </a:xfrm>
+          <a:prstGeom prst="ellipse">
+            <a:avLst/>
+          </a:prstGeom>
+          <a:solidFill>
+            <a:srgbClr val="E8833A"/>
+          </a:solidFill>
+          <a:ln w="12700">
+            <a:solidFill>
+              <a:srgbClr val="E8833A"/>
+            </a:solidFill>
+            <a:prstDash val="solid"/>
+          </a:ln>
+        </p:spPr>
+      </p:sp>
+      <p:pic>
+        <p:nvPicPr>
+          <p:cNvPr id="16" name="Image 3" descr="Gate">    </p:cNvPr>
+          <p:cNvPicPr>
+            <a:picLocks noChangeAspect="1"/>
+          </p:cNvPicPr>
+          <p:nvPr/>
+        </p:nvPicPr>
+        <p:blipFill>
+          <a:blip r:embed="rId4"/>
+          <a:stretch>
+            <a:fillRect/>
+          </a:stretch>
+        </p:blipFill>
+        <p:spPr>
+          <a:xfrm>
+            <a:off x="5971032" y="1783080"/>
+            <a:ext cx="365760" cy="365760"/>
+          </a:xfrm>
+          <a:prstGeom prst="rect">
+            <a:avLst/>
+          </a:prstGeom>
+        </p:spPr>
+      </p:pic>
+      <p:sp>
+        <p:nvSpPr>
+          <p:cNvPr id="17" name="Text 11"/>
+          <p:cNvSpPr txBox="1"/>
+          <p:nvPr/>
+        </p:nvSpPr>
+        <p:spPr>
+          <a:xfrm>
+            <a:off x="5431536" y="2606040"/>
+            <a:ext cx="1444752" cy="365760"/>
+          </a:xfrm>
+          <a:prstGeom prst="rect">
+            <a:avLst/>
+          </a:prstGeom>
+          <a:noFill/>
+          <a:ln/>
+        </p:spPr>
+        <p:txBody>
+          <a:bodyPr wrap="square" lIns="0" tIns="0" rIns="0" bIns="0" rtlCol="0" anchor="ctr"/>
+          <a:lstStyle/>
+          <a:p>
+            <a:pPr algn="ctr" indent="0" marL="0">
+              <a:buNone/>
+            </a:pPr>
+            <a:r>
+              <a:rPr lang="en-US" sz="1800" b="1" dirty="0">
+                <a:solidFill>
+                  <a:schemeClr val="tx2"/>
+                </a:solidFill>
+                <a:latin typeface="Cambria" pitchFamily="34" charset="0"/>
+                <a:ea typeface="Cambria" pitchFamily="34" charset="-122"/>
+                <a:cs typeface="Cambria" pitchFamily="34" charset="-120"/>
+              </a:rPr>
+              <a:t>4  Gate</a:t>
+            </a:r>
+            <a:endParaRPr lang="en-US" sz="1800" dirty="0"/>
+          </a:p>
+        </p:txBody>
+      </p:sp>
+      <p:sp>
+        <p:nvSpPr>
+          <p:cNvPr id="18" name="Text 12"/>
+          <p:cNvSpPr txBox="1"/>
+          <p:nvPr/>
+        </p:nvSpPr>
+        <p:spPr>
+          <a:xfrm>
+            <a:off x="5431536" y="3017520"/>
+            <a:ext cx="1444752" cy="822960"/>
+          </a:xfrm>
+          <a:prstGeom prst="rect">
+            <a:avLst/>
+          </a:prstGeom>
+          <a:noFill/>
+          <a:ln/>
+        </p:spPr>
+        <p:txBody>
+          <a:bodyPr wrap="square" lIns="0" tIns="0" rIns="0" bIns="0" rtlCol="0" anchor="t"/>
+          <a:lstStyle/>
+          <a:p>
+            <a:pPr algn="ctr" indent="0" marL="0">
+              <a:buNone/>
+            </a:pPr>
+            <a:r>
+              <a:rPr lang="en-US" sz="1400" dirty="0">
+                <a:solidFill>
+                  <a:schemeClr val="tx1"/>
+                </a:solidFill>
+              </a:rPr>
+              <a:t>Rules allow or block</a:t>
+            </a:r>
+            <a:endParaRPr lang="en-US" sz="1400" dirty="0"/>
+          </a:p>
+        </p:txBody>
+      </p:sp>
+      <p:sp>
+        <p:nvSpPr>
+          <p:cNvPr id="19" name="step-icon-bg-5"/>
+          <p:cNvSpPr/>
+          <p:nvPr/>
+        </p:nvSpPr>
+        <p:spPr>
+          <a:xfrm>
+            <a:off x="7370064" y="1554480"/>
+            <a:ext cx="822960" cy="822960"/>
+          </a:xfrm>
+          <a:prstGeom prst="ellipse">
+            <a:avLst/>
+          </a:prstGeom>
+          <a:solidFill>
+            <a:srgbClr val="2F7D4F"/>
+          </a:solidFill>
+          <a:ln w="12700">
+            <a:solidFill>
+              <a:srgbClr val="2F7D4F"/>
+            </a:solidFill>
+            <a:prstDash val="solid"/>
+          </a:ln>
+        </p:spPr>
+      </p:sp>
+      <p:pic>
+        <p:nvPicPr>
+          <p:cNvPr id="20" name="Image 4" descr="Claim">    </p:cNvPr>
+          <p:cNvPicPr>
+            <a:picLocks noChangeAspect="1"/>
+          </p:cNvPicPr>
+          <p:nvPr/>
+        </p:nvPicPr>
+        <p:blipFill>
+          <a:blip r:embed="rId5"/>
+          <a:stretch>
+            <a:fillRect/>
+          </a:stretch>
+        </p:blipFill>
+        <p:spPr>
+          <a:xfrm>
+            <a:off x="7598664" y="1783080"/>
+            <a:ext cx="365760" cy="365760"/>
+          </a:xfrm>
+          <a:prstGeom prst="rect">
+            <a:avLst/>
+          </a:prstGeom>
+        </p:spPr>
+      </p:pic>
+      <p:sp>
+        <p:nvSpPr>
+          <p:cNvPr id="21" name="Text 14"/>
+          <p:cNvSpPr txBox="1"/>
+          <p:nvPr/>
+        </p:nvSpPr>
+        <p:spPr>
+          <a:xfrm>
+            <a:off x="7059168" y="2606040"/>
+            <a:ext cx="1444752" cy="365760"/>
+          </a:xfrm>
+          <a:prstGeom prst="rect">
+            <a:avLst/>
+          </a:prstGeom>
+          <a:noFill/>
+          <a:ln/>
+        </p:spPr>
+        <p:txBody>
+          <a:bodyPr wrap="square" lIns="0" tIns="0" rIns="0" bIns="0" rtlCol="0" anchor="ctr"/>
+          <a:lstStyle/>
+          <a:p>
+            <a:pPr algn="ctr" indent="0" marL="0">
+              <a:buNone/>
+            </a:pPr>
+            <a:r>
+              <a:rPr lang="en-US" sz="1800" b="1" dirty="0">
+                <a:solidFill>
+                  <a:schemeClr val="tx2"/>
+                </a:solidFill>
+                <a:latin typeface="Cambria" pitchFamily="34" charset="0"/>
+                <a:ea typeface="Cambria" pitchFamily="34" charset="-122"/>
+                <a:cs typeface="Cambria" pitchFamily="34" charset="-120"/>
+              </a:rPr>
+              <a:t>5  Claim</a:t>
+            </a:r>
+            <a:endParaRPr lang="en-US" sz="1800" dirty="0"/>
+          </a:p>
+        </p:txBody>
+      </p:sp>
+      <p:sp>
+        <p:nvSpPr>
+          <p:cNvPr id="22" name="Text 15"/>
+          <p:cNvSpPr txBox="1"/>
+          <p:nvPr/>
+        </p:nvSpPr>
+        <p:spPr>
+          <a:xfrm>
+            <a:off x="7059168" y="3017520"/>
+            <a:ext cx="1444752" cy="822960"/>
+          </a:xfrm>
+          <a:prstGeom prst="rect">
+            <a:avLst/>
+          </a:prstGeom>
+          <a:noFill/>
+          <a:ln/>
+        </p:spPr>
+        <p:txBody>
+          <a:bodyPr wrap="square" lIns="0" tIns="0" rIns="0" bIns="0" rtlCol="0" anchor="t"/>
+          <a:lstStyle/>
+          <a:p>
+            <a:pPr algn="ctr" indent="0" marL="0">
+              <a:buNone/>
+            </a:pPr>
+            <a:r>
+              <a:rPr lang="en-US" sz="1400" dirty="0">
+                <a:solidFill>
+                  <a:schemeClr val="tx1"/>
+                </a:solidFill>
+              </a:rPr>
+              <a:t>Courier replies YES, one wins</a:t>
+            </a:r>
+            <a:endParaRPr lang="en-US" sz="1400" dirty="0"/>
+          </a:p>
+        </p:txBody>
+      </p:sp>
+      <p:sp>
+        <p:nvSpPr>
+          <p:cNvPr id="23" name="Text 16"/>
+          <p:cNvSpPr txBox="1"/>
+          <p:nvPr/>
+        </p:nvSpPr>
+        <p:spPr>
+          <a:xfrm>
+            <a:off x="548640" y="4114800"/>
+            <a:ext cx="8046720" cy="365760"/>
+          </a:xfrm>
+          <a:prstGeom prst="rect">
+            <a:avLst/>
+          </a:prstGeom>
+          <a:noFill/>
+          <a:ln/>
+        </p:spPr>
+        <p:txBody>
+          <a:bodyPr wrap="square" lIns="0" tIns="0" rIns="0" bIns="0" rtlCol="0" anchor="ctr"/>
+          <a:lstStyle/>
+          <a:p>
             <a:pPr indent="0" marL="0">
               <a:buNone/>
             </a:pPr>
             <a:r>
-              <a:rPr lang="en-US" sz="1400" dirty="0">
-                <a:solidFill>
-                  <a:schemeClr val="tx1"/>
-                </a:solidFill>
-              </a:rPr>
-              <a:t>An endless offer loop can hand food over after the kitchen's cutoff or to someone who cannot receive it.</a:t>
+              <a:rPr lang="en-US" sz="1400" i="1" dirty="0">
+                <a:solidFill>
+                  <a:schemeClr val="accent5"/>
+                </a:solidFill>
+              </a:rPr>
+              <a:t>The operator dashboard shows server truth at every step.</a:t>
             </a:r>
             <a:endParaRPr lang="en-US" sz="1400" dirty="0"/>
           </a:p>
@@ -2979,100 +2889,79 @@
       <p:sp>
         <p:nvSpPr>
           <p:cNvPr id="2" name="Text 0"/>
+          <p:cNvSpPr txBox="1"/>
+          <p:nvPr/>
+        </p:nvSpPr>
+        <p:spPr>
+          <a:xfrm>
+            <a:off x="640080" y="365760"/>
+            <a:ext cx="7863840" cy="1005840"/>
+          </a:xfrm>
+          <a:prstGeom prst="rect">
+            <a:avLst/>
+          </a:prstGeom>
+          <a:noFill/>
+          <a:ln/>
+        </p:spPr>
+        <p:txBody>
+          <a:bodyPr wrap="square" lIns="0" tIns="0" rIns="0" bIns="0" rtlCol="0" anchor="ctr"/>
+          <a:lstStyle/>
+          <a:p>
+            <a:pPr indent="0" marL="0">
+              <a:buNone/>
+            </a:pPr>
+            <a:r>
+              <a:rPr lang="en-US" sz="2800" b="1" dirty="0">
+                <a:solidFill>
+                  <a:schemeClr val="bg1"/>
+                </a:solidFill>
+                <a:latin typeface="Cambria" pitchFamily="34" charset="0"/>
+                <a:ea typeface="Cambria" pitchFamily="34" charset="-122"/>
+                <a:cs typeface="Cambria" pitchFamily="34" charset="-120"/>
+              </a:rPr>
+              <a:t>AI describes. Humans verify. Backend enforces.</a:t>
+            </a:r>
+            <a:endParaRPr lang="en-US" sz="2800" dirty="0"/>
+          </a:p>
+        </p:txBody>
+      </p:sp>
+      <p:sp>
+        <p:nvSpPr>
+          <p:cNvPr id="3" name="principle-card-1"/>
           <p:cNvSpPr/>
-          <p:nvPr>
-            <p:ph idx="100" type="title" hasCustomPrompt="1"/>
-          </p:nvPr>
-        </p:nvSpPr>
-        <p:spPr>
-          <a:xfrm>
-            <a:off x="548640" y="365760"/>
-            <a:ext cx="8046720" cy="731520"/>
-          </a:xfrm>
-          <a:prstGeom prst="rect">
-            <a:avLst/>
-          </a:prstGeom>
-          <a:noFill/>
-          <a:ln/>
-        </p:spPr>
-        <p:txBody>
-          <a:bodyPr wrap="square" lIns="0" tIns="0" rIns="0" bIns="0" rtlCol="0" anchor="ctr"/>
-          <a:lstStyle/>
-          <a:p>
-            <a:pPr indent="0" marL="0">
-              <a:buNone/>
-            </a:pPr>
-            <a:r>
-              <a:rPr lang="en-US" sz="3000" b="1" dirty="0">
-                <a:solidFill>
-                  <a:schemeClr val="tx2"/>
-                </a:solidFill>
-              </a:rPr>
-              <a:t>One flow, five steps</a:t>
-            </a:r>
-            <a:endParaRPr lang="en-US" sz="3000" dirty="0"/>
-          </a:p>
-        </p:txBody>
-      </p:sp>
-      <p:sp>
-        <p:nvSpPr>
-          <p:cNvPr id="3" name="step-icon-bg-1"/>
-          <p:cNvSpPr/>
-          <p:nvPr/>
-        </p:nvSpPr>
-        <p:spPr>
-          <a:xfrm>
-            <a:off x="859536" y="1554480"/>
-            <a:ext cx="822960" cy="822960"/>
-          </a:xfrm>
-          <a:prstGeom prst="ellipse">
-            <a:avLst/>
+          <p:nvPr/>
+        </p:nvSpPr>
+        <p:spPr>
+          <a:xfrm>
+            <a:off x="640080" y="1645920"/>
+            <a:ext cx="2514600" cy="2468880"/>
+          </a:xfrm>
+          <a:prstGeom prst="roundRect">
+            <a:avLst>
+              <a:gd name="adj" fmla="val 4444"/>
+            </a:avLst>
           </a:prstGeom>
           <a:solidFill>
-            <a:srgbClr val="2F7D4F"/>
+            <a:schemeClr val="tx2"/>
           </a:solidFill>
           <a:ln w="12700">
             <a:solidFill>
-              <a:srgbClr val="2F7D4F"/>
+              <a:schemeClr val="tx2"/>
             </a:solidFill>
             <a:prstDash val="solid"/>
           </a:ln>
         </p:spPr>
       </p:sp>
-      <p:pic>
-        <p:nvPicPr>
-          <p:cNvPr id="4" name="Image 0" descr="Photo">    </p:cNvPr>
-          <p:cNvPicPr>
-            <a:picLocks noChangeAspect="1"/>
-          </p:cNvPicPr>
-          <p:nvPr/>
-        </p:nvPicPr>
-        <p:blipFill>
-          <a:blip r:embed="rId1"/>
-          <a:stretch>
-            <a:fillRect/>
-          </a:stretch>
-        </p:blipFill>
-        <p:spPr>
-          <a:xfrm>
-            <a:off x="1088136" y="1783080"/>
-            <a:ext cx="365760" cy="365760"/>
-          </a:xfrm>
-          <a:prstGeom prst="rect">
-            <a:avLst/>
-          </a:prstGeom>
-        </p:spPr>
-      </p:pic>
-      <p:sp>
-        <p:nvSpPr>
-          <p:cNvPr id="5" name="Text 2"/>
+      <p:sp>
+        <p:nvSpPr>
+          <p:cNvPr id="4" name="Text 2"/>
           <p:cNvSpPr txBox="1"/>
           <p:nvPr/>
         </p:nvSpPr>
         <p:spPr>
           <a:xfrm>
-            <a:off x="548640" y="2606040"/>
-            <a:ext cx="1444752" cy="365760"/>
+            <a:off x="868680" y="1874520"/>
+            <a:ext cx="2057400" cy="457200"/>
           </a:xfrm>
           <a:prstGeom prst="rect">
             <a:avLst/>
@@ -3084,34 +2973,34 @@
           <a:bodyPr wrap="square" lIns="0" tIns="0" rIns="0" bIns="0" rtlCol="0" anchor="ctr"/>
           <a:lstStyle/>
           <a:p>
-            <a:pPr algn="ctr" indent="0" marL="0">
-              <a:buNone/>
-            </a:pPr>
-            <a:r>
-              <a:rPr lang="en-US" sz="1800" b="1" dirty="0">
-                <a:solidFill>
-                  <a:schemeClr val="tx2"/>
+            <a:pPr indent="0" marL="0">
+              <a:buNone/>
+            </a:pPr>
+            <a:r>
+              <a:rPr lang="en-US" sz="2000" b="1" dirty="0">
+                <a:solidFill>
+                  <a:schemeClr val="accent3"/>
                 </a:solidFill>
                 <a:latin typeface="Cambria" pitchFamily="34" charset="0"/>
                 <a:ea typeface="Cambria" pitchFamily="34" charset="-122"/>
                 <a:cs typeface="Cambria" pitchFamily="34" charset="-120"/>
               </a:rPr>
-              <a:t>1  Photo</a:t>
-            </a:r>
-            <a:endParaRPr lang="en-US" sz="1800" dirty="0"/>
-          </a:p>
-        </p:txBody>
-      </p:sp>
-      <p:sp>
-        <p:nvSpPr>
-          <p:cNvPr id="6" name="Text 3"/>
+              <a:t>AI describes</a:t>
+            </a:r>
+            <a:endParaRPr lang="en-US" sz="2000" dirty="0"/>
+          </a:p>
+        </p:txBody>
+      </p:sp>
+      <p:sp>
+        <p:nvSpPr>
+          <p:cNvPr id="5" name="Text 3"/>
           <p:cNvSpPr txBox="1"/>
           <p:nvPr/>
         </p:nvSpPr>
         <p:spPr>
           <a:xfrm>
-            <a:off x="548640" y="3017520"/>
-            <a:ext cx="1444752" cy="822960"/>
+            <a:off x="868680" y="2423160"/>
+            <a:ext cx="2057400" cy="1554480"/>
           </a:xfrm>
           <a:prstGeom prst="rect">
             <a:avLst/>
@@ -3123,16 +3012,16 @@
           <a:bodyPr wrap="square" lIns="0" tIns="0" rIns="0" bIns="0" rtlCol="0" anchor="t"/>
           <a:lstStyle/>
           <a:p>
-            <a:pPr algn="ctr" indent="0" marL="0">
+            <a:pPr indent="0" marL="0">
               <a:buNone/>
             </a:pPr>
             <a:r>
               <a:rPr lang="en-US" sz="1400" dirty="0">
                 <a:solidFill>
-                  <a:schemeClr val="tx1"/>
-                </a:solidFill>
-              </a:rPr>
-              <a:t>Donor texts a photo</a:t>
+                  <a:schemeClr val="bg1"/>
+                </a:solidFill>
+              </a:rPr>
+              <a:t>Vision output is an editable hypothesis. Unclear photos fail closed to manual entry.</a:t>
             </a:r>
             <a:endParaRPr lang="en-US" sz="1400" dirty="0"/>
           </a:p>
@@ -3140,63 +3029,41 @@
       </p:sp>
       <p:sp>
         <p:nvSpPr>
-          <p:cNvPr id="7" name="step-icon-bg-2"/>
+          <p:cNvPr id="6" name="principle-card-2"/>
           <p:cNvSpPr/>
           <p:nvPr/>
         </p:nvSpPr>
         <p:spPr>
           <a:xfrm>
-            <a:off x="2487168" y="1554480"/>
-            <a:ext cx="822960" cy="822960"/>
-          </a:xfrm>
-          <a:prstGeom prst="ellipse">
-            <a:avLst/>
+            <a:off x="3337560" y="1645920"/>
+            <a:ext cx="2514600" cy="2468880"/>
+          </a:xfrm>
+          <a:prstGeom prst="roundRect">
+            <a:avLst>
+              <a:gd name="adj" fmla="val 4444"/>
+            </a:avLst>
           </a:prstGeom>
           <a:solidFill>
-            <a:srgbClr val="2F7D4F"/>
+            <a:schemeClr val="tx2"/>
           </a:solidFill>
           <a:ln w="12700">
             <a:solidFill>
-              <a:srgbClr val="2F7D4F"/>
+              <a:schemeClr val="tx2"/>
             </a:solidFill>
             <a:prstDash val="solid"/>
           </a:ln>
         </p:spPr>
       </p:sp>
-      <p:pic>
-        <p:nvPicPr>
-          <p:cNvPr id="8" name="Image 1" descr="AI draft">    </p:cNvPr>
-          <p:cNvPicPr>
-            <a:picLocks noChangeAspect="1"/>
-          </p:cNvPicPr>
-          <p:nvPr/>
-        </p:nvPicPr>
-        <p:blipFill>
-          <a:blip r:embed="rId2"/>
-          <a:stretch>
-            <a:fillRect/>
-          </a:stretch>
-        </p:blipFill>
-        <p:spPr>
-          <a:xfrm>
-            <a:off x="2715768" y="1783080"/>
-            <a:ext cx="365760" cy="365760"/>
-          </a:xfrm>
-          <a:prstGeom prst="rect">
-            <a:avLst/>
-          </a:prstGeom>
-        </p:spPr>
-      </p:pic>
-      <p:sp>
-        <p:nvSpPr>
-          <p:cNvPr id="9" name="Text 5"/>
+      <p:sp>
+        <p:nvSpPr>
+          <p:cNvPr id="7" name="Text 5"/>
           <p:cNvSpPr txBox="1"/>
           <p:nvPr/>
         </p:nvSpPr>
         <p:spPr>
           <a:xfrm>
-            <a:off x="2176272" y="2606040"/>
-            <a:ext cx="1444752" cy="365760"/>
+            <a:off x="3566160" y="1874520"/>
+            <a:ext cx="2057400" cy="457200"/>
           </a:xfrm>
           <a:prstGeom prst="rect">
             <a:avLst/>
@@ -3208,34 +3075,34 @@
           <a:bodyPr wrap="square" lIns="0" tIns="0" rIns="0" bIns="0" rtlCol="0" anchor="ctr"/>
           <a:lstStyle/>
           <a:p>
-            <a:pPr algn="ctr" indent="0" marL="0">
-              <a:buNone/>
-            </a:pPr>
-            <a:r>
-              <a:rPr lang="en-US" sz="1800" b="1" dirty="0">
-                <a:solidFill>
-                  <a:schemeClr val="tx2"/>
+            <a:pPr indent="0" marL="0">
+              <a:buNone/>
+            </a:pPr>
+            <a:r>
+              <a:rPr lang="en-US" sz="2000" b="1" dirty="0">
+                <a:solidFill>
+                  <a:schemeClr val="accent3"/>
                 </a:solidFill>
                 <a:latin typeface="Cambria" pitchFamily="34" charset="0"/>
                 <a:ea typeface="Cambria" pitchFamily="34" charset="-122"/>
                 <a:cs typeface="Cambria" pitchFamily="34" charset="-120"/>
               </a:rPr>
-              <a:t>2  AI draft</a:t>
-            </a:r>
-            <a:endParaRPr lang="en-US" sz="1800" dirty="0"/>
-          </a:p>
-        </p:txBody>
-      </p:sp>
-      <p:sp>
-        <p:nvSpPr>
-          <p:cNvPr id="10" name="Text 6"/>
+              <a:t>Humans verify</a:t>
+            </a:r>
+            <a:endParaRPr lang="en-US" sz="2000" dirty="0"/>
+          </a:p>
+        </p:txBody>
+      </p:sp>
+      <p:sp>
+        <p:nvSpPr>
+          <p:cNvPr id="8" name="Text 6"/>
           <p:cNvSpPr txBox="1"/>
           <p:nvPr/>
         </p:nvSpPr>
         <p:spPr>
           <a:xfrm>
-            <a:off x="2176272" y="3017520"/>
-            <a:ext cx="1444752" cy="822960"/>
+            <a:off x="3566160" y="2423160"/>
+            <a:ext cx="2057400" cy="1554480"/>
           </a:xfrm>
           <a:prstGeom prst="rect">
             <a:avLst/>
@@ -3247,16 +3114,16 @@
           <a:bodyPr wrap="square" lIns="0" tIns="0" rIns="0" bIns="0" rtlCol="0" anchor="t"/>
           <a:lstStyle/>
           <a:p>
-            <a:pPr algn="ctr" indent="0" marL="0">
+            <a:pPr indent="0" marL="0">
               <a:buNone/>
             </a:pPr>
             <a:r>
               <a:rPr lang="en-US" sz="1400" dirty="0">
                 <a:solidFill>
-                  <a:schemeClr val="tx1"/>
-                </a:solidFill>
-              </a:rPr>
-              <a:t>Gemini guesses, marked uncertain</a:t>
+                  <a:schemeClr val="bg1"/>
+                </a:solidFill>
+              </a:rPr>
+              <a:t>Servings, ingredients, all nine major allergens and handling facts start as "unknown" until the donor attests.</a:t>
             </a:r>
             <a:endParaRPr lang="en-US" sz="1400" dirty="0"/>
           </a:p>
@@ -3264,63 +3131,41 @@
       </p:sp>
       <p:sp>
         <p:nvSpPr>
-          <p:cNvPr id="11" name="step-icon-bg-3"/>
+          <p:cNvPr id="9" name="principle-card-3"/>
           <p:cNvSpPr/>
           <p:nvPr/>
         </p:nvSpPr>
         <p:spPr>
           <a:xfrm>
-            <a:off x="4114800" y="1554480"/>
-            <a:ext cx="822960" cy="822960"/>
-          </a:xfrm>
-          <a:prstGeom prst="ellipse">
-            <a:avLst/>
+            <a:off x="6035040" y="1645920"/>
+            <a:ext cx="2514600" cy="2468880"/>
+          </a:xfrm>
+          <a:prstGeom prst="roundRect">
+            <a:avLst>
+              <a:gd name="adj" fmla="val 4444"/>
+            </a:avLst>
           </a:prstGeom>
           <a:solidFill>
-            <a:srgbClr val="2F7D4F"/>
+            <a:schemeClr val="tx2"/>
           </a:solidFill>
           <a:ln w="12700">
             <a:solidFill>
-              <a:srgbClr val="2F7D4F"/>
+              <a:schemeClr val="tx2"/>
             </a:solidFill>
             <a:prstDash val="solid"/>
           </a:ln>
         </p:spPr>
       </p:sp>
-      <p:pic>
-        <p:nvPicPr>
-          <p:cNvPr id="12" name="Image 2" descr="Verify">    </p:cNvPr>
-          <p:cNvPicPr>
-            <a:picLocks noChangeAspect="1"/>
-          </p:cNvPicPr>
-          <p:nvPr/>
-        </p:nvPicPr>
-        <p:blipFill>
-          <a:blip r:embed="rId3"/>
-          <a:stretch>
-            <a:fillRect/>
-          </a:stretch>
-        </p:blipFill>
-        <p:spPr>
-          <a:xfrm>
-            <a:off x="4343400" y="1783080"/>
-            <a:ext cx="365760" cy="365760"/>
-          </a:xfrm>
-          <a:prstGeom prst="rect">
-            <a:avLst/>
-          </a:prstGeom>
-        </p:spPr>
-      </p:pic>
-      <p:sp>
-        <p:nvSpPr>
-          <p:cNvPr id="13" name="Text 8"/>
+      <p:sp>
+        <p:nvSpPr>
+          <p:cNvPr id="10" name="Text 8"/>
           <p:cNvSpPr txBox="1"/>
           <p:nvPr/>
         </p:nvSpPr>
         <p:spPr>
           <a:xfrm>
-            <a:off x="3803904" y="2606040"/>
-            <a:ext cx="1444752" cy="365760"/>
+            <a:off x="6263640" y="1874520"/>
+            <a:ext cx="2057400" cy="457200"/>
           </a:xfrm>
           <a:prstGeom prst="rect">
             <a:avLst/>
@@ -3332,34 +3177,34 @@
           <a:bodyPr wrap="square" lIns="0" tIns="0" rIns="0" bIns="0" rtlCol="0" anchor="ctr"/>
           <a:lstStyle/>
           <a:p>
-            <a:pPr algn="ctr" indent="0" marL="0">
-              <a:buNone/>
-            </a:pPr>
-            <a:r>
-              <a:rPr lang="en-US" sz="1800" b="1" dirty="0">
-                <a:solidFill>
-                  <a:schemeClr val="tx2"/>
+            <a:pPr indent="0" marL="0">
+              <a:buNone/>
+            </a:pPr>
+            <a:r>
+              <a:rPr lang="en-US" sz="2000" b="1" dirty="0">
+                <a:solidFill>
+                  <a:schemeClr val="accent3"/>
                 </a:solidFill>
                 <a:latin typeface="Cambria" pitchFamily="34" charset="0"/>
                 <a:ea typeface="Cambria" pitchFamily="34" charset="-122"/>
                 <a:cs typeface="Cambria" pitchFamily="34" charset="-120"/>
               </a:rPr>
-              <a:t>3  Verify</a:t>
-            </a:r>
-            <a:endParaRPr lang="en-US" sz="1800" dirty="0"/>
-          </a:p>
-        </p:txBody>
-      </p:sp>
-      <p:sp>
-        <p:nvSpPr>
-          <p:cNvPr id="14" name="Text 9"/>
+              <a:t>Backend enforces</a:t>
+            </a:r>
+            <a:endParaRPr lang="en-US" sz="2000" dirty="0"/>
+          </a:p>
+        </p:txBody>
+      </p:sp>
+      <p:sp>
+        <p:nvSpPr>
+          <p:cNvPr id="11" name="Text 9"/>
           <p:cNvSpPr txBox="1"/>
           <p:nvPr/>
         </p:nvSpPr>
         <p:spPr>
           <a:xfrm>
-            <a:off x="3803904" y="3017520"/>
-            <a:ext cx="1444752" cy="822960"/>
+            <a:off x="6263640" y="2423160"/>
+            <a:ext cx="2057400" cy="1554480"/>
           </a:xfrm>
           <a:prstGeom prst="rect">
             <a:avLst/>
@@ -3371,300 +3216,16 @@
           <a:bodyPr wrap="square" lIns="0" tIns="0" rIns="0" bIns="0" rtlCol="0" anchor="t"/>
           <a:lstStyle/>
           <a:p>
-            <a:pPr algn="ctr" indent="0" marL="0">
+            <a:pPr indent="0" marL="0">
               <a:buNone/>
             </a:pPr>
             <a:r>
               <a:rPr lang="en-US" sz="1400" dirty="0">
                 <a:solidFill>
-                  <a:schemeClr val="tx1"/>
-                </a:solidFill>
-              </a:rPr>
-              <a:t>Donor confirms on a checklist</a:t>
-            </a:r>
-            <a:endParaRPr lang="en-US" sz="1400" dirty="0"/>
-          </a:p>
-        </p:txBody>
-      </p:sp>
-      <p:sp>
-        <p:nvSpPr>
-          <p:cNvPr id="15" name="step-icon-bg-4"/>
-          <p:cNvSpPr/>
-          <p:nvPr/>
-        </p:nvSpPr>
-        <p:spPr>
-          <a:xfrm>
-            <a:off x="5742432" y="1554480"/>
-            <a:ext cx="822960" cy="822960"/>
-          </a:xfrm>
-          <a:prstGeom prst="ellipse">
-            <a:avLst/>
-          </a:prstGeom>
-          <a:solidFill>
-            <a:srgbClr val="E8833A"/>
-          </a:solidFill>
-          <a:ln w="12700">
-            <a:solidFill>
-              <a:srgbClr val="E8833A"/>
-            </a:solidFill>
-            <a:prstDash val="solid"/>
-          </a:ln>
-        </p:spPr>
-      </p:sp>
-      <p:pic>
-        <p:nvPicPr>
-          <p:cNvPr id="16" name="Image 3" descr="Gate">    </p:cNvPr>
-          <p:cNvPicPr>
-            <a:picLocks noChangeAspect="1"/>
-          </p:cNvPicPr>
-          <p:nvPr/>
-        </p:nvPicPr>
-        <p:blipFill>
-          <a:blip r:embed="rId4"/>
-          <a:stretch>
-            <a:fillRect/>
-          </a:stretch>
-        </p:blipFill>
-        <p:spPr>
-          <a:xfrm>
-            <a:off x="5971032" y="1783080"/>
-            <a:ext cx="365760" cy="365760"/>
-          </a:xfrm>
-          <a:prstGeom prst="rect">
-            <a:avLst/>
-          </a:prstGeom>
-        </p:spPr>
-      </p:pic>
-      <p:sp>
-        <p:nvSpPr>
-          <p:cNvPr id="17" name="Text 11"/>
-          <p:cNvSpPr txBox="1"/>
-          <p:nvPr/>
-        </p:nvSpPr>
-        <p:spPr>
-          <a:xfrm>
-            <a:off x="5431536" y="2606040"/>
-            <a:ext cx="1444752" cy="365760"/>
-          </a:xfrm>
-          <a:prstGeom prst="rect">
-            <a:avLst/>
-          </a:prstGeom>
-          <a:noFill/>
-          <a:ln/>
-        </p:spPr>
-        <p:txBody>
-          <a:bodyPr wrap="square" lIns="0" tIns="0" rIns="0" bIns="0" rtlCol="0" anchor="ctr"/>
-          <a:lstStyle/>
-          <a:p>
-            <a:pPr algn="ctr" indent="0" marL="0">
-              <a:buNone/>
-            </a:pPr>
-            <a:r>
-              <a:rPr lang="en-US" sz="1800" b="1" dirty="0">
-                <a:solidFill>
-                  <a:schemeClr val="tx2"/>
-                </a:solidFill>
-                <a:latin typeface="Cambria" pitchFamily="34" charset="0"/>
-                <a:ea typeface="Cambria" pitchFamily="34" charset="-122"/>
-                <a:cs typeface="Cambria" pitchFamily="34" charset="-120"/>
-              </a:rPr>
-              <a:t>4  Gate</a:t>
-            </a:r>
-            <a:endParaRPr lang="en-US" sz="1800" dirty="0"/>
-          </a:p>
-        </p:txBody>
-      </p:sp>
-      <p:sp>
-        <p:nvSpPr>
-          <p:cNvPr id="18" name="Text 12"/>
-          <p:cNvSpPr txBox="1"/>
-          <p:nvPr/>
-        </p:nvSpPr>
-        <p:spPr>
-          <a:xfrm>
-            <a:off x="5431536" y="3017520"/>
-            <a:ext cx="1444752" cy="822960"/>
-          </a:xfrm>
-          <a:prstGeom prst="rect">
-            <a:avLst/>
-          </a:prstGeom>
-          <a:noFill/>
-          <a:ln/>
-        </p:spPr>
-        <p:txBody>
-          <a:bodyPr wrap="square" lIns="0" tIns="0" rIns="0" bIns="0" rtlCol="0" anchor="t"/>
-          <a:lstStyle/>
-          <a:p>
-            <a:pPr algn="ctr" indent="0" marL="0">
-              <a:buNone/>
-            </a:pPr>
-            <a:r>
-              <a:rPr lang="en-US" sz="1400" dirty="0">
-                <a:solidFill>
-                  <a:schemeClr val="tx1"/>
-                </a:solidFill>
-              </a:rPr>
-              <a:t>Rules allow or block</a:t>
-            </a:r>
-            <a:endParaRPr lang="en-US" sz="1400" dirty="0"/>
-          </a:p>
-        </p:txBody>
-      </p:sp>
-      <p:sp>
-        <p:nvSpPr>
-          <p:cNvPr id="19" name="step-icon-bg-5"/>
-          <p:cNvSpPr/>
-          <p:nvPr/>
-        </p:nvSpPr>
-        <p:spPr>
-          <a:xfrm>
-            <a:off x="7370064" y="1554480"/>
-            <a:ext cx="822960" cy="822960"/>
-          </a:xfrm>
-          <a:prstGeom prst="ellipse">
-            <a:avLst/>
-          </a:prstGeom>
-          <a:solidFill>
-            <a:srgbClr val="2F7D4F"/>
-          </a:solidFill>
-          <a:ln w="12700">
-            <a:solidFill>
-              <a:srgbClr val="2F7D4F"/>
-            </a:solidFill>
-            <a:prstDash val="solid"/>
-          </a:ln>
-        </p:spPr>
-      </p:sp>
-      <p:pic>
-        <p:nvPicPr>
-          <p:cNvPr id="20" name="Image 4" descr="Claim">    </p:cNvPr>
-          <p:cNvPicPr>
-            <a:picLocks noChangeAspect="1"/>
-          </p:cNvPicPr>
-          <p:nvPr/>
-        </p:nvPicPr>
-        <p:blipFill>
-          <a:blip r:embed="rId5"/>
-          <a:stretch>
-            <a:fillRect/>
-          </a:stretch>
-        </p:blipFill>
-        <p:spPr>
-          <a:xfrm>
-            <a:off x="7598664" y="1783080"/>
-            <a:ext cx="365760" cy="365760"/>
-          </a:xfrm>
-          <a:prstGeom prst="rect">
-            <a:avLst/>
-          </a:prstGeom>
-        </p:spPr>
-      </p:pic>
-      <p:sp>
-        <p:nvSpPr>
-          <p:cNvPr id="21" name="Text 14"/>
-          <p:cNvSpPr txBox="1"/>
-          <p:nvPr/>
-        </p:nvSpPr>
-        <p:spPr>
-          <a:xfrm>
-            <a:off x="7059168" y="2606040"/>
-            <a:ext cx="1444752" cy="365760"/>
-          </a:xfrm>
-          <a:prstGeom prst="rect">
-            <a:avLst/>
-          </a:prstGeom>
-          <a:noFill/>
-          <a:ln/>
-        </p:spPr>
-        <p:txBody>
-          <a:bodyPr wrap="square" lIns="0" tIns="0" rIns="0" bIns="0" rtlCol="0" anchor="ctr"/>
-          <a:lstStyle/>
-          <a:p>
-            <a:pPr algn="ctr" indent="0" marL="0">
-              <a:buNone/>
-            </a:pPr>
-            <a:r>
-              <a:rPr lang="en-US" sz="1800" b="1" dirty="0">
-                <a:solidFill>
-                  <a:schemeClr val="tx2"/>
-                </a:solidFill>
-                <a:latin typeface="Cambria" pitchFamily="34" charset="0"/>
-                <a:ea typeface="Cambria" pitchFamily="34" charset="-122"/>
-                <a:cs typeface="Cambria" pitchFamily="34" charset="-120"/>
-              </a:rPr>
-              <a:t>5  Claim</a:t>
-            </a:r>
-            <a:endParaRPr lang="en-US" sz="1800" dirty="0"/>
-          </a:p>
-        </p:txBody>
-      </p:sp>
-      <p:sp>
-        <p:nvSpPr>
-          <p:cNvPr id="22" name="Text 15"/>
-          <p:cNvSpPr txBox="1"/>
-          <p:nvPr/>
-        </p:nvSpPr>
-        <p:spPr>
-          <a:xfrm>
-            <a:off x="7059168" y="3017520"/>
-            <a:ext cx="1444752" cy="822960"/>
-          </a:xfrm>
-          <a:prstGeom prst="rect">
-            <a:avLst/>
-          </a:prstGeom>
-          <a:noFill/>
-          <a:ln/>
-        </p:spPr>
-        <p:txBody>
-          <a:bodyPr wrap="square" lIns="0" tIns="0" rIns="0" bIns="0" rtlCol="0" anchor="t"/>
-          <a:lstStyle/>
-          <a:p>
-            <a:pPr algn="ctr" indent="0" marL="0">
-              <a:buNone/>
-            </a:pPr>
-            <a:r>
-              <a:rPr lang="en-US" sz="1400" dirty="0">
-                <a:solidFill>
-                  <a:schemeClr val="tx1"/>
-                </a:solidFill>
-              </a:rPr>
-              <a:t>Courier replies YES, one wins</a:t>
-            </a:r>
-            <a:endParaRPr lang="en-US" sz="1400" dirty="0"/>
-          </a:p>
-        </p:txBody>
-      </p:sp>
-      <p:sp>
-        <p:nvSpPr>
-          <p:cNvPr id="23" name="Text 16"/>
-          <p:cNvSpPr txBox="1"/>
-          <p:nvPr/>
-        </p:nvSpPr>
-        <p:spPr>
-          <a:xfrm>
-            <a:off x="548640" y="4114800"/>
-            <a:ext cx="8046720" cy="365760"/>
-          </a:xfrm>
-          <a:prstGeom prst="rect">
-            <a:avLst/>
-          </a:prstGeom>
-          <a:noFill/>
-          <a:ln/>
-        </p:spPr>
-        <p:txBody>
-          <a:bodyPr wrap="square" lIns="0" tIns="0" rIns="0" bIns="0" rtlCol="0" anchor="ctr"/>
-          <a:lstStyle/>
-          <a:p>
-            <a:pPr indent="0" marL="0">
-              <a:buNone/>
-            </a:pPr>
-            <a:r>
-              <a:rPr lang="en-US" sz="1400" i="1" dirty="0">
-                <a:solidFill>
-                  <a:schemeClr val="accent5"/>
-                </a:solidFill>
-              </a:rPr>
-              <a:t>The operator dashboard shows server truth at every step.</a:t>
+                  <a:schemeClr val="bg1"/>
+                </a:solidFill>
+              </a:rPr>
+              <a:t>A deterministic gate returns eligible, needs review or rejected. Unknown never means eligible.</a:t>
             </a:r>
             <a:endParaRPr lang="en-US" sz="1400" dirty="0"/>
           </a:p>
@@ -3743,13 +3304,15 @@
       <p:sp>
         <p:nvSpPr>
           <p:cNvPr id="2" name="Text 0"/>
-          <p:cNvSpPr txBox="1"/>
-          <p:nvPr/>
-        </p:nvSpPr>
-        <p:spPr>
-          <a:xfrm>
-            <a:off x="640080" y="365760"/>
-            <a:ext cx="7863840" cy="1005840"/>
+          <p:cNvSpPr/>
+          <p:nvPr>
+            <p:ph idx="100" type="title" hasCustomPrompt="1"/>
+          </p:nvPr>
+        </p:nvSpPr>
+        <p:spPr>
+          <a:xfrm>
+            <a:off x="548640" y="365760"/>
+            <a:ext cx="8046720" cy="731520"/>
           </a:xfrm>
           <a:prstGeom prst="rect">
             <a:avLst/>
@@ -3765,144 +3328,71 @@
               <a:buNone/>
             </a:pPr>
             <a:r>
-              <a:rPr lang="en-US" sz="2800" b="1" dirty="0">
-                <a:solidFill>
-                  <a:schemeClr val="bg1"/>
-                </a:solidFill>
-                <a:latin typeface="Cambria" pitchFamily="34" charset="0"/>
-                <a:ea typeface="Cambria" pitchFamily="34" charset="-122"/>
-                <a:cs typeface="Cambria" pitchFamily="34" charset="-120"/>
-              </a:rPr>
-              <a:t>AI describes. Humans verify. Backend enforces.</a:t>
-            </a:r>
-            <a:endParaRPr lang="en-US" sz="2800" dirty="0"/>
-          </a:p>
-        </p:txBody>
-      </p:sp>
-      <p:sp>
-        <p:nvSpPr>
-          <p:cNvPr id="3" name="principle-card-1"/>
+              <a:rPr lang="en-US" sz="3000" b="1" dirty="0">
+                <a:solidFill>
+                  <a:schemeClr val="tx2"/>
+                </a:solidFill>
+              </a:rPr>
+              <a:t>Scene 1: Success</a:t>
+            </a:r>
+            <a:endParaRPr lang="en-US" sz="3000" dirty="0"/>
+          </a:p>
+        </p:txBody>
+      </p:sp>
+      <p:sp>
+        <p:nvSpPr>
+          <p:cNvPr id="3" name="scene-1-row-1"/>
           <p:cNvSpPr/>
           <p:nvPr/>
         </p:nvSpPr>
         <p:spPr>
           <a:xfrm>
-            <a:off x="640080" y="1645920"/>
-            <a:ext cx="2514600" cy="2468880"/>
+            <a:off x="548640" y="1280160"/>
+            <a:ext cx="8046720" cy="493776"/>
           </a:xfrm>
           <a:prstGeom prst="roundRect">
             <a:avLst>
-              <a:gd name="adj" fmla="val 4444"/>
+              <a:gd name="adj" fmla="val 22222"/>
             </a:avLst>
           </a:prstGeom>
           <a:solidFill>
-            <a:schemeClr val="tx2"/>
+            <a:schemeClr val="bg1"/>
           </a:solidFill>
           <a:ln w="12700">
             <a:solidFill>
-              <a:schemeClr val="tx2"/>
+              <a:schemeClr val="bg1"/>
             </a:solidFill>
             <a:prstDash val="solid"/>
           </a:ln>
-        </p:spPr>
-      </p:sp>
-      <p:sp>
-        <p:nvSpPr>
-          <p:cNvPr id="4" name="Text 2"/>
-          <p:cNvSpPr txBox="1"/>
-          <p:nvPr/>
-        </p:nvSpPr>
-        <p:spPr>
-          <a:xfrm>
-            <a:off x="868680" y="1874520"/>
-            <a:ext cx="2057400" cy="457200"/>
-          </a:xfrm>
-          <a:prstGeom prst="rect">
-            <a:avLst/>
-          </a:prstGeom>
-          <a:noFill/>
-          <a:ln/>
-        </p:spPr>
-        <p:txBody>
-          <a:bodyPr wrap="square" lIns="0" tIns="0" rIns="0" bIns="0" rtlCol="0" anchor="ctr"/>
-          <a:lstStyle/>
-          <a:p>
-            <a:pPr indent="0" marL="0">
-              <a:buNone/>
-            </a:pPr>
-            <a:r>
-              <a:rPr lang="en-US" sz="2000" b="1" dirty="0">
-                <a:solidFill>
-                  <a:schemeClr val="accent3"/>
-                </a:solidFill>
-                <a:latin typeface="Cambria" pitchFamily="34" charset="0"/>
-                <a:ea typeface="Cambria" pitchFamily="34" charset="-122"/>
-                <a:cs typeface="Cambria" pitchFamily="34" charset="-120"/>
-              </a:rPr>
-              <a:t>AI describes</a:t>
-            </a:r>
-            <a:endParaRPr lang="en-US" sz="2000" dirty="0"/>
-          </a:p>
-        </p:txBody>
-      </p:sp>
-      <p:sp>
-        <p:nvSpPr>
-          <p:cNvPr id="5" name="Text 3"/>
-          <p:cNvSpPr txBox="1"/>
-          <p:nvPr/>
-        </p:nvSpPr>
-        <p:spPr>
-          <a:xfrm>
-            <a:off x="868680" y="2423160"/>
-            <a:ext cx="2057400" cy="1554480"/>
-          </a:xfrm>
-          <a:prstGeom prst="rect">
-            <a:avLst/>
-          </a:prstGeom>
-          <a:noFill/>
-          <a:ln/>
-        </p:spPr>
-        <p:txBody>
-          <a:bodyPr wrap="square" lIns="0" tIns="0" rIns="0" bIns="0" rtlCol="0" anchor="t"/>
-          <a:lstStyle/>
-          <a:p>
-            <a:pPr indent="0" marL="0">
-              <a:buNone/>
-            </a:pPr>
-            <a:r>
-              <a:rPr lang="en-US" sz="1400" dirty="0">
-                <a:solidFill>
-                  <a:schemeClr val="bg1"/>
-                </a:solidFill>
-              </a:rPr>
-              <a:t>Vision output is an editable hypothesis. Unclear photos fail closed to manual entry.</a:t>
-            </a:r>
-            <a:endParaRPr lang="en-US" sz="1400" dirty="0"/>
-          </a:p>
-        </p:txBody>
-      </p:sp>
-      <p:sp>
-        <p:nvSpPr>
-          <p:cNvPr id="6" name="principle-card-2"/>
+          <a:effectLst>
+            <a:outerShdw sx="100000" sy="100000" kx="0" ky="0" algn="bl" rotWithShape="0" blurRad="101600" dist="25400" dir="5400000">
+              <a:srgbClr val="17301F">
+                <a:alpha val="12000"/>
+              </a:srgbClr>
+            </a:outerShdw>
+          </a:effectLst>
+        </p:spPr>
+      </p:sp>
+      <p:sp>
+        <p:nvSpPr>
+          <p:cNvPr id="4" name="scene-1-num-bg-1"/>
           <p:cNvSpPr/>
           <p:nvPr/>
         </p:nvSpPr>
         <p:spPr>
           <a:xfrm>
-            <a:off x="3337560" y="1645920"/>
-            <a:ext cx="2514600" cy="2468880"/>
-          </a:xfrm>
-          <a:prstGeom prst="roundRect">
-            <a:avLst>
-              <a:gd name="adj" fmla="val 4444"/>
-            </a:avLst>
+            <a:off x="685800" y="1344168"/>
+            <a:ext cx="365760" cy="365760"/>
+          </a:xfrm>
+          <a:prstGeom prst="ellipse">
+            <a:avLst/>
           </a:prstGeom>
           <a:solidFill>
-            <a:schemeClr val="tx2"/>
+            <a:srgbClr val="2F7D4F"/>
           </a:solidFill>
           <a:ln w="12700">
             <a:solidFill>
-              <a:schemeClr val="tx2"/>
+              <a:srgbClr val="2F7D4F"/>
             </a:solidFill>
             <a:prstDash val="solid"/>
           </a:ln>
@@ -3910,14 +3400,86 @@
       </p:sp>
       <p:sp>
         <p:nvSpPr>
+          <p:cNvPr id="5" name="Text 3"/>
+          <p:cNvSpPr txBox="1"/>
+          <p:nvPr/>
+        </p:nvSpPr>
+        <p:spPr>
+          <a:xfrm>
+            <a:off x="685800" y="1344168"/>
+            <a:ext cx="365760" cy="365760"/>
+          </a:xfrm>
+          <a:prstGeom prst="rect">
+            <a:avLst/>
+          </a:prstGeom>
+          <a:noFill/>
+          <a:ln/>
+        </p:spPr>
+        <p:txBody>
+          <a:bodyPr wrap="square" lIns="0" tIns="0" rIns="0" bIns="0" rtlCol="0" anchor="ctr"/>
+          <a:lstStyle/>
+          <a:p>
+            <a:pPr algn="ctr" indent="0" marL="0">
+              <a:buNone/>
+            </a:pPr>
+            <a:r>
+              <a:rPr lang="en-US" sz="1400" b="1" dirty="0">
+                <a:solidFill>
+                  <a:schemeClr val="bg1"/>
+                </a:solidFill>
+              </a:rPr>
+              <a:t>1</a:t>
+            </a:r>
+            <a:endParaRPr lang="en-US" sz="1400" dirty="0"/>
+          </a:p>
+        </p:txBody>
+      </p:sp>
+      <p:sp>
+        <p:nvSpPr>
+          <p:cNvPr id="6" name="Text 4"/>
+          <p:cNvSpPr txBox="1"/>
+          <p:nvPr/>
+        </p:nvSpPr>
+        <p:spPr>
+          <a:xfrm>
+            <a:off x="1234440" y="1280160"/>
+            <a:ext cx="1554480" cy="493776"/>
+          </a:xfrm>
+          <a:prstGeom prst="rect">
+            <a:avLst/>
+          </a:prstGeom>
+          <a:noFill/>
+          <a:ln/>
+        </p:spPr>
+        <p:txBody>
+          <a:bodyPr wrap="square" lIns="0" tIns="0" rIns="0" bIns="0" rtlCol="0" anchor="ctr"/>
+          <a:lstStyle/>
+          <a:p>
+            <a:pPr indent="0" marL="0">
+              <a:buNone/>
+            </a:pPr>
+            <a:r>
+              <a:rPr lang="en-US" sz="1400" b="1" dirty="0">
+                <a:solidFill>
+                  <a:schemeClr val="tx2"/>
+                </a:solidFill>
+              </a:rPr>
+              <a:t>Donor phone</a:t>
+            </a:r>
+            <a:endParaRPr lang="en-US" sz="1400" dirty="0"/>
+          </a:p>
+        </p:txBody>
+      </p:sp>
+      <p:sp>
+        <p:nvSpPr>
           <p:cNvPr id="7" name="Text 5"/>
           <p:cNvSpPr txBox="1"/>
           <p:nvPr/>
         </p:nvSpPr>
         <p:spPr>
           <a:xfrm>
-            <a:off x="3566160" y="1874520"/>
-            <a:ext cx="2057400" cy="457200"/>
+            <a:off x="2834640" y="1280160"/>
+            <a:ext cx="5623560" cy="493776"/>
           </a:xfrm>
           <a:prstGeom prst="rect">
             <a:avLst/>
@@ -3933,51 +3495,12 @@
               <a:buNone/>
             </a:pPr>
             <a:r>
-              <a:rPr lang="en-US" sz="2000" b="1" dirty="0">
-                <a:solidFill>
-                  <a:schemeClr val="accent3"/>
-                </a:solidFill>
-                <a:latin typeface="Cambria" pitchFamily="34" charset="0"/>
-                <a:ea typeface="Cambria" pitchFamily="34" charset="-122"/>
-                <a:cs typeface="Cambria" pitchFamily="34" charset="-120"/>
-              </a:rPr>
-              <a:t>Humans verify</a:t>
-            </a:r>
-            <a:endParaRPr lang="en-US" sz="2000" dirty="0"/>
-          </a:p>
-        </p:txBody>
-      </p:sp>
-      <p:sp>
-        <p:nvSpPr>
-          <p:cNvPr id="8" name="Text 6"/>
-          <p:cNvSpPr txBox="1"/>
-          <p:nvPr/>
-        </p:nvSpPr>
-        <p:spPr>
-          <a:xfrm>
-            <a:off x="3566160" y="2423160"/>
-            <a:ext cx="2057400" cy="1554480"/>
-          </a:xfrm>
-          <a:prstGeom prst="rect">
-            <a:avLst/>
-          </a:prstGeom>
-          <a:noFill/>
-          <a:ln/>
-        </p:spPr>
-        <p:txBody>
-          <a:bodyPr wrap="square" lIns="0" tIns="0" rIns="0" bIns="0" rtlCol="0" anchor="t"/>
-          <a:lstStyle/>
-          <a:p>
-            <a:pPr indent="0" marL="0">
-              <a:buNone/>
-            </a:pPr>
-            <a:r>
               <a:rPr lang="en-US" sz="1400" dirty="0">
                 <a:solidFill>
-                  <a:schemeClr val="bg1"/>
-                </a:solidFill>
-              </a:rPr>
-              <a:t>Servings, ingredients, all nine major allergens and handling facts start as "unknown" until the donor attests.</a:t>
+                  <a:schemeClr val="tx1"/>
+                </a:solidFill>
+              </a:rPr>
+              <a:t>Texts a photo of a refrigerated sandwich platter</a:t>
             </a:r>
             <a:endParaRPr lang="en-US" sz="1400" dirty="0"/>
           </a:p>
@@ -3985,29 +3508,61 @@
       </p:sp>
       <p:sp>
         <p:nvSpPr>
-          <p:cNvPr id="9" name="principle-card-3"/>
+          <p:cNvPr id="8" name="scene-1-row-2"/>
           <p:cNvSpPr/>
           <p:nvPr/>
         </p:nvSpPr>
         <p:spPr>
           <a:xfrm>
-            <a:off x="6035040" y="1645920"/>
-            <a:ext cx="2514600" cy="2468880"/>
+            <a:off x="548640" y="1865376"/>
+            <a:ext cx="8046720" cy="493776"/>
           </a:xfrm>
           <a:prstGeom prst="roundRect">
             <a:avLst>
-              <a:gd name="adj" fmla="val 4444"/>
+              <a:gd name="adj" fmla="val 22222"/>
             </a:avLst>
           </a:prstGeom>
           <a:solidFill>
-            <a:schemeClr val="tx2"/>
+            <a:schemeClr val="bg1"/>
           </a:solidFill>
           <a:ln w="12700">
             <a:solidFill>
-              <a:schemeClr val="tx2"/>
+              <a:schemeClr val="bg1"/>
             </a:solidFill>
             <a:prstDash val="solid"/>
           </a:ln>
+          <a:effectLst>
+            <a:outerShdw sx="100000" sy="100000" kx="0" ky="0" algn="bl" rotWithShape="0" blurRad="101600" dist="25400" dir="5400000">
+              <a:srgbClr val="17301F">
+                <a:alpha val="12000"/>
+              </a:srgbClr>
+            </a:outerShdw>
+          </a:effectLst>
+        </p:spPr>
+      </p:sp>
+      <p:sp>
+        <p:nvSpPr>
+          <p:cNvPr id="9" name="scene-1-num-bg-2"/>
+          <p:cNvSpPr/>
+          <p:nvPr/>
+        </p:nvSpPr>
+        <p:spPr>
+          <a:xfrm>
+            <a:off x="685800" y="1929384"/>
+            <a:ext cx="365760" cy="365760"/>
+          </a:xfrm>
+          <a:prstGeom prst="ellipse">
+            <a:avLst/>
+          </a:prstGeom>
+          <a:solidFill>
+            <a:srgbClr val="2F7D4F"/>
+          </a:solidFill>
+          <a:ln w="12700">
+            <a:solidFill>
+              <a:srgbClr val="2F7D4F"/>
+            </a:solidFill>
+            <a:prstDash val="solid"/>
+          </a:ln>
         </p:spPr>
       </p:sp>
       <p:sp>
@@ -4018,8 +3573,8 @@
         </p:nvSpPr>
         <p:spPr>
           <a:xfrm>
-            <a:off x="6263640" y="1874520"/>
-            <a:ext cx="2057400" cy="457200"/>
+            <a:off x="685800" y="1929384"/>
+            <a:ext cx="365760" cy="365760"/>
           </a:xfrm>
           <a:prstGeom prst="rect">
             <a:avLst/>
@@ -4031,21 +3586,18 @@
           <a:bodyPr wrap="square" lIns="0" tIns="0" rIns="0" bIns="0" rtlCol="0" anchor="ctr"/>
           <a:lstStyle/>
           <a:p>
-            <a:pPr indent="0" marL="0">
-              <a:buNone/>
-            </a:pPr>
-            <a:r>
-              <a:rPr lang="en-US" sz="2000" b="1" dirty="0">
-                <a:solidFill>
-                  <a:schemeClr val="accent3"/>
-                </a:solidFill>
-                <a:latin typeface="Cambria" pitchFamily="34" charset="0"/>
-                <a:ea typeface="Cambria" pitchFamily="34" charset="-122"/>
-                <a:cs typeface="Cambria" pitchFamily="34" charset="-120"/>
-              </a:rPr>
-              <a:t>Backend enforces</a:t>
-            </a:r>
-            <a:endParaRPr lang="en-US" sz="2000" dirty="0"/>
+            <a:pPr algn="ctr" indent="0" marL="0">
+              <a:buNone/>
+            </a:pPr>
+            <a:r>
+              <a:rPr lang="en-US" sz="1400" b="1" dirty="0">
+                <a:solidFill>
+                  <a:schemeClr val="bg1"/>
+                </a:solidFill>
+              </a:rPr>
+              <a:t>2</a:t>
+            </a:r>
+            <a:endParaRPr lang="en-US" sz="1400" dirty="0"/>
           </a:p>
         </p:txBody>
       </p:sp>
@@ -4057,29 +3609,733 @@
         </p:nvSpPr>
         <p:spPr>
           <a:xfrm>
-            <a:off x="6263640" y="2423160"/>
-            <a:ext cx="2057400" cy="1554480"/>
-          </a:xfrm>
-          <a:prstGeom prst="rect">
-            <a:avLst/>
-          </a:prstGeom>
-          <a:noFill/>
-          <a:ln/>
-        </p:spPr>
-        <p:txBody>
-          <a:bodyPr wrap="square" lIns="0" tIns="0" rIns="0" bIns="0" rtlCol="0" anchor="t"/>
+            <a:off x="1234440" y="1865376"/>
+            <a:ext cx="1554480" cy="493776"/>
+          </a:xfrm>
+          <a:prstGeom prst="rect">
+            <a:avLst/>
+          </a:prstGeom>
+          <a:noFill/>
+          <a:ln/>
+        </p:spPr>
+        <p:txBody>
+          <a:bodyPr wrap="square" lIns="0" tIns="0" rIns="0" bIns="0" rtlCol="0" anchor="ctr"/>
           <a:lstStyle/>
           <a:p>
             <a:pPr indent="0" marL="0">
               <a:buNone/>
             </a:pPr>
             <a:r>
+              <a:rPr lang="en-US" sz="1400" b="1" dirty="0">
+                <a:solidFill>
+                  <a:schemeClr val="tx2"/>
+                </a:solidFill>
+              </a:rPr>
+              <a:t>Annona</a:t>
+            </a:r>
+            <a:endParaRPr lang="en-US" sz="1400" dirty="0"/>
+          </a:p>
+        </p:txBody>
+      </p:sp>
+      <p:sp>
+        <p:nvSpPr>
+          <p:cNvPr id="12" name="Text 10"/>
+          <p:cNvSpPr txBox="1"/>
+          <p:nvPr/>
+        </p:nvSpPr>
+        <p:spPr>
+          <a:xfrm>
+            <a:off x="2834640" y="1865376"/>
+            <a:ext cx="5623560" cy="493776"/>
+          </a:xfrm>
+          <a:prstGeom prst="rect">
+            <a:avLst/>
+          </a:prstGeom>
+          <a:noFill/>
+          <a:ln/>
+        </p:spPr>
+        <p:txBody>
+          <a:bodyPr wrap="square" lIns="0" tIns="0" rIns="0" bIns="0" rtlCol="0" anchor="ctr"/>
+          <a:lstStyle/>
+          <a:p>
+            <a:pPr indent="0" marL="0">
+              <a:buNone/>
+            </a:pPr>
+            <a:r>
               <a:rPr lang="en-US" sz="1400" dirty="0">
                 <a:solidFill>
+                  <a:schemeClr val="tx1"/>
+                </a:solidFill>
+              </a:rPr>
+              <a:t>Replies with an AI guess and a checklist link</a:t>
+            </a:r>
+            <a:endParaRPr lang="en-US" sz="1400" dirty="0"/>
+          </a:p>
+        </p:txBody>
+      </p:sp>
+      <p:sp>
+        <p:nvSpPr>
+          <p:cNvPr id="13" name="scene-1-row-3"/>
+          <p:cNvSpPr/>
+          <p:nvPr/>
+        </p:nvSpPr>
+        <p:spPr>
+          <a:xfrm>
+            <a:off x="548640" y="2450592"/>
+            <a:ext cx="8046720" cy="493776"/>
+          </a:xfrm>
+          <a:prstGeom prst="roundRect">
+            <a:avLst>
+              <a:gd name="adj" fmla="val 22222"/>
+            </a:avLst>
+          </a:prstGeom>
+          <a:solidFill>
+            <a:schemeClr val="bg1"/>
+          </a:solidFill>
+          <a:ln w="12700">
+            <a:solidFill>
+              <a:schemeClr val="bg1"/>
+            </a:solidFill>
+            <a:prstDash val="solid"/>
+          </a:ln>
+          <a:effectLst>
+            <a:outerShdw sx="100000" sy="100000" kx="0" ky="0" algn="bl" rotWithShape="0" blurRad="101600" dist="25400" dir="5400000">
+              <a:srgbClr val="17301F">
+                <a:alpha val="12000"/>
+              </a:srgbClr>
+            </a:outerShdw>
+          </a:effectLst>
+        </p:spPr>
+      </p:sp>
+      <p:sp>
+        <p:nvSpPr>
+          <p:cNvPr id="14" name="scene-1-num-bg-3"/>
+          <p:cNvSpPr/>
+          <p:nvPr/>
+        </p:nvSpPr>
+        <p:spPr>
+          <a:xfrm>
+            <a:off x="685800" y="2514600"/>
+            <a:ext cx="365760" cy="365760"/>
+          </a:xfrm>
+          <a:prstGeom prst="ellipse">
+            <a:avLst/>
+          </a:prstGeom>
+          <a:solidFill>
+            <a:srgbClr val="2F7D4F"/>
+          </a:solidFill>
+          <a:ln w="12700">
+            <a:solidFill>
+              <a:srgbClr val="2F7D4F"/>
+            </a:solidFill>
+            <a:prstDash val="solid"/>
+          </a:ln>
+        </p:spPr>
+      </p:sp>
+      <p:sp>
+        <p:nvSpPr>
+          <p:cNvPr id="15" name="Text 13"/>
+          <p:cNvSpPr txBox="1"/>
+          <p:nvPr/>
+        </p:nvSpPr>
+        <p:spPr>
+          <a:xfrm>
+            <a:off x="685800" y="2514600"/>
+            <a:ext cx="365760" cy="365760"/>
+          </a:xfrm>
+          <a:prstGeom prst="rect">
+            <a:avLst/>
+          </a:prstGeom>
+          <a:noFill/>
+          <a:ln/>
+        </p:spPr>
+        <p:txBody>
+          <a:bodyPr wrap="square" lIns="0" tIns="0" rIns="0" bIns="0" rtlCol="0" anchor="ctr"/>
+          <a:lstStyle/>
+          <a:p>
+            <a:pPr algn="ctr" indent="0" marL="0">
+              <a:buNone/>
+            </a:pPr>
+            <a:r>
+              <a:rPr lang="en-US" sz="1400" b="1" dirty="0">
+                <a:solidFill>
                   <a:schemeClr val="bg1"/>
                 </a:solidFill>
               </a:rPr>
-              <a:t>A deterministic gate returns eligible, needs review or rejected. Unknown never means eligible.</a:t>
+              <a:t>3</a:t>
+            </a:r>
+            <a:endParaRPr lang="en-US" sz="1400" dirty="0"/>
+          </a:p>
+        </p:txBody>
+      </p:sp>
+      <p:sp>
+        <p:nvSpPr>
+          <p:cNvPr id="16" name="Text 14"/>
+          <p:cNvSpPr txBox="1"/>
+          <p:nvPr/>
+        </p:nvSpPr>
+        <p:spPr>
+          <a:xfrm>
+            <a:off x="1234440" y="2450592"/>
+            <a:ext cx="1554480" cy="493776"/>
+          </a:xfrm>
+          <a:prstGeom prst="rect">
+            <a:avLst/>
+          </a:prstGeom>
+          <a:noFill/>
+          <a:ln/>
+        </p:spPr>
+        <p:txBody>
+          <a:bodyPr wrap="square" lIns="0" tIns="0" rIns="0" bIns="0" rtlCol="0" anchor="ctr"/>
+          <a:lstStyle/>
+          <a:p>
+            <a:pPr indent="0" marL="0">
+              <a:buNone/>
+            </a:pPr>
+            <a:r>
+              <a:rPr lang="en-US" sz="1400" b="1" dirty="0">
+                <a:solidFill>
+                  <a:schemeClr val="tx2"/>
+                </a:solidFill>
+              </a:rPr>
+              <a:t>Donor</a:t>
+            </a:r>
+            <a:endParaRPr lang="en-US" sz="1400" dirty="0"/>
+          </a:p>
+        </p:txBody>
+      </p:sp>
+      <p:sp>
+        <p:nvSpPr>
+          <p:cNvPr id="17" name="Text 15"/>
+          <p:cNvSpPr txBox="1"/>
+          <p:nvPr/>
+        </p:nvSpPr>
+        <p:spPr>
+          <a:xfrm>
+            <a:off x="2834640" y="2450592"/>
+            <a:ext cx="5623560" cy="493776"/>
+          </a:xfrm>
+          <a:prstGeom prst="rect">
+            <a:avLst/>
+          </a:prstGeom>
+          <a:noFill/>
+          <a:ln/>
+        </p:spPr>
+        <p:txBody>
+          <a:bodyPr wrap="square" lIns="0" tIns="0" rIns="0" bIns="0" rtlCol="0" anchor="ctr"/>
+          <a:lstStyle/>
+          <a:p>
+            <a:pPr indent="0" marL="0">
+              <a:buNone/>
+            </a:pPr>
+            <a:r>
+              <a:rPr lang="en-US" sz="1400" dirty="0">
+                <a:solidFill>
+                  <a:schemeClr val="tx1"/>
+                </a:solidFill>
+              </a:rPr>
+              <a:t>Sets servings to 24, declares allergens and handling</a:t>
+            </a:r>
+            <a:endParaRPr lang="en-US" sz="1400" dirty="0"/>
+          </a:p>
+        </p:txBody>
+      </p:sp>
+      <p:sp>
+        <p:nvSpPr>
+          <p:cNvPr id="18" name="scene-1-row-4"/>
+          <p:cNvSpPr/>
+          <p:nvPr/>
+        </p:nvSpPr>
+        <p:spPr>
+          <a:xfrm>
+            <a:off x="548640" y="3035808"/>
+            <a:ext cx="8046720" cy="493776"/>
+          </a:xfrm>
+          <a:prstGeom prst="roundRect">
+            <a:avLst>
+              <a:gd name="adj" fmla="val 22222"/>
+            </a:avLst>
+          </a:prstGeom>
+          <a:solidFill>
+            <a:schemeClr val="bg1"/>
+          </a:solidFill>
+          <a:ln w="12700">
+            <a:solidFill>
+              <a:schemeClr val="bg1"/>
+            </a:solidFill>
+            <a:prstDash val="solid"/>
+          </a:ln>
+          <a:effectLst>
+            <a:outerShdw sx="100000" sy="100000" kx="0" ky="0" algn="bl" rotWithShape="0" blurRad="101600" dist="25400" dir="5400000">
+              <a:srgbClr val="17301F">
+                <a:alpha val="12000"/>
+              </a:srgbClr>
+            </a:outerShdw>
+          </a:effectLst>
+        </p:spPr>
+      </p:sp>
+      <p:sp>
+        <p:nvSpPr>
+          <p:cNvPr id="19" name="scene-1-num-bg-4"/>
+          <p:cNvSpPr/>
+          <p:nvPr/>
+        </p:nvSpPr>
+        <p:spPr>
+          <a:xfrm>
+            <a:off x="685800" y="3099816"/>
+            <a:ext cx="365760" cy="365760"/>
+          </a:xfrm>
+          <a:prstGeom prst="ellipse">
+            <a:avLst/>
+          </a:prstGeom>
+          <a:solidFill>
+            <a:srgbClr val="2F7D4F"/>
+          </a:solidFill>
+          <a:ln w="12700">
+            <a:solidFill>
+              <a:srgbClr val="2F7D4F"/>
+            </a:solidFill>
+            <a:prstDash val="solid"/>
+          </a:ln>
+        </p:spPr>
+      </p:sp>
+      <p:sp>
+        <p:nvSpPr>
+          <p:cNvPr id="20" name="Text 18"/>
+          <p:cNvSpPr txBox="1"/>
+          <p:nvPr/>
+        </p:nvSpPr>
+        <p:spPr>
+          <a:xfrm>
+            <a:off x="685800" y="3099816"/>
+            <a:ext cx="365760" cy="365760"/>
+          </a:xfrm>
+          <a:prstGeom prst="rect">
+            <a:avLst/>
+          </a:prstGeom>
+          <a:noFill/>
+          <a:ln/>
+        </p:spPr>
+        <p:txBody>
+          <a:bodyPr wrap="square" lIns="0" tIns="0" rIns="0" bIns="0" rtlCol="0" anchor="ctr"/>
+          <a:lstStyle/>
+          <a:p>
+            <a:pPr algn="ctr" indent="0" marL="0">
+              <a:buNone/>
+            </a:pPr>
+            <a:r>
+              <a:rPr lang="en-US" sz="1400" b="1" dirty="0">
+                <a:solidFill>
+                  <a:schemeClr val="bg1"/>
+                </a:solidFill>
+              </a:rPr>
+              <a:t>4</a:t>
+            </a:r>
+            <a:endParaRPr lang="en-US" sz="1400" dirty="0"/>
+          </a:p>
+        </p:txBody>
+      </p:sp>
+      <p:sp>
+        <p:nvSpPr>
+          <p:cNvPr id="21" name="Text 19"/>
+          <p:cNvSpPr txBox="1"/>
+          <p:nvPr/>
+        </p:nvSpPr>
+        <p:spPr>
+          <a:xfrm>
+            <a:off x="1234440" y="3035808"/>
+            <a:ext cx="1554480" cy="493776"/>
+          </a:xfrm>
+          <a:prstGeom prst="rect">
+            <a:avLst/>
+          </a:prstGeom>
+          <a:noFill/>
+          <a:ln/>
+        </p:spPr>
+        <p:txBody>
+          <a:bodyPr wrap="square" lIns="0" tIns="0" rIns="0" bIns="0" rtlCol="0" anchor="ctr"/>
+          <a:lstStyle/>
+          <a:p>
+            <a:pPr indent="0" marL="0">
+              <a:buNone/>
+            </a:pPr>
+            <a:r>
+              <a:rPr lang="en-US" sz="1400" b="1" dirty="0">
+                <a:solidFill>
+                  <a:schemeClr val="tx2"/>
+                </a:solidFill>
+              </a:rPr>
+              <a:t>Gate</a:t>
+            </a:r>
+            <a:endParaRPr lang="en-US" sz="1400" dirty="0"/>
+          </a:p>
+        </p:txBody>
+      </p:sp>
+      <p:sp>
+        <p:nvSpPr>
+          <p:cNvPr id="22" name="Text 20"/>
+          <p:cNvSpPr txBox="1"/>
+          <p:nvPr/>
+        </p:nvSpPr>
+        <p:spPr>
+          <a:xfrm>
+            <a:off x="2834640" y="3035808"/>
+            <a:ext cx="5623560" cy="493776"/>
+          </a:xfrm>
+          <a:prstGeom prst="rect">
+            <a:avLst/>
+          </a:prstGeom>
+          <a:noFill/>
+          <a:ln/>
+        </p:spPr>
+        <p:txBody>
+          <a:bodyPr wrap="square" lIns="0" tIns="0" rIns="0" bIns="0" rtlCol="0" anchor="ctr"/>
+          <a:lstStyle/>
+          <a:p>
+            <a:pPr indent="0" marL="0">
+              <a:buNone/>
+            </a:pPr>
+            <a:r>
+              <a:rPr lang="en-US" sz="1400" dirty="0">
+                <a:solidFill>
+                  <a:schemeClr val="tx1"/>
+                </a:solidFill>
+              </a:rPr>
+              <a:t>Returns eligible under the prototype policy</a:t>
+            </a:r>
+            <a:endParaRPr lang="en-US" sz="1400" dirty="0"/>
+          </a:p>
+        </p:txBody>
+      </p:sp>
+      <p:sp>
+        <p:nvSpPr>
+          <p:cNvPr id="23" name="scene-1-row-5"/>
+          <p:cNvSpPr/>
+          <p:nvPr/>
+        </p:nvSpPr>
+        <p:spPr>
+          <a:xfrm>
+            <a:off x="548640" y="3621024"/>
+            <a:ext cx="8046720" cy="493776"/>
+          </a:xfrm>
+          <a:prstGeom prst="roundRect">
+            <a:avLst>
+              <a:gd name="adj" fmla="val 22222"/>
+            </a:avLst>
+          </a:prstGeom>
+          <a:solidFill>
+            <a:schemeClr val="bg1"/>
+          </a:solidFill>
+          <a:ln w="12700">
+            <a:solidFill>
+              <a:schemeClr val="bg1"/>
+            </a:solidFill>
+            <a:prstDash val="solid"/>
+          </a:ln>
+          <a:effectLst>
+            <a:outerShdw sx="100000" sy="100000" kx="0" ky="0" algn="bl" rotWithShape="0" blurRad="101600" dist="25400" dir="5400000">
+              <a:srgbClr val="17301F">
+                <a:alpha val="12000"/>
+              </a:srgbClr>
+            </a:outerShdw>
+          </a:effectLst>
+        </p:spPr>
+      </p:sp>
+      <p:sp>
+        <p:nvSpPr>
+          <p:cNvPr id="24" name="scene-1-num-bg-5"/>
+          <p:cNvSpPr/>
+          <p:nvPr/>
+        </p:nvSpPr>
+        <p:spPr>
+          <a:xfrm>
+            <a:off x="685800" y="3685032"/>
+            <a:ext cx="365760" cy="365760"/>
+          </a:xfrm>
+          <a:prstGeom prst="ellipse">
+            <a:avLst/>
+          </a:prstGeom>
+          <a:solidFill>
+            <a:srgbClr val="2F7D4F"/>
+          </a:solidFill>
+          <a:ln w="12700">
+            <a:solidFill>
+              <a:srgbClr val="2F7D4F"/>
+            </a:solidFill>
+            <a:prstDash val="solid"/>
+          </a:ln>
+        </p:spPr>
+      </p:sp>
+      <p:sp>
+        <p:nvSpPr>
+          <p:cNvPr id="25" name="Text 23"/>
+          <p:cNvSpPr txBox="1"/>
+          <p:nvPr/>
+        </p:nvSpPr>
+        <p:spPr>
+          <a:xfrm>
+            <a:off x="685800" y="3685032"/>
+            <a:ext cx="365760" cy="365760"/>
+          </a:xfrm>
+          <a:prstGeom prst="rect">
+            <a:avLst/>
+          </a:prstGeom>
+          <a:noFill/>
+          <a:ln/>
+        </p:spPr>
+        <p:txBody>
+          <a:bodyPr wrap="square" lIns="0" tIns="0" rIns="0" bIns="0" rtlCol="0" anchor="ctr"/>
+          <a:lstStyle/>
+          <a:p>
+            <a:pPr algn="ctr" indent="0" marL="0">
+              <a:buNone/>
+            </a:pPr>
+            <a:r>
+              <a:rPr lang="en-US" sz="1400" b="1" dirty="0">
+                <a:solidFill>
+                  <a:schemeClr val="bg1"/>
+                </a:solidFill>
+              </a:rPr>
+              <a:t>5</a:t>
+            </a:r>
+            <a:endParaRPr lang="en-US" sz="1400" dirty="0"/>
+          </a:p>
+        </p:txBody>
+      </p:sp>
+      <p:sp>
+        <p:nvSpPr>
+          <p:cNvPr id="26" name="Text 24"/>
+          <p:cNvSpPr txBox="1"/>
+          <p:nvPr/>
+        </p:nvSpPr>
+        <p:spPr>
+          <a:xfrm>
+            <a:off x="1234440" y="3621024"/>
+            <a:ext cx="1554480" cy="493776"/>
+          </a:xfrm>
+          <a:prstGeom prst="rect">
+            <a:avLst/>
+          </a:prstGeom>
+          <a:noFill/>
+          <a:ln/>
+        </p:spPr>
+        <p:txBody>
+          <a:bodyPr wrap="square" lIns="0" tIns="0" rIns="0" bIns="0" rtlCol="0" anchor="ctr"/>
+          <a:lstStyle/>
+          <a:p>
+            <a:pPr indent="0" marL="0">
+              <a:buNone/>
+            </a:pPr>
+            <a:r>
+              <a:rPr lang="en-US" sz="1400" b="1" dirty="0">
+                <a:solidFill>
+                  <a:schemeClr val="tx2"/>
+                </a:solidFill>
+              </a:rPr>
+              <a:t>Courier A</a:t>
+            </a:r>
+            <a:endParaRPr lang="en-US" sz="1400" dirty="0"/>
+          </a:p>
+        </p:txBody>
+      </p:sp>
+      <p:sp>
+        <p:nvSpPr>
+          <p:cNvPr id="27" name="Text 25"/>
+          <p:cNvSpPr txBox="1"/>
+          <p:nvPr/>
+        </p:nvSpPr>
+        <p:spPr>
+          <a:xfrm>
+            <a:off x="2834640" y="3621024"/>
+            <a:ext cx="5623560" cy="493776"/>
+          </a:xfrm>
+          <a:prstGeom prst="rect">
+            <a:avLst/>
+          </a:prstGeom>
+          <a:noFill/>
+          <a:ln/>
+        </p:spPr>
+        <p:txBody>
+          <a:bodyPr wrap="square" lIns="0" tIns="0" rIns="0" bIns="0" rtlCol="0" anchor="ctr"/>
+          <a:lstStyle/>
+          <a:p>
+            <a:pPr indent="0" marL="0">
+              <a:buNone/>
+            </a:pPr>
+            <a:r>
+              <a:rPr lang="en-US" sz="1400" dirty="0">
+                <a:solidFill>
+                  <a:schemeClr val="tx1"/>
+                </a:solidFill>
+              </a:rPr>
+              <a:t>Gets a timed offer, replies YES with the code</a:t>
+            </a:r>
+            <a:endParaRPr lang="en-US" sz="1400" dirty="0"/>
+          </a:p>
+        </p:txBody>
+      </p:sp>
+      <p:sp>
+        <p:nvSpPr>
+          <p:cNvPr id="28" name="scene-1-row-6"/>
+          <p:cNvSpPr/>
+          <p:nvPr/>
+        </p:nvSpPr>
+        <p:spPr>
+          <a:xfrm>
+            <a:off x="548640" y="4206240"/>
+            <a:ext cx="8046720" cy="493776"/>
+          </a:xfrm>
+          <a:prstGeom prst="roundRect">
+            <a:avLst>
+              <a:gd name="adj" fmla="val 22222"/>
+            </a:avLst>
+          </a:prstGeom>
+          <a:solidFill>
+            <a:schemeClr val="bg1"/>
+          </a:solidFill>
+          <a:ln w="12700">
+            <a:solidFill>
+              <a:schemeClr val="bg1"/>
+            </a:solidFill>
+            <a:prstDash val="solid"/>
+          </a:ln>
+          <a:effectLst>
+            <a:outerShdw sx="100000" sy="100000" kx="0" ky="0" algn="bl" rotWithShape="0" blurRad="101600" dist="25400" dir="5400000">
+              <a:srgbClr val="17301F">
+                <a:alpha val="12000"/>
+              </a:srgbClr>
+            </a:outerShdw>
+          </a:effectLst>
+        </p:spPr>
+      </p:sp>
+      <p:sp>
+        <p:nvSpPr>
+          <p:cNvPr id="29" name="scene-1-num-bg-6"/>
+          <p:cNvSpPr/>
+          <p:nvPr/>
+        </p:nvSpPr>
+        <p:spPr>
+          <a:xfrm>
+            <a:off x="685800" y="4270248"/>
+            <a:ext cx="365760" cy="365760"/>
+          </a:xfrm>
+          <a:prstGeom prst="ellipse">
+            <a:avLst/>
+          </a:prstGeom>
+          <a:solidFill>
+            <a:srgbClr val="2F7D4F"/>
+          </a:solidFill>
+          <a:ln w="12700">
+            <a:solidFill>
+              <a:srgbClr val="2F7D4F"/>
+            </a:solidFill>
+            <a:prstDash val="solid"/>
+          </a:ln>
+        </p:spPr>
+      </p:sp>
+      <p:sp>
+        <p:nvSpPr>
+          <p:cNvPr id="30" name="Text 28"/>
+          <p:cNvSpPr txBox="1"/>
+          <p:nvPr/>
+        </p:nvSpPr>
+        <p:spPr>
+          <a:xfrm>
+            <a:off x="685800" y="4270248"/>
+            <a:ext cx="365760" cy="365760"/>
+          </a:xfrm>
+          <a:prstGeom prst="rect">
+            <a:avLst/>
+          </a:prstGeom>
+          <a:noFill/>
+          <a:ln/>
+        </p:spPr>
+        <p:txBody>
+          <a:bodyPr wrap="square" lIns="0" tIns="0" rIns="0" bIns="0" rtlCol="0" anchor="ctr"/>
+          <a:lstStyle/>
+          <a:p>
+            <a:pPr algn="ctr" indent="0" marL="0">
+              <a:buNone/>
+            </a:pPr>
+            <a:r>
+              <a:rPr lang="en-US" sz="1400" b="1" dirty="0">
+                <a:solidFill>
+                  <a:schemeClr val="bg1"/>
+                </a:solidFill>
+              </a:rPr>
+              <a:t>6</a:t>
+            </a:r>
+            <a:endParaRPr lang="en-US" sz="1400" dirty="0"/>
+          </a:p>
+        </p:txBody>
+      </p:sp>
+      <p:sp>
+        <p:nvSpPr>
+          <p:cNvPr id="31" name="Text 29"/>
+          <p:cNvSpPr txBox="1"/>
+          <p:nvPr/>
+        </p:nvSpPr>
+        <p:spPr>
+          <a:xfrm>
+            <a:off x="1234440" y="4206240"/>
+            <a:ext cx="1554480" cy="493776"/>
+          </a:xfrm>
+          <a:prstGeom prst="rect">
+            <a:avLst/>
+          </a:prstGeom>
+          <a:noFill/>
+          <a:ln/>
+        </p:spPr>
+        <p:txBody>
+          <a:bodyPr wrap="square" lIns="0" tIns="0" rIns="0" bIns="0" rtlCol="0" anchor="ctr"/>
+          <a:lstStyle/>
+          <a:p>
+            <a:pPr indent="0" marL="0">
+              <a:buNone/>
+            </a:pPr>
+            <a:r>
+              <a:rPr lang="en-US" sz="1400" b="1" dirty="0">
+                <a:solidFill>
+                  <a:schemeClr val="tx2"/>
+                </a:solidFill>
+              </a:rPr>
+              <a:t>Dashboard</a:t>
+            </a:r>
+            <a:endParaRPr lang="en-US" sz="1400" dirty="0"/>
+          </a:p>
+        </p:txBody>
+      </p:sp>
+      <p:sp>
+        <p:nvSpPr>
+          <p:cNvPr id="32" name="Text 30"/>
+          <p:cNvSpPr txBox="1"/>
+          <p:nvPr/>
+        </p:nvSpPr>
+        <p:spPr>
+          <a:xfrm>
+            <a:off x="2834640" y="4206240"/>
+            <a:ext cx="5623560" cy="493776"/>
+          </a:xfrm>
+          <a:prstGeom prst="rect">
+            <a:avLst/>
+          </a:prstGeom>
+          <a:noFill/>
+          <a:ln/>
+        </p:spPr>
+        <p:txBody>
+          <a:bodyPr wrap="square" lIns="0" tIns="0" rIns="0" bIns="0" rtlCol="0" anchor="ctr"/>
+          <a:lstStyle/>
+          <a:p>
+            <a:pPr indent="0" marL="0">
+              <a:buNone/>
+            </a:pPr>
+            <a:r>
+              <a:rPr lang="en-US" sz="1400" dirty="0">
+                <a:solidFill>
+                  <a:schemeClr val="tx1"/>
+                </a:solidFill>
+              </a:rPr>
+              <a:t>Claimed; pickup and delivery are simulated</a:t>
             </a:r>
             <a:endParaRPr lang="en-US" sz="1400" dirty="0"/>
           </a:p>
@@ -4187,7 +4443,7 @@
                   <a:schemeClr val="tx2"/>
                 </a:solidFill>
               </a:rPr>
-              <a:t>Scene 1: Success</a:t>
+              <a:t>Scene 2: No response, late reply</a:t>
             </a:r>
             <a:endParaRPr lang="en-US" sz="3000" dirty="0"/>
           </a:p>
@@ -4195,18 +4451,18 @@
       </p:sp>
       <p:sp>
         <p:nvSpPr>
-          <p:cNvPr id="3" name="scene-1-row-1"/>
+          <p:cNvPr id="3" name="scene-2-row-1"/>
           <p:cNvSpPr/>
           <p:nvPr/>
         </p:nvSpPr>
         <p:spPr>
           <a:xfrm>
             <a:off x="548640" y="1280160"/>
-            <a:ext cx="8046720" cy="493776"/>
+            <a:ext cx="8046720" cy="621792"/>
           </a:xfrm>
           <a:prstGeom prst="roundRect">
             <a:avLst>
-              <a:gd name="adj" fmla="val 22222"/>
+              <a:gd name="adj" fmla="val 17647"/>
             </a:avLst>
           </a:prstGeom>
           <a:solidFill>
@@ -4229,24 +4485,24 @@
       </p:sp>
       <p:sp>
         <p:nvSpPr>
-          <p:cNvPr id="4" name="scene-1-num-bg-1"/>
+          <p:cNvPr id="4" name="scene-2-num-bg-1"/>
           <p:cNvSpPr/>
           <p:nvPr/>
         </p:nvSpPr>
         <p:spPr>
           <a:xfrm>
-            <a:off x="685800" y="1344168"/>
+            <a:off x="685800" y="1408176"/>
             <a:ext cx="365760" cy="365760"/>
           </a:xfrm>
           <a:prstGeom prst="ellipse">
             <a:avLst/>
           </a:prstGeom>
           <a:solidFill>
-            <a:srgbClr val="2F7D4F"/>
+            <a:srgbClr val="E8833A"/>
           </a:solidFill>
           <a:ln w="12700">
             <a:solidFill>
-              <a:srgbClr val="2F7D4F"/>
+              <a:srgbClr val="E8833A"/>
             </a:solidFill>
             <a:prstDash val="solid"/>
           </a:ln>
@@ -4260,7 +4516,7 @@
         </p:nvSpPr>
         <p:spPr>
           <a:xfrm>
-            <a:off x="685800" y="1344168"/>
+            <a:off x="685800" y="1408176"/>
             <a:ext cx="365760" cy="365760"/>
           </a:xfrm>
           <a:prstGeom prst="rect">
@@ -4297,7 +4553,7 @@
         <p:spPr>
           <a:xfrm>
             <a:off x="1234440" y="1280160"/>
-            <a:ext cx="1554480" cy="493776"/>
+            <a:ext cx="1554480" cy="621792"/>
           </a:xfrm>
           <a:prstGeom prst="rect">
             <a:avLst/>
@@ -4318,7 +4574,7 @@
                   <a:schemeClr val="tx2"/>
                 </a:solidFill>
               </a:rPr>
-              <a:t>Donor phone</a:t>
+              <a:t>Courier A</a:t>
             </a:r>
             <a:endParaRPr lang="en-US" sz="1400" dirty="0"/>
           </a:p>
@@ -4333,7 +4589,7 @@
         <p:spPr>
           <a:xfrm>
             <a:off x="2834640" y="1280160"/>
-            <a:ext cx="5623560" cy="493776"/>
+            <a:ext cx="5623560" cy="621792"/>
           </a:xfrm>
           <a:prstGeom prst="rect">
             <a:avLst/>
@@ -4354,7 +4610,7 @@
                   <a:schemeClr val="tx1"/>
                 </a:solidFill>
               </a:rPr>
-              <a:t>Texts a photo of a refrigerated sandwich platter</a:t>
+              <a:t>Ignores a 60-second accelerated offer</a:t>
             </a:r>
             <a:endParaRPr lang="en-US" sz="1400" dirty="0"/>
           </a:p>
@@ -4362,18 +4618,18 @@
       </p:sp>
       <p:sp>
         <p:nvSpPr>
-          <p:cNvPr id="8" name="scene-1-row-2"/>
+          <p:cNvPr id="8" name="scene-2-row-2"/>
           <p:cNvSpPr/>
           <p:nvPr/>
         </p:nvSpPr>
         <p:spPr>
           <a:xfrm>
-            <a:off x="548640" y="1865376"/>
-            <a:ext cx="8046720" cy="493776"/>
+            <a:off x="548640" y="1993392"/>
+            <a:ext cx="8046720" cy="621792"/>
           </a:xfrm>
           <a:prstGeom prst="roundRect">
             <a:avLst>
-              <a:gd name="adj" fmla="val 22222"/>
+              <a:gd name="adj" fmla="val 17647"/>
             </a:avLst>
           </a:prstGeom>
           <a:solidFill>
@@ -4396,24 +4652,24 @@
       </p:sp>
       <p:sp>
         <p:nvSpPr>
-          <p:cNvPr id="9" name="scene-1-num-bg-2"/>
+          <p:cNvPr id="9" name="scene-2-num-bg-2"/>
           <p:cNvSpPr/>
           <p:nvPr/>
         </p:nvSpPr>
         <p:spPr>
           <a:xfrm>
-            <a:off x="685800" y="1929384"/>
+            <a:off x="685800" y="2121408"/>
             <a:ext cx="365760" cy="365760"/>
           </a:xfrm>
           <a:prstGeom prst="ellipse">
             <a:avLst/>
           </a:prstGeom>
           <a:solidFill>
-            <a:srgbClr val="2F7D4F"/>
+            <a:srgbClr val="E8833A"/>
           </a:solidFill>
           <a:ln w="12700">
             <a:solidFill>
-              <a:srgbClr val="2F7D4F"/>
+              <a:srgbClr val="E8833A"/>
             </a:solidFill>
             <a:prstDash val="solid"/>
           </a:ln>
@@ -4427,7 +4683,7 @@
         </p:nvSpPr>
         <p:spPr>
           <a:xfrm>
-            <a:off x="685800" y="1929384"/>
+            <a:off x="685800" y="2121408"/>
             <a:ext cx="365760" cy="365760"/>
           </a:xfrm>
           <a:prstGeom prst="rect">
@@ -4463,8 +4719,8 @@
         </p:nvSpPr>
         <p:spPr>
           <a:xfrm>
-            <a:off x="1234440" y="1865376"/>
-            <a:ext cx="1554480" cy="493776"/>
+            <a:off x="1234440" y="1993392"/>
+            <a:ext cx="1554480" cy="621792"/>
           </a:xfrm>
           <a:prstGeom prst="rect">
             <a:avLst/>
@@ -4485,7 +4741,7 @@
                   <a:schemeClr val="tx2"/>
                 </a:solidFill>
               </a:rPr>
-              <a:t>Annona</a:t>
+              <a:t>Server tick</a:t>
             </a:r>
             <a:endParaRPr lang="en-US" sz="1400" dirty="0"/>
           </a:p>
@@ -4499,8 +4755,8 @@
         </p:nvSpPr>
         <p:spPr>
           <a:xfrm>
-            <a:off x="2834640" y="1865376"/>
-            <a:ext cx="5623560" cy="493776"/>
+            <a:off x="2834640" y="1993392"/>
+            <a:ext cx="5623560" cy="621792"/>
           </a:xfrm>
           <a:prstGeom prst="rect">
             <a:avLst/>
@@ -4521,7 +4777,7 @@
                   <a:schemeClr val="tx1"/>
                 </a:solidFill>
               </a:rPr>
-              <a:t>Replies with an AI guess and a checklist link</a:t>
+              <a:t>Expires the offer and moves to the next candidate</a:t>
             </a:r>
             <a:endParaRPr lang="en-US" sz="1400" dirty="0"/>
           </a:p>
@@ -4529,18 +4785,18 @@
       </p:sp>
       <p:sp>
         <p:nvSpPr>
-          <p:cNvPr id="13" name="scene-1-row-3"/>
+          <p:cNvPr id="13" name="scene-2-row-3"/>
           <p:cNvSpPr/>
           <p:nvPr/>
         </p:nvSpPr>
         <p:spPr>
           <a:xfrm>
-            <a:off x="548640" y="2450592"/>
-            <a:ext cx="8046720" cy="493776"/>
+            <a:off x="548640" y="2706624"/>
+            <a:ext cx="8046720" cy="621792"/>
           </a:xfrm>
           <a:prstGeom prst="roundRect">
             <a:avLst>
-              <a:gd name="adj" fmla="val 22222"/>
+              <a:gd name="adj" fmla="val 17647"/>
             </a:avLst>
           </a:prstGeom>
           <a:solidFill>
@@ -4563,24 +4819,24 @@
       </p:sp>
       <p:sp>
         <p:nvSpPr>
-          <p:cNvPr id="14" name="scene-1-num-bg-3"/>
+          <p:cNvPr id="14" name="scene-2-num-bg-3"/>
           <p:cNvSpPr/>
           <p:nvPr/>
         </p:nvSpPr>
         <p:spPr>
           <a:xfrm>
-            <a:off x="685800" y="2514600"/>
+            <a:off x="685800" y="2834640"/>
             <a:ext cx="365760" cy="365760"/>
           </a:xfrm>
           <a:prstGeom prst="ellipse">
             <a:avLst/>
           </a:prstGeom>
           <a:solidFill>
-            <a:srgbClr val="2F7D4F"/>
+            <a:srgbClr val="E8833A"/>
           </a:solidFill>
           <a:ln w="12700">
             <a:solidFill>
-              <a:srgbClr val="2F7D4F"/>
+              <a:srgbClr val="E8833A"/>
             </a:solidFill>
             <a:prstDash val="solid"/>
           </a:ln>
@@ -4594,7 +4850,7 @@
         </p:nvSpPr>
         <p:spPr>
           <a:xfrm>
-            <a:off x="685800" y="2514600"/>
+            <a:off x="685800" y="2834640"/>
             <a:ext cx="365760" cy="365760"/>
           </a:xfrm>
           <a:prstGeom prst="rect">
@@ -4630,8 +4886,8 @@
         </p:nvSpPr>
         <p:spPr>
           <a:xfrm>
-            <a:off x="1234440" y="2450592"/>
-            <a:ext cx="1554480" cy="493776"/>
+            <a:off x="1234440" y="2706624"/>
+            <a:ext cx="1554480" cy="621792"/>
           </a:xfrm>
           <a:prstGeom prst="rect">
             <a:avLst/>
@@ -4652,7 +4908,7 @@
                   <a:schemeClr val="tx2"/>
                 </a:solidFill>
               </a:rPr>
-              <a:t>Donor</a:t>
+              <a:t>Courier B</a:t>
             </a:r>
             <a:endParaRPr lang="en-US" sz="1400" dirty="0"/>
           </a:p>
@@ -4666,8 +4922,8 @@
         </p:nvSpPr>
         <p:spPr>
           <a:xfrm>
-            <a:off x="2834640" y="2450592"/>
-            <a:ext cx="5623560" cy="493776"/>
+            <a:off x="2834640" y="2706624"/>
+            <a:ext cx="5623560" cy="621792"/>
           </a:xfrm>
           <a:prstGeom prst="rect">
             <a:avLst/>
@@ -4688,7 +4944,7 @@
                   <a:schemeClr val="tx1"/>
                 </a:solidFill>
               </a:rPr>
-              <a:t>Sets servings to 24, declares allergens and handling</a:t>
+              <a:t>Accepts and wins the claim</a:t>
             </a:r>
             <a:endParaRPr lang="en-US" sz="1400" dirty="0"/>
           </a:p>
@@ -4696,18 +4952,18 @@
       </p:sp>
       <p:sp>
         <p:nvSpPr>
-          <p:cNvPr id="18" name="scene-1-row-4"/>
+          <p:cNvPr id="18" name="scene-2-row-4"/>
           <p:cNvSpPr/>
           <p:nvPr/>
         </p:nvSpPr>
         <p:spPr>
           <a:xfrm>
-            <a:off x="548640" y="3035808"/>
-            <a:ext cx="8046720" cy="493776"/>
+            <a:off x="548640" y="3419856"/>
+            <a:ext cx="8046720" cy="621792"/>
           </a:xfrm>
           <a:prstGeom prst="roundRect">
             <a:avLst>
-              <a:gd name="adj" fmla="val 22222"/>
+              <a:gd name="adj" fmla="val 17647"/>
             </a:avLst>
           </a:prstGeom>
           <a:solidFill>
@@ -4730,24 +4986,24 @@
       </p:sp>
       <p:sp>
         <p:nvSpPr>
-          <p:cNvPr id="19" name="scene-1-num-bg-4"/>
+          <p:cNvPr id="19" name="scene-2-num-bg-4"/>
           <p:cNvSpPr/>
           <p:nvPr/>
         </p:nvSpPr>
         <p:spPr>
           <a:xfrm>
-            <a:off x="685800" y="3099816"/>
+            <a:off x="685800" y="3547872"/>
             <a:ext cx="365760" cy="365760"/>
           </a:xfrm>
           <a:prstGeom prst="ellipse">
             <a:avLst/>
           </a:prstGeom>
           <a:solidFill>
-            <a:srgbClr val="2F7D4F"/>
+            <a:srgbClr val="E8833A"/>
           </a:solidFill>
           <a:ln w="12700">
             <a:solidFill>
-              <a:srgbClr val="2F7D4F"/>
+              <a:srgbClr val="E8833A"/>
             </a:solidFill>
             <a:prstDash val="solid"/>
           </a:ln>
@@ -4761,7 +5017,7 @@
         </p:nvSpPr>
         <p:spPr>
           <a:xfrm>
-            <a:off x="685800" y="3099816"/>
+            <a:off x="685800" y="3547872"/>
             <a:ext cx="365760" cy="365760"/>
           </a:xfrm>
           <a:prstGeom prst="rect">
@@ -4797,8 +5053,8 @@
         </p:nvSpPr>
         <p:spPr>
           <a:xfrm>
-            <a:off x="1234440" y="3035808"/>
-            <a:ext cx="1554480" cy="493776"/>
+            <a:off x="1234440" y="3419856"/>
+            <a:ext cx="1554480" cy="621792"/>
           </a:xfrm>
           <a:prstGeom prst="rect">
             <a:avLst/>
@@ -4819,7 +5075,7 @@
                   <a:schemeClr val="tx2"/>
                 </a:solidFill>
               </a:rPr>
-              <a:t>Gate</a:t>
+              <a:t>Courier A</a:t>
             </a:r>
             <a:endParaRPr lang="en-US" sz="1400" dirty="0"/>
           </a:p>
@@ -4833,8 +5089,8 @@
         </p:nvSpPr>
         <p:spPr>
           <a:xfrm>
-            <a:off x="2834640" y="3035808"/>
-            <a:ext cx="5623560" cy="493776"/>
+            <a:off x="2834640" y="3419856"/>
+            <a:ext cx="5623560" cy="621792"/>
           </a:xfrm>
           <a:prstGeom prst="rect">
             <a:avLst/>
@@ -4855,341 +5111,7 @@
                   <a:schemeClr val="tx1"/>
                 </a:solidFill>
               </a:rPr>
-              <a:t>Returns eligible under the prototype policy</a:t>
-            </a:r>
-            <a:endParaRPr lang="en-US" sz="1400" dirty="0"/>
-          </a:p>
-        </p:txBody>
-      </p:sp>
-      <p:sp>
-        <p:nvSpPr>
-          <p:cNvPr id="23" name="scene-1-row-5"/>
-          <p:cNvSpPr/>
-          <p:nvPr/>
-        </p:nvSpPr>
-        <p:spPr>
-          <a:xfrm>
-            <a:off x="548640" y="3621024"/>
-            <a:ext cx="8046720" cy="493776"/>
-          </a:xfrm>
-          <a:prstGeom prst="roundRect">
-            <a:avLst>
-              <a:gd name="adj" fmla="val 22222"/>
-            </a:avLst>
-          </a:prstGeom>
-          <a:solidFill>
-            <a:schemeClr val="bg1"/>
-          </a:solidFill>
-          <a:ln w="12700">
-            <a:solidFill>
-              <a:schemeClr val="bg1"/>
-            </a:solidFill>
-            <a:prstDash val="solid"/>
-          </a:ln>
-          <a:effectLst>
-            <a:outerShdw sx="100000" sy="100000" kx="0" ky="0" algn="bl" rotWithShape="0" blurRad="101600" dist="25400" dir="5400000">
-              <a:srgbClr val="17301F">
-                <a:alpha val="12000"/>
-              </a:srgbClr>
-            </a:outerShdw>
-          </a:effectLst>
-        </p:spPr>
-      </p:sp>
-      <p:sp>
-        <p:nvSpPr>
-          <p:cNvPr id="24" name="scene-1-num-bg-5"/>
-          <p:cNvSpPr/>
-          <p:nvPr/>
-        </p:nvSpPr>
-        <p:spPr>
-          <a:xfrm>
-            <a:off x="685800" y="3685032"/>
-            <a:ext cx="365760" cy="365760"/>
-          </a:xfrm>
-          <a:prstGeom prst="ellipse">
-            <a:avLst/>
-          </a:prstGeom>
-          <a:solidFill>
-            <a:srgbClr val="2F7D4F"/>
-          </a:solidFill>
-          <a:ln w="12700">
-            <a:solidFill>
-              <a:srgbClr val="2F7D4F"/>
-            </a:solidFill>
-            <a:prstDash val="solid"/>
-          </a:ln>
-        </p:spPr>
-      </p:sp>
-      <p:sp>
-        <p:nvSpPr>
-          <p:cNvPr id="25" name="Text 23"/>
-          <p:cNvSpPr txBox="1"/>
-          <p:nvPr/>
-        </p:nvSpPr>
-        <p:spPr>
-          <a:xfrm>
-            <a:off x="685800" y="3685032"/>
-            <a:ext cx="365760" cy="365760"/>
-          </a:xfrm>
-          <a:prstGeom prst="rect">
-            <a:avLst/>
-          </a:prstGeom>
-          <a:noFill/>
-          <a:ln/>
-        </p:spPr>
-        <p:txBody>
-          <a:bodyPr wrap="square" lIns="0" tIns="0" rIns="0" bIns="0" rtlCol="0" anchor="ctr"/>
-          <a:lstStyle/>
-          <a:p>
-            <a:pPr algn="ctr" indent="0" marL="0">
-              <a:buNone/>
-            </a:pPr>
-            <a:r>
-              <a:rPr lang="en-US" sz="1400" b="1" dirty="0">
-                <a:solidFill>
-                  <a:schemeClr val="bg1"/>
-                </a:solidFill>
-              </a:rPr>
-              <a:t>5</a:t>
-            </a:r>
-            <a:endParaRPr lang="en-US" sz="1400" dirty="0"/>
-          </a:p>
-        </p:txBody>
-      </p:sp>
-      <p:sp>
-        <p:nvSpPr>
-          <p:cNvPr id="26" name="Text 24"/>
-          <p:cNvSpPr txBox="1"/>
-          <p:nvPr/>
-        </p:nvSpPr>
-        <p:spPr>
-          <a:xfrm>
-            <a:off x="1234440" y="3621024"/>
-            <a:ext cx="1554480" cy="493776"/>
-          </a:xfrm>
-          <a:prstGeom prst="rect">
-            <a:avLst/>
-          </a:prstGeom>
-          <a:noFill/>
-          <a:ln/>
-        </p:spPr>
-        <p:txBody>
-          <a:bodyPr wrap="square" lIns="0" tIns="0" rIns="0" bIns="0" rtlCol="0" anchor="ctr"/>
-          <a:lstStyle/>
-          <a:p>
-            <a:pPr indent="0" marL="0">
-              <a:buNone/>
-            </a:pPr>
-            <a:r>
-              <a:rPr lang="en-US" sz="1400" b="1" dirty="0">
-                <a:solidFill>
-                  <a:schemeClr val="tx2"/>
-                </a:solidFill>
-              </a:rPr>
-              <a:t>Courier A</a:t>
-            </a:r>
-            <a:endParaRPr lang="en-US" sz="1400" dirty="0"/>
-          </a:p>
-        </p:txBody>
-      </p:sp>
-      <p:sp>
-        <p:nvSpPr>
-          <p:cNvPr id="27" name="Text 25"/>
-          <p:cNvSpPr txBox="1"/>
-          <p:nvPr/>
-        </p:nvSpPr>
-        <p:spPr>
-          <a:xfrm>
-            <a:off x="2834640" y="3621024"/>
-            <a:ext cx="5623560" cy="493776"/>
-          </a:xfrm>
-          <a:prstGeom prst="rect">
-            <a:avLst/>
-          </a:prstGeom>
-          <a:noFill/>
-          <a:ln/>
-        </p:spPr>
-        <p:txBody>
-          <a:bodyPr wrap="square" lIns="0" tIns="0" rIns="0" bIns="0" rtlCol="0" anchor="ctr"/>
-          <a:lstStyle/>
-          <a:p>
-            <a:pPr indent="0" marL="0">
-              <a:buNone/>
-            </a:pPr>
-            <a:r>
-              <a:rPr lang="en-US" sz="1400" dirty="0">
-                <a:solidFill>
-                  <a:schemeClr val="tx1"/>
-                </a:solidFill>
-              </a:rPr>
-              <a:t>Gets a timed offer, replies YES with the code</a:t>
-            </a:r>
-            <a:endParaRPr lang="en-US" sz="1400" dirty="0"/>
-          </a:p>
-        </p:txBody>
-      </p:sp>
-      <p:sp>
-        <p:nvSpPr>
-          <p:cNvPr id="28" name="scene-1-row-6"/>
-          <p:cNvSpPr/>
-          <p:nvPr/>
-        </p:nvSpPr>
-        <p:spPr>
-          <a:xfrm>
-            <a:off x="548640" y="4206240"/>
-            <a:ext cx="8046720" cy="493776"/>
-          </a:xfrm>
-          <a:prstGeom prst="roundRect">
-            <a:avLst>
-              <a:gd name="adj" fmla="val 22222"/>
-            </a:avLst>
-          </a:prstGeom>
-          <a:solidFill>
-            <a:schemeClr val="bg1"/>
-          </a:solidFill>
-          <a:ln w="12700">
-            <a:solidFill>
-              <a:schemeClr val="bg1"/>
-            </a:solidFill>
-            <a:prstDash val="solid"/>
-          </a:ln>
-          <a:effectLst>
-            <a:outerShdw sx="100000" sy="100000" kx="0" ky="0" algn="bl" rotWithShape="0" blurRad="101600" dist="25400" dir="5400000">
-              <a:srgbClr val="17301F">
-                <a:alpha val="12000"/>
-              </a:srgbClr>
-            </a:outerShdw>
-          </a:effectLst>
-        </p:spPr>
-      </p:sp>
-      <p:sp>
-        <p:nvSpPr>
-          <p:cNvPr id="29" name="scene-1-num-bg-6"/>
-          <p:cNvSpPr/>
-          <p:nvPr/>
-        </p:nvSpPr>
-        <p:spPr>
-          <a:xfrm>
-            <a:off x="685800" y="4270248"/>
-            <a:ext cx="365760" cy="365760"/>
-          </a:xfrm>
-          <a:prstGeom prst="ellipse">
-            <a:avLst/>
-          </a:prstGeom>
-          <a:solidFill>
-            <a:srgbClr val="2F7D4F"/>
-          </a:solidFill>
-          <a:ln w="12700">
-            <a:solidFill>
-              <a:srgbClr val="2F7D4F"/>
-            </a:solidFill>
-            <a:prstDash val="solid"/>
-          </a:ln>
-        </p:spPr>
-      </p:sp>
-      <p:sp>
-        <p:nvSpPr>
-          <p:cNvPr id="30" name="Text 28"/>
-          <p:cNvSpPr txBox="1"/>
-          <p:nvPr/>
-        </p:nvSpPr>
-        <p:spPr>
-          <a:xfrm>
-            <a:off x="685800" y="4270248"/>
-            <a:ext cx="365760" cy="365760"/>
-          </a:xfrm>
-          <a:prstGeom prst="rect">
-            <a:avLst/>
-          </a:prstGeom>
-          <a:noFill/>
-          <a:ln/>
-        </p:spPr>
-        <p:txBody>
-          <a:bodyPr wrap="square" lIns="0" tIns="0" rIns="0" bIns="0" rtlCol="0" anchor="ctr"/>
-          <a:lstStyle/>
-          <a:p>
-            <a:pPr algn="ctr" indent="0" marL="0">
-              <a:buNone/>
-            </a:pPr>
-            <a:r>
-              <a:rPr lang="en-US" sz="1400" b="1" dirty="0">
-                <a:solidFill>
-                  <a:schemeClr val="bg1"/>
-                </a:solidFill>
-              </a:rPr>
-              <a:t>6</a:t>
-            </a:r>
-            <a:endParaRPr lang="en-US" sz="1400" dirty="0"/>
-          </a:p>
-        </p:txBody>
-      </p:sp>
-      <p:sp>
-        <p:nvSpPr>
-          <p:cNvPr id="31" name="Text 29"/>
-          <p:cNvSpPr txBox="1"/>
-          <p:nvPr/>
-        </p:nvSpPr>
-        <p:spPr>
-          <a:xfrm>
-            <a:off x="1234440" y="4206240"/>
-            <a:ext cx="1554480" cy="493776"/>
-          </a:xfrm>
-          <a:prstGeom prst="rect">
-            <a:avLst/>
-          </a:prstGeom>
-          <a:noFill/>
-          <a:ln/>
-        </p:spPr>
-        <p:txBody>
-          <a:bodyPr wrap="square" lIns="0" tIns="0" rIns="0" bIns="0" rtlCol="0" anchor="ctr"/>
-          <a:lstStyle/>
-          <a:p>
-            <a:pPr indent="0" marL="0">
-              <a:buNone/>
-            </a:pPr>
-            <a:r>
-              <a:rPr lang="en-US" sz="1400" b="1" dirty="0">
-                <a:solidFill>
-                  <a:schemeClr val="tx2"/>
-                </a:solidFill>
-              </a:rPr>
-              <a:t>Dashboard</a:t>
-            </a:r>
-            <a:endParaRPr lang="en-US" sz="1400" dirty="0"/>
-          </a:p>
-        </p:txBody>
-      </p:sp>
-      <p:sp>
-        <p:nvSpPr>
-          <p:cNvPr id="32" name="Text 30"/>
-          <p:cNvSpPr txBox="1"/>
-          <p:nvPr/>
-        </p:nvSpPr>
-        <p:spPr>
-          <a:xfrm>
-            <a:off x="2834640" y="4206240"/>
-            <a:ext cx="5623560" cy="493776"/>
-          </a:xfrm>
-          <a:prstGeom prst="rect">
-            <a:avLst/>
-          </a:prstGeom>
-          <a:noFill/>
-          <a:ln/>
-        </p:spPr>
-        <p:txBody>
-          <a:bodyPr wrap="square" lIns="0" tIns="0" rIns="0" bIns="0" rtlCol="0" anchor="ctr"/>
-          <a:lstStyle/>
-          <a:p>
-            <a:pPr indent="0" marL="0">
-              <a:buNone/>
-            </a:pPr>
-            <a:r>
-              <a:rPr lang="en-US" sz="1400" dirty="0">
-                <a:solidFill>
-                  <a:schemeClr val="tx1"/>
-                </a:solidFill>
-              </a:rPr>
-              <a:t>Claimed; pickup and delivery are simulated</a:t>
+              <a:t>Replies late and is told no assignment was made</a:t>
             </a:r>
             <a:endParaRPr lang="en-US" sz="1400" dirty="0"/>
           </a:p>
@@ -5297,7 +5219,7 @@
                   <a:schemeClr val="tx2"/>
                 </a:solidFill>
               </a:rPr>
-              <a:t>Scene 2: No response, late reply</a:t>
+              <a:t>Scene 3: Responsible refusal</a:t>
             </a:r>
             <a:endParaRPr lang="en-US" sz="3000" dirty="0"/>
           </a:p>
@@ -5305,18 +5227,18 @@
       </p:sp>
       <p:sp>
         <p:nvSpPr>
-          <p:cNvPr id="3" name="scene-2-row-1"/>
+          <p:cNvPr id="3" name="refusal-input-card"/>
           <p:cNvSpPr/>
           <p:nvPr/>
         </p:nvSpPr>
         <p:spPr>
           <a:xfrm>
-            <a:off x="548640" y="1280160"/>
-            <a:ext cx="8046720" cy="621792"/>
+            <a:off x="548640" y="1371600"/>
+            <a:ext cx="3108960" cy="2926080"/>
           </a:xfrm>
           <a:prstGeom prst="roundRect">
             <a:avLst>
-              <a:gd name="adj" fmla="val 17647"/>
+              <a:gd name="adj" fmla="val 3750"/>
             </a:avLst>
           </a:prstGeom>
           <a:solidFill>
@@ -5339,24 +5261,305 @@
       </p:sp>
       <p:sp>
         <p:nvSpPr>
-          <p:cNvPr id="4" name="scene-2-num-bg-1"/>
+          <p:cNvPr id="4" name="Text 2"/>
+          <p:cNvSpPr txBox="1"/>
+          <p:nvPr/>
+        </p:nvSpPr>
+        <p:spPr>
+          <a:xfrm>
+            <a:off x="777240" y="1554480"/>
+            <a:ext cx="2651760" cy="365760"/>
+          </a:xfrm>
+          <a:prstGeom prst="rect">
+            <a:avLst/>
+          </a:prstGeom>
+          <a:noFill/>
+          <a:ln/>
+        </p:spPr>
+        <p:txBody>
+          <a:bodyPr wrap="square" lIns="0" tIns="0" rIns="0" bIns="0" rtlCol="0" anchor="ctr"/>
+          <a:lstStyle/>
+          <a:p>
+            <a:pPr indent="0" marL="0">
+              <a:buNone/>
+            </a:pPr>
+            <a:r>
+              <a:rPr lang="en-US" sz="1800" b="1" dirty="0">
+                <a:solidFill>
+                  <a:schemeClr val="tx2"/>
+                </a:solidFill>
+                <a:latin typeface="Cambria" pitchFamily="34" charset="0"/>
+                <a:ea typeface="Cambria" pitchFamily="34" charset="-122"/>
+                <a:cs typeface="Cambria" pitchFamily="34" charset="-120"/>
+              </a:rPr>
+              <a:t>Suspicious pasta tray</a:t>
+            </a:r>
+            <a:endParaRPr lang="en-US" sz="1800" dirty="0"/>
+          </a:p>
+        </p:txBody>
+      </p:sp>
+      <p:pic>
+        <p:nvPicPr>
+          <p:cNvPr id="5" name="Image 0" descr="warning">    </p:cNvPr>
+          <p:cNvPicPr>
+            <a:picLocks noChangeAspect="1"/>
+          </p:cNvPicPr>
+          <p:nvPr/>
+        </p:nvPicPr>
+        <p:blipFill>
+          <a:blip r:embed="rId1"/>
+          <a:stretch>
+            <a:fillRect/>
+          </a:stretch>
+        </p:blipFill>
+        <p:spPr>
+          <a:xfrm>
+            <a:off x="777240" y="2103120"/>
+            <a:ext cx="237744" cy="237744"/>
+          </a:xfrm>
+          <a:prstGeom prst="rect">
+            <a:avLst/>
+          </a:prstGeom>
+        </p:spPr>
+      </p:pic>
+      <p:sp>
+        <p:nvSpPr>
+          <p:cNvPr id="6" name="Text 3"/>
+          <p:cNvSpPr txBox="1"/>
+          <p:nvPr/>
+        </p:nvSpPr>
+        <p:spPr>
+          <a:xfrm>
+            <a:off x="1143000" y="2057400"/>
+            <a:ext cx="2377440" cy="329184"/>
+          </a:xfrm>
+          <a:prstGeom prst="rect">
+            <a:avLst/>
+          </a:prstGeom>
+          <a:noFill/>
+          <a:ln/>
+        </p:spPr>
+        <p:txBody>
+          <a:bodyPr wrap="square" lIns="0" tIns="0" rIns="0" bIns="0" rtlCol="0" anchor="ctr"/>
+          <a:lstStyle/>
+          <a:p>
+            <a:pPr indent="0" marL="0">
+              <a:buNone/>
+            </a:pPr>
+            <a:r>
+              <a:rPr lang="en-US" sz="1400" dirty="0">
+                <a:solidFill>
+                  <a:schemeClr val="tx1"/>
+                </a:solidFill>
+              </a:rPr>
+              <a:t>Cooked, then cooled</a:t>
+            </a:r>
+            <a:endParaRPr lang="en-US" sz="1400" dirty="0"/>
+          </a:p>
+        </p:txBody>
+      </p:sp>
+      <p:pic>
+        <p:nvPicPr>
+          <p:cNvPr id="7" name="Image 1" descr="warning">    </p:cNvPr>
+          <p:cNvPicPr>
+            <a:picLocks noChangeAspect="1"/>
+          </p:cNvPicPr>
+          <p:nvPr/>
+        </p:nvPicPr>
+        <p:blipFill>
+          <a:blip r:embed="rId2"/>
+          <a:stretch>
+            <a:fillRect/>
+          </a:stretch>
+        </p:blipFill>
+        <p:spPr>
+          <a:xfrm>
+            <a:off x="777240" y="2560320"/>
+            <a:ext cx="237744" cy="237744"/>
+          </a:xfrm>
+          <a:prstGeom prst="rect">
+            <a:avLst/>
+          </a:prstGeom>
+        </p:spPr>
+      </p:pic>
+      <p:sp>
+        <p:nvSpPr>
+          <p:cNvPr id="8" name="Text 4"/>
+          <p:cNvSpPr txBox="1"/>
+          <p:nvPr/>
+        </p:nvSpPr>
+        <p:spPr>
+          <a:xfrm>
+            <a:off x="1143000" y="2514600"/>
+            <a:ext cx="2377440" cy="329184"/>
+          </a:xfrm>
+          <a:prstGeom prst="rect">
+            <a:avLst/>
+          </a:prstGeom>
+          <a:noFill/>
+          <a:ln/>
+        </p:spPr>
+        <p:txBody>
+          <a:bodyPr wrap="square" lIns="0" tIns="0" rIns="0" bIns="0" rtlCol="0" anchor="ctr"/>
+          <a:lstStyle/>
+          <a:p>
+            <a:pPr indent="0" marL="0">
+              <a:buNone/>
+            </a:pPr>
+            <a:r>
+              <a:rPr lang="en-US" sz="1400" dirty="0">
+                <a:solidFill>
+                  <a:schemeClr val="tx1"/>
+                </a:solidFill>
+              </a:rPr>
+              <a:t>Cold holding unknown</a:t>
+            </a:r>
+            <a:endParaRPr lang="en-US" sz="1400" dirty="0"/>
+          </a:p>
+        </p:txBody>
+      </p:sp>
+      <p:pic>
+        <p:nvPicPr>
+          <p:cNvPr id="9" name="Image 2" descr="warning">    </p:cNvPr>
+          <p:cNvPicPr>
+            <a:picLocks noChangeAspect="1"/>
+          </p:cNvPicPr>
+          <p:nvPr/>
+        </p:nvPicPr>
+        <p:blipFill>
+          <a:blip r:embed="rId3"/>
+          <a:stretch>
+            <a:fillRect/>
+          </a:stretch>
+        </p:blipFill>
+        <p:spPr>
+          <a:xfrm>
+            <a:off x="777240" y="3017520"/>
+            <a:ext cx="237744" cy="237744"/>
+          </a:xfrm>
+          <a:prstGeom prst="rect">
+            <a:avLst/>
+          </a:prstGeom>
+        </p:spPr>
+      </p:pic>
+      <p:sp>
+        <p:nvSpPr>
+          <p:cNvPr id="10" name="Text 5"/>
+          <p:cNvSpPr txBox="1"/>
+          <p:nvPr/>
+        </p:nvSpPr>
+        <p:spPr>
+          <a:xfrm>
+            <a:off x="1143000" y="2971800"/>
+            <a:ext cx="2377440" cy="329184"/>
+          </a:xfrm>
+          <a:prstGeom prst="rect">
+            <a:avLst/>
+          </a:prstGeom>
+          <a:noFill/>
+          <a:ln/>
+        </p:spPr>
+        <p:txBody>
+          <a:bodyPr wrap="square" lIns="0" tIns="0" rIns="0" bIns="0" rtlCol="0" anchor="ctr"/>
+          <a:lstStyle/>
+          <a:p>
+            <a:pPr indent="0" marL="0">
+              <a:buNone/>
+            </a:pPr>
+            <a:r>
+              <a:rPr lang="en-US" sz="1400" dirty="0">
+                <a:solidFill>
+                  <a:schemeClr val="tx1"/>
+                </a:solidFill>
+              </a:rPr>
+              <a:t>No temperature log</a:t>
+            </a:r>
+            <a:endParaRPr lang="en-US" sz="1400" dirty="0"/>
+          </a:p>
+        </p:txBody>
+      </p:sp>
+      <p:pic>
+        <p:nvPicPr>
+          <p:cNvPr id="11" name="Image 3" descr="warning">    </p:cNvPr>
+          <p:cNvPicPr>
+            <a:picLocks noChangeAspect="1"/>
+          </p:cNvPicPr>
+          <p:nvPr/>
+        </p:nvPicPr>
+        <p:blipFill>
+          <a:blip r:embed="rId4"/>
+          <a:stretch>
+            <a:fillRect/>
+          </a:stretch>
+        </p:blipFill>
+        <p:spPr>
+          <a:xfrm>
+            <a:off x="777240" y="3474720"/>
+            <a:ext cx="237744" cy="237744"/>
+          </a:xfrm>
+          <a:prstGeom prst="rect">
+            <a:avLst/>
+          </a:prstGeom>
+        </p:spPr>
+      </p:pic>
+      <p:sp>
+        <p:nvSpPr>
+          <p:cNvPr id="12" name="Text 6"/>
+          <p:cNvSpPr txBox="1"/>
+          <p:nvPr/>
+        </p:nvSpPr>
+        <p:spPr>
+          <a:xfrm>
+            <a:off x="1143000" y="3429000"/>
+            <a:ext cx="2377440" cy="329184"/>
+          </a:xfrm>
+          <a:prstGeom prst="rect">
+            <a:avLst/>
+          </a:prstGeom>
+          <a:noFill/>
+          <a:ln/>
+        </p:spPr>
+        <p:txBody>
+          <a:bodyPr wrap="square" lIns="0" tIns="0" rIns="0" bIns="0" rtlCol="0" anchor="ctr"/>
+          <a:lstStyle/>
+          <a:p>
+            <a:pPr indent="0" marL="0">
+              <a:buNone/>
+            </a:pPr>
+            <a:r>
+              <a:rPr lang="en-US" sz="1400" dirty="0">
+                <a:solidFill>
+                  <a:schemeClr val="tx1"/>
+                </a:solidFill>
+              </a:rPr>
+              <a:t>Sesame unknown</a:t>
+            </a:r>
+            <a:endParaRPr lang="en-US" sz="1400" dirty="0"/>
+          </a:p>
+        </p:txBody>
+      </p:sp>
+      <p:sp>
+        <p:nvSpPr>
+          <p:cNvPr id="13" name="refusal-result-card"/>
           <p:cNvSpPr/>
           <p:nvPr/>
         </p:nvSpPr>
         <p:spPr>
           <a:xfrm>
-            <a:off x="685800" y="1408176"/>
-            <a:ext cx="365760" cy="365760"/>
-          </a:xfrm>
-          <a:prstGeom prst="ellipse">
-            <a:avLst/>
+            <a:off x="4023360" y="1371600"/>
+            <a:ext cx="4572000" cy="2926080"/>
+          </a:xfrm>
+          <a:prstGeom prst="roundRect">
+            <a:avLst>
+              <a:gd name="adj" fmla="val 3750"/>
+            </a:avLst>
           </a:prstGeom>
           <a:solidFill>
-            <a:srgbClr val="E8833A"/>
+            <a:schemeClr val="tx2"/>
           </a:solidFill>
           <a:ln w="12700">
             <a:solidFill>
-              <a:srgbClr val="E8833A"/>
+              <a:schemeClr val="tx2"/>
             </a:solidFill>
             <a:prstDash val="solid"/>
           </a:ln>
@@ -5364,14 +5567,14 @@
       </p:sp>
       <p:sp>
         <p:nvSpPr>
-          <p:cNvPr id="5" name="Text 3"/>
+          <p:cNvPr id="14" name="Text 8"/>
           <p:cNvSpPr txBox="1"/>
           <p:nvPr/>
         </p:nvSpPr>
         <p:spPr>
           <a:xfrm>
-            <a:off x="685800" y="1408176"/>
-            <a:ext cx="365760" cy="365760"/>
+            <a:off x="4297680" y="1554480"/>
+            <a:ext cx="4023360" cy="274320"/>
           </a:xfrm>
           <a:prstGeom prst="rect">
             <a:avLst/>
@@ -5383,591 +5586,130 @@
           <a:bodyPr wrap="square" lIns="0" tIns="0" rIns="0" bIns="0" rtlCol="0" anchor="ctr"/>
           <a:lstStyle/>
           <a:p>
-            <a:pPr algn="ctr" indent="0" marL="0">
-              <a:buNone/>
-            </a:pPr>
-            <a:r>
-              <a:rPr lang="en-US" sz="1400" b="1" dirty="0">
+            <a:pPr indent="0" marL="0">
+              <a:buNone/>
+            </a:pPr>
+            <a:r>
+              <a:rPr lang="en-US" sz="1200" dirty="0">
+                <a:solidFill>
+                  <a:schemeClr val="accent3"/>
+                </a:solidFill>
+              </a:rPr>
+              <a:t>Gate result</a:t>
+            </a:r>
+            <a:endParaRPr lang="en-US" sz="1200" dirty="0"/>
+          </a:p>
+        </p:txBody>
+      </p:sp>
+      <p:sp>
+        <p:nvSpPr>
+          <p:cNvPr id="15" name="Text 9"/>
+          <p:cNvSpPr txBox="1"/>
+          <p:nvPr/>
+        </p:nvSpPr>
+        <p:spPr>
+          <a:xfrm>
+            <a:off x="4297680" y="1828800"/>
+            <a:ext cx="4023360" cy="548640"/>
+          </a:xfrm>
+          <a:prstGeom prst="rect">
+            <a:avLst/>
+          </a:prstGeom>
+          <a:noFill/>
+          <a:ln/>
+        </p:spPr>
+        <p:txBody>
+          <a:bodyPr wrap="square" lIns="0" tIns="0" rIns="0" bIns="0" rtlCol="0" anchor="ctr"/>
+          <a:lstStyle/>
+          <a:p>
+            <a:pPr indent="0" marL="0">
+              <a:buNone/>
+            </a:pPr>
+            <a:r>
+              <a:rPr lang="en-US" sz="3000" b="1" dirty="0">
                 <a:solidFill>
                   <a:schemeClr val="bg1"/>
                 </a:solidFill>
-              </a:rPr>
-              <a:t>1</a:t>
-            </a:r>
-            <a:endParaRPr lang="en-US" sz="1400" dirty="0"/>
-          </a:p>
-        </p:txBody>
-      </p:sp>
-      <p:sp>
-        <p:nvSpPr>
-          <p:cNvPr id="6" name="Text 4"/>
+                <a:latin typeface="Cambria" pitchFamily="34" charset="0"/>
+                <a:ea typeface="Cambria" pitchFamily="34" charset="-122"/>
+                <a:cs typeface="Cambria" pitchFamily="34" charset="-120"/>
+              </a:rPr>
+              <a:t>Needs review</a:t>
+            </a:r>
+            <a:endParaRPr lang="en-US" sz="3000" dirty="0"/>
+          </a:p>
+        </p:txBody>
+      </p:sp>
+      <p:sp>
+        <p:nvSpPr>
+          <p:cNvPr id="16" name="Text 10"/>
           <p:cNvSpPr txBox="1"/>
           <p:nvPr/>
         </p:nvSpPr>
         <p:spPr>
           <a:xfrm>
-            <a:off x="1234440" y="1280160"/>
-            <a:ext cx="1554480" cy="621792"/>
-          </a:xfrm>
-          <a:prstGeom prst="rect">
-            <a:avLst/>
-          </a:prstGeom>
-          <a:noFill/>
-          <a:ln/>
-        </p:spPr>
-        <p:txBody>
-          <a:bodyPr wrap="square" lIns="0" tIns="0" rIns="0" bIns="0" rtlCol="0" anchor="ctr"/>
+            <a:off x="4297680" y="2560320"/>
+            <a:ext cx="4023360" cy="1463040"/>
+          </a:xfrm>
+          <a:prstGeom prst="rect">
+            <a:avLst/>
+          </a:prstGeom>
+          <a:noFill/>
+          <a:ln/>
+        </p:spPr>
+        <p:txBody>
+          <a:bodyPr wrap="square" lIns="0" tIns="0" rIns="0" bIns="0" rtlCol="0" anchor="t"/>
           <a:lstStyle/>
           <a:p>
             <a:pPr indent="0" marL="0">
-              <a:buNone/>
-            </a:pPr>
-            <a:r>
-              <a:rPr lang="en-US" sz="1400" b="1" dirty="0">
-                <a:solidFill>
-                  <a:schemeClr val="tx2"/>
-                </a:solidFill>
-              </a:rPr>
-              <a:t>Courier A</a:t>
-            </a:r>
-            <a:endParaRPr lang="en-US" sz="1400" dirty="0"/>
-          </a:p>
-        </p:txBody>
-      </p:sp>
-      <p:sp>
-        <p:nvSpPr>
-          <p:cNvPr id="7" name="Text 5"/>
-          <p:cNvSpPr txBox="1"/>
-          <p:nvPr/>
-        </p:nvSpPr>
-        <p:spPr>
-          <a:xfrm>
-            <a:off x="2834640" y="1280160"/>
-            <a:ext cx="5623560" cy="621792"/>
-          </a:xfrm>
-          <a:prstGeom prst="rect">
-            <a:avLst/>
-          </a:prstGeom>
-          <a:noFill/>
-          <a:ln/>
-        </p:spPr>
-        <p:txBody>
-          <a:bodyPr wrap="square" lIns="0" tIns="0" rIns="0" bIns="0" rtlCol="0" anchor="ctr"/>
-          <a:lstStyle/>
+              <a:spcAft>
+                <a:spcPts val="600"/>
+              </a:spcAft>
+              <a:buNone/>
+            </a:pPr>
+            <a:r>
+              <a:rPr lang="en-US" sz="1600" dirty="0">
+                <a:solidFill>
+                  <a:schemeClr val="bg2"/>
+                </a:solidFill>
+              </a:rPr>
+              <a:t>Four plain-language reasons shown to the operator.</a:t>
+            </a:r>
+            <a:endParaRPr lang="en-US" sz="1600" dirty="0"/>
+          </a:p>
           <a:p>
             <a:pPr indent="0" marL="0">
-              <a:buNone/>
-            </a:pPr>
-            <a:r>
-              <a:rPr lang="en-US" sz="1400" dirty="0">
-                <a:solidFill>
-                  <a:schemeClr val="tx1"/>
-                </a:solidFill>
-              </a:rPr>
-              <a:t>Ignores a 60-second accelerated offer</a:t>
-            </a:r>
-            <a:endParaRPr lang="en-US" sz="1400" dirty="0"/>
-          </a:p>
-        </p:txBody>
-      </p:sp>
-      <p:sp>
-        <p:nvSpPr>
-          <p:cNvPr id="8" name="scene-2-row-2"/>
-          <p:cNvSpPr/>
-          <p:nvPr/>
-        </p:nvSpPr>
-        <p:spPr>
-          <a:xfrm>
-            <a:off x="548640" y="1993392"/>
-            <a:ext cx="8046720" cy="621792"/>
-          </a:xfrm>
-          <a:prstGeom prst="roundRect">
-            <a:avLst>
-              <a:gd name="adj" fmla="val 17647"/>
-            </a:avLst>
-          </a:prstGeom>
-          <a:solidFill>
-            <a:schemeClr val="bg1"/>
-          </a:solidFill>
-          <a:ln w="12700">
-            <a:solidFill>
-              <a:schemeClr val="bg1"/>
-            </a:solidFill>
-            <a:prstDash val="solid"/>
-          </a:ln>
-          <a:effectLst>
-            <a:outerShdw sx="100000" sy="100000" kx="0" ky="0" algn="bl" rotWithShape="0" blurRad="101600" dist="25400" dir="5400000">
-              <a:srgbClr val="17301F">
-                <a:alpha val="12000"/>
-              </a:srgbClr>
-            </a:outerShdw>
-          </a:effectLst>
-        </p:spPr>
-      </p:sp>
-      <p:sp>
-        <p:nvSpPr>
-          <p:cNvPr id="9" name="scene-2-num-bg-2"/>
-          <p:cNvSpPr/>
-          <p:nvPr/>
-        </p:nvSpPr>
-        <p:spPr>
-          <a:xfrm>
-            <a:off x="685800" y="2121408"/>
-            <a:ext cx="365760" cy="365760"/>
-          </a:xfrm>
-          <a:prstGeom prst="ellipse">
-            <a:avLst/>
-          </a:prstGeom>
-          <a:solidFill>
-            <a:srgbClr val="E8833A"/>
-          </a:solidFill>
-          <a:ln w="12700">
-            <a:solidFill>
-              <a:srgbClr val="E8833A"/>
-            </a:solidFill>
-            <a:prstDash val="solid"/>
-          </a:ln>
-        </p:spPr>
-      </p:sp>
-      <p:sp>
-        <p:nvSpPr>
-          <p:cNvPr id="10" name="Text 8"/>
-          <p:cNvSpPr txBox="1"/>
-          <p:nvPr/>
-        </p:nvSpPr>
-        <p:spPr>
-          <a:xfrm>
-            <a:off x="685800" y="2121408"/>
-            <a:ext cx="365760" cy="365760"/>
-          </a:xfrm>
-          <a:prstGeom prst="rect">
-            <a:avLst/>
-          </a:prstGeom>
-          <a:noFill/>
-          <a:ln/>
-        </p:spPr>
-        <p:txBody>
-          <a:bodyPr wrap="square" lIns="0" tIns="0" rIns="0" bIns="0" rtlCol="0" anchor="ctr"/>
-          <a:lstStyle/>
-          <a:p>
-            <a:pPr algn="ctr" indent="0" marL="0">
-              <a:buNone/>
-            </a:pPr>
-            <a:r>
-              <a:rPr lang="en-US" sz="1400" b="1" dirty="0">
-                <a:solidFill>
-                  <a:schemeClr val="bg1"/>
-                </a:solidFill>
-              </a:rPr>
-              <a:t>2</a:t>
-            </a:r>
-            <a:endParaRPr lang="en-US" sz="1400" dirty="0"/>
-          </a:p>
-        </p:txBody>
-      </p:sp>
-      <p:sp>
-        <p:nvSpPr>
-          <p:cNvPr id="11" name="Text 9"/>
-          <p:cNvSpPr txBox="1"/>
-          <p:nvPr/>
-        </p:nvSpPr>
-        <p:spPr>
-          <a:xfrm>
-            <a:off x="1234440" y="1993392"/>
-            <a:ext cx="1554480" cy="621792"/>
-          </a:xfrm>
-          <a:prstGeom prst="rect">
-            <a:avLst/>
-          </a:prstGeom>
-          <a:noFill/>
-          <a:ln/>
-        </p:spPr>
-        <p:txBody>
-          <a:bodyPr wrap="square" lIns="0" tIns="0" rIns="0" bIns="0" rtlCol="0" anchor="ctr"/>
-          <a:lstStyle/>
+              <a:spcAft>
+                <a:spcPts val="600"/>
+              </a:spcAft>
+              <a:buNone/>
+            </a:pPr>
+            <a:r>
+              <a:rPr lang="en-US" sz="1600" dirty="0">
+                <a:solidFill>
+                  <a:schemeClr val="bg2"/>
+                </a:solidFill>
+              </a:rPr>
+              <a:t>No offer is created.</a:t>
+            </a:r>
+            <a:endParaRPr lang="en-US" sz="1600" dirty="0"/>
+          </a:p>
           <a:p>
             <a:pPr indent="0" marL="0">
-              <a:buNone/>
-            </a:pPr>
-            <a:r>
-              <a:rPr lang="en-US" sz="1400" b="1" dirty="0">
-                <a:solidFill>
-                  <a:schemeClr val="tx2"/>
-                </a:solidFill>
-              </a:rPr>
-              <a:t>Server tick</a:t>
-            </a:r>
-            <a:endParaRPr lang="en-US" sz="1400" dirty="0"/>
-          </a:p>
-        </p:txBody>
-      </p:sp>
-      <p:sp>
-        <p:nvSpPr>
-          <p:cNvPr id="12" name="Text 10"/>
-          <p:cNvSpPr txBox="1"/>
-          <p:nvPr/>
-        </p:nvSpPr>
-        <p:spPr>
-          <a:xfrm>
-            <a:off x="2834640" y="1993392"/>
-            <a:ext cx="5623560" cy="621792"/>
-          </a:xfrm>
-          <a:prstGeom prst="rect">
-            <a:avLst/>
-          </a:prstGeom>
-          <a:noFill/>
-          <a:ln/>
-        </p:spPr>
-        <p:txBody>
-          <a:bodyPr wrap="square" lIns="0" tIns="0" rIns="0" bIns="0" rtlCol="0" anchor="ctr"/>
-          <a:lstStyle/>
-          <a:p>
-            <a:pPr indent="0" marL="0">
-              <a:buNone/>
-            </a:pPr>
-            <a:r>
-              <a:rPr lang="en-US" sz="1400" dirty="0">
-                <a:solidFill>
-                  <a:schemeClr val="tx1"/>
-                </a:solidFill>
-              </a:rPr>
-              <a:t>Expires the offer and moves to the next candidate</a:t>
-            </a:r>
-            <a:endParaRPr lang="en-US" sz="1400" dirty="0"/>
-          </a:p>
-        </p:txBody>
-      </p:sp>
-      <p:sp>
-        <p:nvSpPr>
-          <p:cNvPr id="13" name="scene-2-row-3"/>
-          <p:cNvSpPr/>
-          <p:nvPr/>
-        </p:nvSpPr>
-        <p:spPr>
-          <a:xfrm>
-            <a:off x="548640" y="2706624"/>
-            <a:ext cx="8046720" cy="621792"/>
-          </a:xfrm>
-          <a:prstGeom prst="roundRect">
-            <a:avLst>
-              <a:gd name="adj" fmla="val 17647"/>
-            </a:avLst>
-          </a:prstGeom>
-          <a:solidFill>
-            <a:schemeClr val="bg1"/>
-          </a:solidFill>
-          <a:ln w="12700">
-            <a:solidFill>
-              <a:schemeClr val="bg1"/>
-            </a:solidFill>
-            <a:prstDash val="solid"/>
-          </a:ln>
-          <a:effectLst>
-            <a:outerShdw sx="100000" sy="100000" kx="0" ky="0" algn="bl" rotWithShape="0" blurRad="101600" dist="25400" dir="5400000">
-              <a:srgbClr val="17301F">
-                <a:alpha val="12000"/>
-              </a:srgbClr>
-            </a:outerShdw>
-          </a:effectLst>
-        </p:spPr>
-      </p:sp>
-      <p:sp>
-        <p:nvSpPr>
-          <p:cNvPr id="14" name="scene-2-num-bg-3"/>
-          <p:cNvSpPr/>
-          <p:nvPr/>
-        </p:nvSpPr>
-        <p:spPr>
-          <a:xfrm>
-            <a:off x="685800" y="2834640"/>
-            <a:ext cx="365760" cy="365760"/>
-          </a:xfrm>
-          <a:prstGeom prst="ellipse">
-            <a:avLst/>
-          </a:prstGeom>
-          <a:solidFill>
-            <a:srgbClr val="E8833A"/>
-          </a:solidFill>
-          <a:ln w="12700">
-            <a:solidFill>
-              <a:srgbClr val="E8833A"/>
-            </a:solidFill>
-            <a:prstDash val="solid"/>
-          </a:ln>
-        </p:spPr>
-      </p:sp>
-      <p:sp>
-        <p:nvSpPr>
-          <p:cNvPr id="15" name="Text 13"/>
-          <p:cNvSpPr txBox="1"/>
-          <p:nvPr/>
-        </p:nvSpPr>
-        <p:spPr>
-          <a:xfrm>
-            <a:off x="685800" y="2834640"/>
-            <a:ext cx="365760" cy="365760"/>
-          </a:xfrm>
-          <a:prstGeom prst="rect">
-            <a:avLst/>
-          </a:prstGeom>
-          <a:noFill/>
-          <a:ln/>
-        </p:spPr>
-        <p:txBody>
-          <a:bodyPr wrap="square" lIns="0" tIns="0" rIns="0" bIns="0" rtlCol="0" anchor="ctr"/>
-          <a:lstStyle/>
-          <a:p>
-            <a:pPr algn="ctr" indent="0" marL="0">
-              <a:buNone/>
-            </a:pPr>
-            <a:r>
-              <a:rPr lang="en-US" sz="1400" b="1" dirty="0">
-                <a:solidFill>
-                  <a:schemeClr val="bg1"/>
-                </a:solidFill>
-              </a:rPr>
-              <a:t>3</a:t>
-            </a:r>
-            <a:endParaRPr lang="en-US" sz="1400" dirty="0"/>
-          </a:p>
-        </p:txBody>
-      </p:sp>
-      <p:sp>
-        <p:nvSpPr>
-          <p:cNvPr id="16" name="Text 14"/>
-          <p:cNvSpPr txBox="1"/>
-          <p:nvPr/>
-        </p:nvSpPr>
-        <p:spPr>
-          <a:xfrm>
-            <a:off x="1234440" y="2706624"/>
-            <a:ext cx="1554480" cy="621792"/>
-          </a:xfrm>
-          <a:prstGeom prst="rect">
-            <a:avLst/>
-          </a:prstGeom>
-          <a:noFill/>
-          <a:ln/>
-        </p:spPr>
-        <p:txBody>
-          <a:bodyPr wrap="square" lIns="0" tIns="0" rIns="0" bIns="0" rtlCol="0" anchor="ctr"/>
-          <a:lstStyle/>
-          <a:p>
-            <a:pPr indent="0" marL="0">
-              <a:buNone/>
-            </a:pPr>
-            <a:r>
-              <a:rPr lang="en-US" sz="1400" b="1" dirty="0">
-                <a:solidFill>
-                  <a:schemeClr val="tx2"/>
-                </a:solidFill>
-              </a:rPr>
-              <a:t>Courier B</a:t>
-            </a:r>
-            <a:endParaRPr lang="en-US" sz="1400" dirty="0"/>
-          </a:p>
-        </p:txBody>
-      </p:sp>
-      <p:sp>
-        <p:nvSpPr>
-          <p:cNvPr id="17" name="Text 15"/>
-          <p:cNvSpPr txBox="1"/>
-          <p:nvPr/>
-        </p:nvSpPr>
-        <p:spPr>
-          <a:xfrm>
-            <a:off x="2834640" y="2706624"/>
-            <a:ext cx="5623560" cy="621792"/>
-          </a:xfrm>
-          <a:prstGeom prst="rect">
-            <a:avLst/>
-          </a:prstGeom>
-          <a:noFill/>
-          <a:ln/>
-        </p:spPr>
-        <p:txBody>
-          <a:bodyPr wrap="square" lIns="0" tIns="0" rIns="0" bIns="0" rtlCol="0" anchor="ctr"/>
-          <a:lstStyle/>
-          <a:p>
-            <a:pPr indent="0" marL="0">
-              <a:buNone/>
-            </a:pPr>
-            <a:r>
-              <a:rPr lang="en-US" sz="1400" dirty="0">
-                <a:solidFill>
-                  <a:schemeClr val="tx1"/>
-                </a:solidFill>
-              </a:rPr>
-              <a:t>Accepts and wins the claim</a:t>
-            </a:r>
-            <a:endParaRPr lang="en-US" sz="1400" dirty="0"/>
-          </a:p>
-        </p:txBody>
-      </p:sp>
-      <p:sp>
-        <p:nvSpPr>
-          <p:cNvPr id="18" name="scene-2-row-4"/>
-          <p:cNvSpPr/>
-          <p:nvPr/>
-        </p:nvSpPr>
-        <p:spPr>
-          <a:xfrm>
-            <a:off x="548640" y="3419856"/>
-            <a:ext cx="8046720" cy="621792"/>
-          </a:xfrm>
-          <a:prstGeom prst="roundRect">
-            <a:avLst>
-              <a:gd name="adj" fmla="val 17647"/>
-            </a:avLst>
-          </a:prstGeom>
-          <a:solidFill>
-            <a:schemeClr val="bg1"/>
-          </a:solidFill>
-          <a:ln w="12700">
-            <a:solidFill>
-              <a:schemeClr val="bg1"/>
-            </a:solidFill>
-            <a:prstDash val="solid"/>
-          </a:ln>
-          <a:effectLst>
-            <a:outerShdw sx="100000" sy="100000" kx="0" ky="0" algn="bl" rotWithShape="0" blurRad="101600" dist="25400" dir="5400000">
-              <a:srgbClr val="17301F">
-                <a:alpha val="12000"/>
-              </a:srgbClr>
-            </a:outerShdw>
-          </a:effectLst>
-        </p:spPr>
-      </p:sp>
-      <p:sp>
-        <p:nvSpPr>
-          <p:cNvPr id="19" name="scene-2-num-bg-4"/>
-          <p:cNvSpPr/>
-          <p:nvPr/>
-        </p:nvSpPr>
-        <p:spPr>
-          <a:xfrm>
-            <a:off x="685800" y="3547872"/>
-            <a:ext cx="365760" cy="365760"/>
-          </a:xfrm>
-          <a:prstGeom prst="ellipse">
-            <a:avLst/>
-          </a:prstGeom>
-          <a:solidFill>
-            <a:srgbClr val="E8833A"/>
-          </a:solidFill>
-          <a:ln w="12700">
-            <a:solidFill>
-              <a:srgbClr val="E8833A"/>
-            </a:solidFill>
-            <a:prstDash val="solid"/>
-          </a:ln>
-        </p:spPr>
-      </p:sp>
-      <p:sp>
-        <p:nvSpPr>
-          <p:cNvPr id="20" name="Text 18"/>
-          <p:cNvSpPr txBox="1"/>
-          <p:nvPr/>
-        </p:nvSpPr>
-        <p:spPr>
-          <a:xfrm>
-            <a:off x="685800" y="3547872"/>
-            <a:ext cx="365760" cy="365760"/>
-          </a:xfrm>
-          <a:prstGeom prst="rect">
-            <a:avLst/>
-          </a:prstGeom>
-          <a:noFill/>
-          <a:ln/>
-        </p:spPr>
-        <p:txBody>
-          <a:bodyPr wrap="square" lIns="0" tIns="0" rIns="0" bIns="0" rtlCol="0" anchor="ctr"/>
-          <a:lstStyle/>
-          <a:p>
-            <a:pPr algn="ctr" indent="0" marL="0">
-              <a:buNone/>
-            </a:pPr>
-            <a:r>
-              <a:rPr lang="en-US" sz="1400" b="1" dirty="0">
-                <a:solidFill>
-                  <a:schemeClr val="bg1"/>
-                </a:solidFill>
-              </a:rPr>
-              <a:t>4</a:t>
-            </a:r>
-            <a:endParaRPr lang="en-US" sz="1400" dirty="0"/>
-          </a:p>
-        </p:txBody>
-      </p:sp>
-      <p:sp>
-        <p:nvSpPr>
-          <p:cNvPr id="21" name="Text 19"/>
-          <p:cNvSpPr txBox="1"/>
-          <p:nvPr/>
-        </p:nvSpPr>
-        <p:spPr>
-          <a:xfrm>
-            <a:off x="1234440" y="3419856"/>
-            <a:ext cx="1554480" cy="621792"/>
-          </a:xfrm>
-          <a:prstGeom prst="rect">
-            <a:avLst/>
-          </a:prstGeom>
-          <a:noFill/>
-          <a:ln/>
-        </p:spPr>
-        <p:txBody>
-          <a:bodyPr wrap="square" lIns="0" tIns="0" rIns="0" bIns="0" rtlCol="0" anchor="ctr"/>
-          <a:lstStyle/>
-          <a:p>
-            <a:pPr indent="0" marL="0">
-              <a:buNone/>
-            </a:pPr>
-            <a:r>
-              <a:rPr lang="en-US" sz="1400" b="1" dirty="0">
-                <a:solidFill>
-                  <a:schemeClr val="tx2"/>
-                </a:solidFill>
-              </a:rPr>
-              <a:t>Courier A</a:t>
-            </a:r>
-            <a:endParaRPr lang="en-US" sz="1400" dirty="0"/>
-          </a:p>
-        </p:txBody>
-      </p:sp>
-      <p:sp>
-        <p:nvSpPr>
-          <p:cNvPr id="22" name="Text 20"/>
-          <p:cNvSpPr txBox="1"/>
-          <p:nvPr/>
-        </p:nvSpPr>
-        <p:spPr>
-          <a:xfrm>
-            <a:off x="2834640" y="3419856"/>
-            <a:ext cx="5623560" cy="621792"/>
-          </a:xfrm>
-          <a:prstGeom prst="rect">
-            <a:avLst/>
-          </a:prstGeom>
-          <a:noFill/>
-          <a:ln/>
-        </p:spPr>
-        <p:txBody>
-          <a:bodyPr wrap="square" lIns="0" tIns="0" rIns="0" bIns="0" rtlCol="0" anchor="ctr"/>
-          <a:lstStyle/>
-          <a:p>
-            <a:pPr indent="0" marL="0">
-              <a:buNone/>
-            </a:pPr>
-            <a:r>
-              <a:rPr lang="en-US" sz="1400" dirty="0">
-                <a:solidFill>
-                  <a:schemeClr val="tx1"/>
-                </a:solidFill>
-              </a:rPr>
-              <a:t>Replies late and is told no assignment was made</a:t>
-            </a:r>
-            <a:endParaRPr lang="en-US" sz="1400" dirty="0"/>
+              <a:spcAft>
+                <a:spcPts val="600"/>
+              </a:spcAft>
+              <a:buNone/>
+            </a:pPr>
+            <a:r>
+              <a:rPr lang="en-US" sz="1600" dirty="0">
+                <a:solidFill>
+                  <a:schemeClr val="bg2"/>
+                </a:solidFill>
+              </a:rPr>
+              <a:t>There is no "dispatch anyway" button.</a:t>
+            </a:r>
+            <a:endParaRPr lang="en-US" sz="1600" dirty="0"/>
           </a:p>
         </p:txBody>
       </p:sp>
@@ -6073,7 +5815,7 @@
                   <a:schemeClr val="tx2"/>
                 </a:solidFill>
               </a:rPr>
-              <a:t>Scene 3: Responsible refusal</a:t>
+              <a:t>What is real and what is simulated</a:t>
             </a:r>
             <a:endParaRPr lang="en-US" sz="3000" dirty="0"/>
           </a:p>
@@ -6081,14 +5823,14 @@
       </p:sp>
       <p:sp>
         <p:nvSpPr>
-          <p:cNvPr id="3" name="refusal-input-card"/>
+          <p:cNvPr id="3" name="real-card"/>
           <p:cNvSpPr/>
           <p:nvPr/>
         </p:nvSpPr>
         <p:spPr>
           <a:xfrm>
             <a:off x="548640" y="1371600"/>
-            <a:ext cx="3108960" cy="2926080"/>
+            <a:ext cx="3931920" cy="2926080"/>
           </a:xfrm>
           <a:prstGeom prst="roundRect">
             <a:avLst>
@@ -6115,46 +5857,41 @@
       </p:sp>
       <p:sp>
         <p:nvSpPr>
-          <p:cNvPr id="4" name="Text 2"/>
-          <p:cNvSpPr txBox="1"/>
-          <p:nvPr/>
-        </p:nvSpPr>
-        <p:spPr>
-          <a:xfrm>
-            <a:off x="777240" y="1554480"/>
-            <a:ext cx="2651760" cy="365760"/>
-          </a:xfrm>
-          <a:prstGeom prst="rect">
-            <a:avLst/>
-          </a:prstGeom>
-          <a:noFill/>
-          <a:ln/>
-        </p:spPr>
-        <p:txBody>
-          <a:bodyPr wrap="square" lIns="0" tIns="0" rIns="0" bIns="0" rtlCol="0" anchor="ctr"/>
-          <a:lstStyle/>
-          <a:p>
-            <a:pPr indent="0" marL="0">
-              <a:buNone/>
-            </a:pPr>
-            <a:r>
-              <a:rPr lang="en-US" sz="1800" b="1" dirty="0">
-                <a:solidFill>
-                  <a:schemeClr val="tx2"/>
-                </a:solidFill>
-                <a:latin typeface="Cambria" pitchFamily="34" charset="0"/>
-                <a:ea typeface="Cambria" pitchFamily="34" charset="-122"/>
-                <a:cs typeface="Cambria" pitchFamily="34" charset="-120"/>
-              </a:rPr>
-              <a:t>Attractive pasta tray</a:t>
-            </a:r>
-            <a:endParaRPr lang="en-US" sz="1800" dirty="0"/>
-          </a:p>
-        </p:txBody>
+          <p:cNvPr id="4" name="simulated-card"/>
+          <p:cNvSpPr/>
+          <p:nvPr/>
+        </p:nvSpPr>
+        <p:spPr>
+          <a:xfrm>
+            <a:off x="4663440" y="1371600"/>
+            <a:ext cx="3931920" cy="2926080"/>
+          </a:xfrm>
+          <a:prstGeom prst="roundRect">
+            <a:avLst>
+              <a:gd name="adj" fmla="val 3750"/>
+            </a:avLst>
+          </a:prstGeom>
+          <a:solidFill>
+            <a:schemeClr val="bg1"/>
+          </a:solidFill>
+          <a:ln w="12700">
+            <a:solidFill>
+              <a:schemeClr val="bg1"/>
+            </a:solidFill>
+            <a:prstDash val="solid"/>
+          </a:ln>
+          <a:effectLst>
+            <a:outerShdw sx="100000" sy="100000" kx="0" ky="0" algn="bl" rotWithShape="0" blurRad="101600" dist="25400" dir="5400000">
+              <a:srgbClr val="17301F">
+                <a:alpha val="12000"/>
+              </a:srgbClr>
+            </a:outerShdw>
+          </a:effectLst>
+        </p:spPr>
       </p:sp>
       <p:pic>
         <p:nvPicPr>
-          <p:cNvPr id="5" name="Image 0" descr="warning">    </p:cNvPr>
+          <p:cNvPr id="5" name="Image 0" descr="real">    </p:cNvPr>
           <p:cNvPicPr>
             <a:picLocks noChangeAspect="1"/>
           </p:cNvPicPr>
@@ -6168,8 +5905,8 @@
         </p:blipFill>
         <p:spPr>
           <a:xfrm>
-            <a:off x="777240" y="2103120"/>
-            <a:ext cx="237744" cy="237744"/>
+            <a:off x="777240" y="1554480"/>
+            <a:ext cx="292608" cy="292608"/>
           </a:xfrm>
           <a:prstGeom prst="rect">
             <a:avLst/>
@@ -6184,8 +5921,8 @@
         </p:nvSpPr>
         <p:spPr>
           <a:xfrm>
-            <a:off x="1143000" y="2057400"/>
-            <a:ext cx="2377440" cy="329184"/>
+            <a:off x="1188720" y="1554480"/>
+            <a:ext cx="3017520" cy="310896"/>
           </a:xfrm>
           <a:prstGeom prst="rect">
             <a:avLst/>
@@ -6201,12 +5938,91 @@
               <a:buNone/>
             </a:pPr>
             <a:r>
+              <a:rPr lang="en-US" sz="1800" b="1" dirty="0">
+                <a:solidFill>
+                  <a:schemeClr val="tx2"/>
+                </a:solidFill>
+                <a:latin typeface="Cambria" pitchFamily="34" charset="0"/>
+                <a:ea typeface="Cambria" pitchFamily="34" charset="-122"/>
+                <a:cs typeface="Cambria" pitchFamily="34" charset="-120"/>
+              </a:rPr>
+              <a:t>Real calls</a:t>
+            </a:r>
+            <a:endParaRPr lang="en-US" sz="1800" dirty="0"/>
+          </a:p>
+        </p:txBody>
+      </p:sp>
+      <p:sp>
+        <p:nvSpPr>
+          <p:cNvPr id="7" name="Text 4"/>
+          <p:cNvSpPr txBox="1"/>
+          <p:nvPr/>
+        </p:nvSpPr>
+        <p:spPr>
+          <a:xfrm>
+            <a:off x="777240" y="2011680"/>
+            <a:ext cx="3474720" cy="2103120"/>
+          </a:xfrm>
+          <a:prstGeom prst="rect">
+            <a:avLst/>
+          </a:prstGeom>
+          <a:noFill/>
+          <a:ln/>
+        </p:spPr>
+        <p:txBody>
+          <a:bodyPr wrap="square" lIns="0" tIns="0" rIns="0" bIns="0" rtlCol="0" anchor="t"/>
+          <a:lstStyle/>
+          <a:p>
+            <a:pPr marL="342900" indent="-342900">
+              <a:spcAft>
+                <a:spcPts val="600"/>
+              </a:spcAft>
+              <a:buSzPct val="100000"/>
+              <a:buChar char="•"/>
+            </a:pPr>
+            <a:r>
               <a:rPr lang="en-US" sz="1400" dirty="0">
                 <a:solidFill>
                   <a:schemeClr val="tx1"/>
                 </a:solidFill>
               </a:rPr>
-              <a:t>Cooked, then cooled</a:t>
+              <a:t>Gemini vision on photos, including an iPhone HEIC</a:t>
+            </a:r>
+            <a:endParaRPr lang="en-US" sz="1400" dirty="0"/>
+          </a:p>
+          <a:p>
+            <a:pPr marL="342900" indent="-342900">
+              <a:spcAft>
+                <a:spcPts val="600"/>
+              </a:spcAft>
+              <a:buSzPct val="100000"/>
+              <a:buChar char="•"/>
+            </a:pPr>
+            <a:r>
+              <a:rPr lang="en-US" sz="1400" dirty="0">
+                <a:solidFill>
+                  <a:schemeClr val="tx1"/>
+                </a:solidFill>
+              </a:rPr>
+              <a:t>Photon iMessage: JOIN round trip and photo intake</a:t>
+            </a:r>
+            <a:endParaRPr lang="en-US" sz="1400" dirty="0"/>
+          </a:p>
+          <a:p>
+            <a:pPr marL="342900" indent="-342900">
+              <a:spcAft>
+                <a:spcPts val="600"/>
+              </a:spcAft>
+              <a:buSzPct val="100000"/>
+              <a:buChar char="•"/>
+            </a:pPr>
+            <a:r>
+              <a:rPr lang="en-US" sz="1400" dirty="0">
+                <a:solidFill>
+                  <a:schemeClr val="tx1"/>
+                </a:solidFill>
+              </a:rPr>
+              <a:t>Deterministic gate, matching and state machine in code with tests</a:t>
             </a:r>
             <a:endParaRPr lang="en-US" sz="1400" dirty="0"/>
           </a:p>
@@ -6214,7 +6030,7 @@
       </p:sp>
       <p:pic>
         <p:nvPicPr>
-          <p:cNvPr id="7" name="Image 1" descr="warning">    </p:cNvPr>
+          <p:cNvPr id="8" name="Image 1" descr="simulated">    </p:cNvPr>
           <p:cNvPicPr>
             <a:picLocks noChangeAspect="1"/>
           </p:cNvPicPr>
@@ -6228,8 +6044,8 @@
         </p:blipFill>
         <p:spPr>
           <a:xfrm>
-            <a:off x="777240" y="2560320"/>
-            <a:ext cx="237744" cy="237744"/>
+            <a:off x="4892040" y="1554480"/>
+            <a:ext cx="292608" cy="292608"/>
           </a:xfrm>
           <a:prstGeom prst="rect">
             <a:avLst/>
@@ -6238,14 +6054,14 @@
       </p:pic>
       <p:sp>
         <p:nvSpPr>
-          <p:cNvPr id="8" name="Text 4"/>
+          <p:cNvPr id="9" name="Text 5"/>
           <p:cNvSpPr txBox="1"/>
           <p:nvPr/>
         </p:nvSpPr>
         <p:spPr>
           <a:xfrm>
-            <a:off x="1143000" y="2514600"/>
-            <a:ext cx="2377440" cy="329184"/>
+            <a:off x="5303520" y="1554480"/>
+            <a:ext cx="3108960" cy="310896"/>
           </a:xfrm>
           <a:prstGeom prst="rect">
             <a:avLst/>
@@ -6261,249 +6077,30 @@
               <a:buNone/>
             </a:pPr>
             <a:r>
-              <a:rPr lang="en-US" sz="1400" dirty="0">
-                <a:solidFill>
-                  <a:schemeClr val="tx1"/>
-                </a:solidFill>
-              </a:rPr>
-              <a:t>Cold holding unknown</a:t>
-            </a:r>
-            <a:endParaRPr lang="en-US" sz="1400" dirty="0"/>
-          </a:p>
-        </p:txBody>
-      </p:sp>
-      <p:pic>
-        <p:nvPicPr>
-          <p:cNvPr id="9" name="Image 2" descr="warning">    </p:cNvPr>
-          <p:cNvPicPr>
-            <a:picLocks noChangeAspect="1"/>
-          </p:cNvPicPr>
-          <p:nvPr/>
-        </p:nvPicPr>
-        <p:blipFill>
-          <a:blip r:embed="rId3"/>
-          <a:stretch>
-            <a:fillRect/>
-          </a:stretch>
-        </p:blipFill>
-        <p:spPr>
-          <a:xfrm>
-            <a:off x="777240" y="3017520"/>
-            <a:ext cx="237744" cy="237744"/>
-          </a:xfrm>
-          <a:prstGeom prst="rect">
-            <a:avLst/>
-          </a:prstGeom>
-        </p:spPr>
-      </p:pic>
-      <p:sp>
-        <p:nvSpPr>
-          <p:cNvPr id="10" name="Text 5"/>
-          <p:cNvSpPr txBox="1"/>
-          <p:nvPr/>
-        </p:nvSpPr>
-        <p:spPr>
-          <a:xfrm>
-            <a:off x="1143000" y="2971800"/>
-            <a:ext cx="2377440" cy="329184"/>
-          </a:xfrm>
-          <a:prstGeom prst="rect">
-            <a:avLst/>
-          </a:prstGeom>
-          <a:noFill/>
-          <a:ln/>
-        </p:spPr>
-        <p:txBody>
-          <a:bodyPr wrap="square" lIns="0" tIns="0" rIns="0" bIns="0" rtlCol="0" anchor="ctr"/>
-          <a:lstStyle/>
-          <a:p>
-            <a:pPr indent="0" marL="0">
-              <a:buNone/>
-            </a:pPr>
-            <a:r>
-              <a:rPr lang="en-US" sz="1400" dirty="0">
-                <a:solidFill>
-                  <a:schemeClr val="tx1"/>
-                </a:solidFill>
-              </a:rPr>
-              <a:t>No temperature log</a:t>
-            </a:r>
-            <a:endParaRPr lang="en-US" sz="1400" dirty="0"/>
-          </a:p>
-        </p:txBody>
-      </p:sp>
-      <p:pic>
-        <p:nvPicPr>
-          <p:cNvPr id="11" name="Image 3" descr="warning">    </p:cNvPr>
-          <p:cNvPicPr>
-            <a:picLocks noChangeAspect="1"/>
-          </p:cNvPicPr>
-          <p:nvPr/>
-        </p:nvPicPr>
-        <p:blipFill>
-          <a:blip r:embed="rId4"/>
-          <a:stretch>
-            <a:fillRect/>
-          </a:stretch>
-        </p:blipFill>
-        <p:spPr>
-          <a:xfrm>
-            <a:off x="777240" y="3474720"/>
-            <a:ext cx="237744" cy="237744"/>
-          </a:xfrm>
-          <a:prstGeom prst="rect">
-            <a:avLst/>
-          </a:prstGeom>
-        </p:spPr>
-      </p:pic>
-      <p:sp>
-        <p:nvSpPr>
-          <p:cNvPr id="12" name="Text 6"/>
-          <p:cNvSpPr txBox="1"/>
-          <p:nvPr/>
-        </p:nvSpPr>
-        <p:spPr>
-          <a:xfrm>
-            <a:off x="1143000" y="3429000"/>
-            <a:ext cx="2377440" cy="329184"/>
-          </a:xfrm>
-          <a:prstGeom prst="rect">
-            <a:avLst/>
-          </a:prstGeom>
-          <a:noFill/>
-          <a:ln/>
-        </p:spPr>
-        <p:txBody>
-          <a:bodyPr wrap="square" lIns="0" tIns="0" rIns="0" bIns="0" rtlCol="0" anchor="ctr"/>
-          <a:lstStyle/>
-          <a:p>
-            <a:pPr indent="0" marL="0">
-              <a:buNone/>
-            </a:pPr>
-            <a:r>
-              <a:rPr lang="en-US" sz="1400" dirty="0">
-                <a:solidFill>
-                  <a:schemeClr val="tx1"/>
-                </a:solidFill>
-              </a:rPr>
-              <a:t>Sesame unknown</a:t>
-            </a:r>
-            <a:endParaRPr lang="en-US" sz="1400" dirty="0"/>
-          </a:p>
-        </p:txBody>
-      </p:sp>
-      <p:sp>
-        <p:nvSpPr>
-          <p:cNvPr id="13" name="refusal-result-card"/>
-          <p:cNvSpPr/>
-          <p:nvPr/>
-        </p:nvSpPr>
-        <p:spPr>
-          <a:xfrm>
-            <a:off x="4023360" y="1371600"/>
-            <a:ext cx="4572000" cy="2926080"/>
-          </a:xfrm>
-          <a:prstGeom prst="roundRect">
-            <a:avLst>
-              <a:gd name="adj" fmla="val 3750"/>
-            </a:avLst>
-          </a:prstGeom>
-          <a:solidFill>
-            <a:schemeClr val="tx2"/>
-          </a:solidFill>
-          <a:ln w="12700">
-            <a:solidFill>
-              <a:schemeClr val="tx2"/>
-            </a:solidFill>
-            <a:prstDash val="solid"/>
-          </a:ln>
-        </p:spPr>
-      </p:sp>
-      <p:sp>
-        <p:nvSpPr>
-          <p:cNvPr id="14" name="Text 8"/>
-          <p:cNvSpPr txBox="1"/>
-          <p:nvPr/>
-        </p:nvSpPr>
-        <p:spPr>
-          <a:xfrm>
-            <a:off x="4297680" y="1554480"/>
-            <a:ext cx="4023360" cy="274320"/>
-          </a:xfrm>
-          <a:prstGeom prst="rect">
-            <a:avLst/>
-          </a:prstGeom>
-          <a:noFill/>
-          <a:ln/>
-        </p:spPr>
-        <p:txBody>
-          <a:bodyPr wrap="square" lIns="0" tIns="0" rIns="0" bIns="0" rtlCol="0" anchor="ctr"/>
-          <a:lstStyle/>
-          <a:p>
-            <a:pPr indent="0" marL="0">
-              <a:buNone/>
-            </a:pPr>
-            <a:r>
-              <a:rPr lang="en-US" sz="1200" dirty="0">
-                <a:solidFill>
-                  <a:schemeClr val="accent3"/>
-                </a:solidFill>
-              </a:rPr>
-              <a:t>Gate result</a:t>
-            </a:r>
-            <a:endParaRPr lang="en-US" sz="1200" dirty="0"/>
-          </a:p>
-        </p:txBody>
-      </p:sp>
-      <p:sp>
-        <p:nvSpPr>
-          <p:cNvPr id="15" name="Text 9"/>
-          <p:cNvSpPr txBox="1"/>
-          <p:nvPr/>
-        </p:nvSpPr>
-        <p:spPr>
-          <a:xfrm>
-            <a:off x="4297680" y="1828800"/>
-            <a:ext cx="4023360" cy="548640"/>
-          </a:xfrm>
-          <a:prstGeom prst="rect">
-            <a:avLst/>
-          </a:prstGeom>
-          <a:noFill/>
-          <a:ln/>
-        </p:spPr>
-        <p:txBody>
-          <a:bodyPr wrap="square" lIns="0" tIns="0" rIns="0" bIns="0" rtlCol="0" anchor="ctr"/>
-          <a:lstStyle/>
-          <a:p>
-            <a:pPr indent="0" marL="0">
-              <a:buNone/>
-            </a:pPr>
-            <a:r>
-              <a:rPr lang="en-US" sz="3000" b="1" dirty="0">
-                <a:solidFill>
-                  <a:schemeClr val="bg1"/>
+              <a:rPr lang="en-US" sz="1800" b="1" dirty="0">
+                <a:solidFill>
+                  <a:schemeClr val="tx2"/>
                 </a:solidFill>
                 <a:latin typeface="Cambria" pitchFamily="34" charset="0"/>
                 <a:ea typeface="Cambria" pitchFamily="34" charset="-122"/>
                 <a:cs typeface="Cambria" pitchFamily="34" charset="-120"/>
               </a:rPr>
-              <a:t>Needs review</a:t>
-            </a:r>
-            <a:endParaRPr lang="en-US" sz="3000" dirty="0"/>
-          </a:p>
-        </p:txBody>
-      </p:sp>
-      <p:sp>
-        <p:nvSpPr>
-          <p:cNvPr id="16" name="Text 10"/>
+              <a:t>Simulated, and labeled</a:t>
+            </a:r>
+            <a:endParaRPr lang="en-US" sz="1800" dirty="0"/>
+          </a:p>
+        </p:txBody>
+      </p:sp>
+      <p:sp>
+        <p:nvSpPr>
+          <p:cNvPr id="10" name="Text 6"/>
           <p:cNvSpPr txBox="1"/>
           <p:nvPr/>
         </p:nvSpPr>
         <p:spPr>
           <a:xfrm>
-            <a:off x="4297680" y="2560320"/>
-            <a:ext cx="4023360" cy="1463040"/>
+            <a:off x="4892040" y="2011680"/>
+            <a:ext cx="3474720" cy="2103120"/>
           </a:xfrm>
           <a:prstGeom prst="rect">
             <a:avLst/>
@@ -6515,55 +6112,76 @@
           <a:bodyPr wrap="square" lIns="0" tIns="0" rIns="0" bIns="0" rtlCol="0" anchor="t"/>
           <a:lstStyle/>
           <a:p>
-            <a:pPr indent="0" marL="0">
+            <a:pPr marL="342900" indent="-342900">
               <a:spcAft>
                 <a:spcPts val="600"/>
               </a:spcAft>
-              <a:buNone/>
-            </a:pPr>
-            <a:r>
-              <a:rPr lang="en-US" sz="1600" dirty="0">
-                <a:solidFill>
-                  <a:schemeClr val="bg2"/>
-                </a:solidFill>
-              </a:rPr>
-              <a:t>Four plain-language reasons shown to the operator.</a:t>
-            </a:r>
-            <a:endParaRPr lang="en-US" sz="1600" dirty="0"/>
-          </a:p>
-          <a:p>
-            <a:pPr indent="0" marL="0">
+              <a:buSzPct val="100000"/>
+              <a:buChar char="•"/>
+            </a:pPr>
+            <a:r>
+              <a:rPr lang="en-US" sz="1400" dirty="0">
+                <a:solidFill>
+                  <a:schemeClr val="tx1"/>
+                </a:solidFill>
+              </a:rPr>
+              <a:t>All donors, recipients and couriers are synthetic</a:t>
+            </a:r>
+            <a:endParaRPr lang="en-US" sz="1400" dirty="0"/>
+          </a:p>
+          <a:p>
+            <a:pPr marL="342900" indent="-342900">
               <a:spcAft>
                 <a:spcPts val="600"/>
               </a:spcAft>
-              <a:buNone/>
-            </a:pPr>
-            <a:r>
-              <a:rPr lang="en-US" sz="1600" dirty="0">
-                <a:solidFill>
-                  <a:schemeClr val="bg2"/>
-                </a:solidFill>
-              </a:rPr>
-              <a:t>No offer is created.</a:t>
-            </a:r>
-            <a:endParaRPr lang="en-US" sz="1600" dirty="0"/>
-          </a:p>
-          <a:p>
-            <a:pPr indent="0" marL="0">
+              <a:buSzPct val="100000"/>
+              <a:buChar char="•"/>
+            </a:pPr>
+            <a:r>
+              <a:rPr lang="en-US" sz="1400" dirty="0">
+                <a:solidFill>
+                  <a:schemeClr val="tx1"/>
+                </a:solidFill>
+              </a:rPr>
+              <a:t>Pickup and delivery handoff</a:t>
+            </a:r>
+            <a:endParaRPr lang="en-US" sz="1400" dirty="0"/>
+          </a:p>
+          <a:p>
+            <a:pPr marL="342900" indent="-342900">
               <a:spcAft>
                 <a:spcPts val="600"/>
               </a:spcAft>
-              <a:buNone/>
-            </a:pPr>
-            <a:r>
-              <a:rPr lang="en-US" sz="1600" dirty="0">
-                <a:solidFill>
-                  <a:schemeClr val="bg2"/>
-                </a:solidFill>
-              </a:rPr>
-              <a:t>There is no "dispatch anyway" button.</a:t>
-            </a:r>
-            <a:endParaRPr lang="en-US" sz="1600" dirty="0"/>
+              <a:buSzPct val="100000"/>
+              <a:buChar char="•"/>
+            </a:pPr>
+            <a:r>
+              <a:rPr lang="en-US" sz="1400" dirty="0">
+                <a:solidFill>
+                  <a:schemeClr val="tx1"/>
+                </a:solidFill>
+              </a:rPr>
+              <a:t>Accelerated 60-second offer timers</a:t>
+            </a:r>
+            <a:endParaRPr lang="en-US" sz="1400" dirty="0"/>
+          </a:p>
+          <a:p>
+            <a:pPr marL="342900" indent="-342900">
+              <a:spcAft>
+                <a:spcPts val="600"/>
+              </a:spcAft>
+              <a:buSzPct val="100000"/>
+              <a:buChar char="•"/>
+            </a:pPr>
+            <a:r>
+              <a:rPr lang="en-US" sz="1400" dirty="0">
+                <a:solidFill>
+                  <a:schemeClr val="tx1"/>
+                </a:solidFill>
+              </a:rPr>
+              <a:t>Annona is a prototype, not food-safety certified</a:t>
+            </a:r>
+            <a:endParaRPr lang="en-US" sz="1400" dirty="0"/>
           </a:p>
         </p:txBody>
       </p:sp>
@@ -6669,7 +6287,7 @@
                   <a:schemeClr val="tx2"/>
                 </a:solidFill>
               </a:rPr>
-              <a:t>What is real and what is simulated</a:t>
+              <a:t>Built for the Community Kitchen track</a:t>
             </a:r>
             <a:endParaRPr lang="en-US" sz="3000" dirty="0"/>
           </a:p>
@@ -6677,18 +6295,18 @@
       </p:sp>
       <p:sp>
         <p:nvSpPr>
-          <p:cNvPr id="3" name="real-card"/>
+          <p:cNvPr id="3" name="track-row-1"/>
           <p:cNvSpPr/>
           <p:nvPr/>
         </p:nvSpPr>
         <p:spPr>
           <a:xfrm>
             <a:off x="548640" y="1371600"/>
-            <a:ext cx="3931920" cy="2926080"/>
+            <a:ext cx="8046720" cy="822960"/>
           </a:xfrm>
           <a:prstGeom prst="roundRect">
             <a:avLst>
-              <a:gd name="adj" fmla="val 3750"/>
+              <a:gd name="adj" fmla="val 13333"/>
             </a:avLst>
           </a:prstGeom>
           <a:solidFill>
@@ -6711,18 +6329,142 @@
       </p:sp>
       <p:sp>
         <p:nvSpPr>
-          <p:cNvPr id="4" name="simulated-card"/>
+          <p:cNvPr id="4" name="track-icon-bg-1"/>
           <p:cNvSpPr/>
           <p:nvPr/>
         </p:nvSpPr>
         <p:spPr>
           <a:xfrm>
-            <a:off x="4663440" y="1371600"/>
-            <a:ext cx="3931920" cy="2926080"/>
+            <a:off x="777240" y="1554480"/>
+            <a:ext cx="457200" cy="457200"/>
+          </a:xfrm>
+          <a:prstGeom prst="ellipse">
+            <a:avLst/>
+          </a:prstGeom>
+          <a:solidFill>
+            <a:srgbClr val="2F7D4F"/>
+          </a:solidFill>
+          <a:ln w="12700">
+            <a:solidFill>
+              <a:srgbClr val="2F7D4F"/>
+            </a:solidFill>
+            <a:prstDash val="solid"/>
+          </a:ln>
+        </p:spPr>
+      </p:sp>
+      <p:pic>
+        <p:nvPicPr>
+          <p:cNvPr id="5" name="Image 0" descr="Community Kitchen">    </p:cNvPr>
+          <p:cNvPicPr>
+            <a:picLocks noChangeAspect="1"/>
+          </p:cNvPicPr>
+          <p:nvPr/>
+        </p:nvPicPr>
+        <p:blipFill>
+          <a:blip r:embed="rId1"/>
+          <a:stretch>
+            <a:fillRect/>
+          </a:stretch>
+        </p:blipFill>
+        <p:spPr>
+          <a:xfrm>
+            <a:off x="914400" y="1691640"/>
+            <a:ext cx="182880" cy="182880"/>
+          </a:xfrm>
+          <a:prstGeom prst="rect">
+            <a:avLst/>
+          </a:prstGeom>
+        </p:spPr>
+      </p:pic>
+      <p:sp>
+        <p:nvSpPr>
+          <p:cNvPr id="6" name="Text 3"/>
+          <p:cNvSpPr txBox="1"/>
+          <p:nvPr/>
+        </p:nvSpPr>
+        <p:spPr>
+          <a:xfrm>
+            <a:off x="1554480" y="1481328"/>
+            <a:ext cx="2377440" cy="603504"/>
+          </a:xfrm>
+          <a:prstGeom prst="rect">
+            <a:avLst/>
+          </a:prstGeom>
+          <a:noFill/>
+          <a:ln/>
+        </p:spPr>
+        <p:txBody>
+          <a:bodyPr wrap="square" lIns="0" tIns="0" rIns="0" bIns="0" rtlCol="0" anchor="ctr"/>
+          <a:lstStyle/>
+          <a:p>
+            <a:pPr indent="0" marL="0">
+              <a:buNone/>
+            </a:pPr>
+            <a:r>
+              <a:rPr lang="en-US" sz="1800" b="1" dirty="0">
+                <a:solidFill>
+                  <a:schemeClr val="tx2"/>
+                </a:solidFill>
+                <a:latin typeface="Cambria" pitchFamily="34" charset="0"/>
+                <a:ea typeface="Cambria" pitchFamily="34" charset="-122"/>
+                <a:cs typeface="Cambria" pitchFamily="34" charset="-120"/>
+              </a:rPr>
+              <a:t>Community Kitchen</a:t>
+            </a:r>
+            <a:endParaRPr lang="en-US" sz="1800" dirty="0"/>
+          </a:p>
+        </p:txBody>
+      </p:sp>
+      <p:sp>
+        <p:nvSpPr>
+          <p:cNvPr id="7" name="Text 4"/>
+          <p:cNvSpPr txBox="1"/>
+          <p:nvPr/>
+        </p:nvSpPr>
+        <p:spPr>
+          <a:xfrm>
+            <a:off x="3931920" y="1481328"/>
+            <a:ext cx="4480560" cy="603504"/>
+          </a:xfrm>
+          <a:prstGeom prst="rect">
+            <a:avLst/>
+          </a:prstGeom>
+          <a:noFill/>
+          <a:ln/>
+        </p:spPr>
+        <p:txBody>
+          <a:bodyPr wrap="square" lIns="0" tIns="0" rIns="0" bIns="0" rtlCol="0" anchor="ctr"/>
+          <a:lstStyle/>
+          <a:p>
+            <a:pPr indent="0" marL="0">
+              <a:buNone/>
+            </a:pPr>
+            <a:r>
+              <a:rPr lang="en-US" sz="1400" dirty="0">
+                <a:solidFill>
+                  <a:schemeClr val="tx1"/>
+                </a:solidFill>
+              </a:rPr>
+              <a:t>Food-rescue coordination with safety by design</a:t>
+            </a:r>
+            <a:endParaRPr lang="en-US" sz="1400" dirty="0"/>
+          </a:p>
+        </p:txBody>
+      </p:sp>
+      <p:sp>
+        <p:nvSpPr>
+          <p:cNvPr id="8" name="track-row-2"/>
+          <p:cNvSpPr/>
+          <p:nvPr/>
+        </p:nvSpPr>
+        <p:spPr>
+          <a:xfrm>
+            <a:off x="548640" y="2331720"/>
+            <a:ext cx="8046720" cy="822960"/>
           </a:xfrm>
           <a:prstGeom prst="roundRect">
             <a:avLst>
-              <a:gd name="adj" fmla="val 3750"/>
+              <a:gd name="adj" fmla="val 13333"/>
             </a:avLst>
           </a:prstGeom>
           <a:solidFill>
@@ -6743,148 +6485,34 @@
           </a:effectLst>
         </p:spPr>
       </p:sp>
+      <p:sp>
+        <p:nvSpPr>
+          <p:cNvPr id="9" name="track-icon-bg-2"/>
+          <p:cNvSpPr/>
+          <p:nvPr/>
+        </p:nvSpPr>
+        <p:spPr>
+          <a:xfrm>
+            <a:off x="777240" y="2514600"/>
+            <a:ext cx="457200" cy="457200"/>
+          </a:xfrm>
+          <a:prstGeom prst="ellipse">
+            <a:avLst/>
+          </a:prstGeom>
+          <a:solidFill>
+            <a:srgbClr val="2F7D4F"/>
+          </a:solidFill>
+          <a:ln w="12700">
+            <a:solidFill>
+              <a:srgbClr val="2F7D4F"/>
+            </a:solidFill>
+            <a:prstDash val="solid"/>
+          </a:ln>
+        </p:spPr>
+      </p:sp>
       <p:pic>
         <p:nvPicPr>
-          <p:cNvPr id="5" name="Image 0" descr="real">    </p:cNvPr>
-          <p:cNvPicPr>
-            <a:picLocks noChangeAspect="1"/>
-          </p:cNvPicPr>
-          <p:nvPr/>
-        </p:nvPicPr>
-        <p:blipFill>
-          <a:blip r:embed="rId1"/>
-          <a:stretch>
-            <a:fillRect/>
-          </a:stretch>
-        </p:blipFill>
-        <p:spPr>
-          <a:xfrm>
-            <a:off x="777240" y="1554480"/>
-            <a:ext cx="292608" cy="292608"/>
-          </a:xfrm>
-          <a:prstGeom prst="rect">
-            <a:avLst/>
-          </a:prstGeom>
-        </p:spPr>
-      </p:pic>
-      <p:sp>
-        <p:nvSpPr>
-          <p:cNvPr id="6" name="Text 3"/>
-          <p:cNvSpPr txBox="1"/>
-          <p:nvPr/>
-        </p:nvSpPr>
-        <p:spPr>
-          <a:xfrm>
-            <a:off x="1188720" y="1554480"/>
-            <a:ext cx="3017520" cy="310896"/>
-          </a:xfrm>
-          <a:prstGeom prst="rect">
-            <a:avLst/>
-          </a:prstGeom>
-          <a:noFill/>
-          <a:ln/>
-        </p:spPr>
-        <p:txBody>
-          <a:bodyPr wrap="square" lIns="0" tIns="0" rIns="0" bIns="0" rtlCol="0" anchor="ctr"/>
-          <a:lstStyle/>
-          <a:p>
-            <a:pPr indent="0" marL="0">
-              <a:buNone/>
-            </a:pPr>
-            <a:r>
-              <a:rPr lang="en-US" sz="1800" b="1" dirty="0">
-                <a:solidFill>
-                  <a:schemeClr val="tx2"/>
-                </a:solidFill>
-                <a:latin typeface="Cambria" pitchFamily="34" charset="0"/>
-                <a:ea typeface="Cambria" pitchFamily="34" charset="-122"/>
-                <a:cs typeface="Cambria" pitchFamily="34" charset="-120"/>
-              </a:rPr>
-              <a:t>Real calls</a:t>
-            </a:r>
-            <a:endParaRPr lang="en-US" sz="1800" dirty="0"/>
-          </a:p>
-        </p:txBody>
-      </p:sp>
-      <p:sp>
-        <p:nvSpPr>
-          <p:cNvPr id="7" name="Text 4"/>
-          <p:cNvSpPr txBox="1"/>
-          <p:nvPr/>
-        </p:nvSpPr>
-        <p:spPr>
-          <a:xfrm>
-            <a:off x="777240" y="2011680"/>
-            <a:ext cx="3474720" cy="2103120"/>
-          </a:xfrm>
-          <a:prstGeom prst="rect">
-            <a:avLst/>
-          </a:prstGeom>
-          <a:noFill/>
-          <a:ln/>
-        </p:spPr>
-        <p:txBody>
-          <a:bodyPr wrap="square" lIns="0" tIns="0" rIns="0" bIns="0" rtlCol="0" anchor="t"/>
-          <a:lstStyle/>
-          <a:p>
-            <a:pPr marL="342900" indent="-342900">
-              <a:spcAft>
-                <a:spcPts val="600"/>
-              </a:spcAft>
-              <a:buSzPct val="100000"/>
-              <a:buChar char="•"/>
-            </a:pPr>
-            <a:r>
-              <a:rPr lang="en-US" sz="1400" dirty="0">
-                <a:solidFill>
-                  <a:schemeClr val="tx1"/>
-                </a:solidFill>
-              </a:rPr>
-              <a:t>Gemini vision on photos, including an iPhone HEIC</a:t>
-            </a:r>
-            <a:endParaRPr lang="en-US" sz="1400" dirty="0"/>
-          </a:p>
-          <a:p>
-            <a:pPr marL="342900" indent="-342900">
-              <a:spcAft>
-                <a:spcPts val="600"/>
-              </a:spcAft>
-              <a:buSzPct val="100000"/>
-              <a:buChar char="•"/>
-            </a:pPr>
-            <a:r>
-              <a:rPr lang="en-US" sz="1400" dirty="0">
-                <a:solidFill>
-                  <a:schemeClr val="tx1"/>
-                </a:solidFill>
-              </a:rPr>
-              <a:t>Photon iMessage: JOIN round trip and photo intake</a:t>
-            </a:r>
-            <a:endParaRPr lang="en-US" sz="1400" dirty="0"/>
-          </a:p>
-          <a:p>
-            <a:pPr marL="342900" indent="-342900">
-              <a:spcAft>
-                <a:spcPts val="600"/>
-              </a:spcAft>
-              <a:buSzPct val="100000"/>
-              <a:buChar char="•"/>
-            </a:pPr>
-            <a:r>
-              <a:rPr lang="en-US" sz="1400" dirty="0">
-                <a:solidFill>
-                  <a:schemeClr val="tx1"/>
-                </a:solidFill>
-              </a:rPr>
-              <a:t>Deterministic gate, matching and state machine in code with tests</a:t>
-            </a:r>
-            <a:endParaRPr lang="en-US" sz="1400" dirty="0"/>
-          </a:p>
-        </p:txBody>
-      </p:sp>
-      <p:pic>
-        <p:nvPicPr>
-          <p:cNvPr id="8" name="Image 1" descr="simulated">    </p:cNvPr>
+          <p:cNvPr id="10" name="Image 1" descr="Photon">    </p:cNvPr>
           <p:cNvPicPr>
             <a:picLocks noChangeAspect="1"/>
           </p:cNvPicPr>
@@ -6898,8 +6526,8 @@
         </p:blipFill>
         <p:spPr>
           <a:xfrm>
-            <a:off x="4892040" y="1554480"/>
-            <a:ext cx="292608" cy="292608"/>
+            <a:off x="914400" y="2651760"/>
+            <a:ext cx="182880" cy="182880"/>
           </a:xfrm>
           <a:prstGeom prst="rect">
             <a:avLst/>
@@ -6908,14 +6536,14 @@
       </p:pic>
       <p:sp>
         <p:nvSpPr>
-          <p:cNvPr id="9" name="Text 5"/>
+          <p:cNvPr id="11" name="Text 7"/>
           <p:cNvSpPr txBox="1"/>
           <p:nvPr/>
         </p:nvSpPr>
         <p:spPr>
           <a:xfrm>
-            <a:off x="5303520" y="1554480"/>
-            <a:ext cx="3108960" cy="310896"/>
+            <a:off x="1554480" y="2441448"/>
+            <a:ext cx="2377440" cy="603504"/>
           </a:xfrm>
           <a:prstGeom prst="rect">
             <a:avLst/>
@@ -6939,7 +6567,7 @@
                 <a:ea typeface="Cambria" pitchFamily="34" charset="-122"/>
                 <a:cs typeface="Cambria" pitchFamily="34" charset="-120"/>
               </a:rPr>
-              <a:t>Simulated, and labeled</a:t>
+              <a:t>Photon</a:t>
             </a:r>
             <a:endParaRPr lang="en-US" sz="1800" dirty="0"/>
           </a:p>
@@ -6947,31 +6575,27 @@
       </p:sp>
       <p:sp>
         <p:nvSpPr>
-          <p:cNvPr id="10" name="Text 6"/>
+          <p:cNvPr id="12" name="Text 8"/>
           <p:cNvSpPr txBox="1"/>
           <p:nvPr/>
         </p:nvSpPr>
         <p:spPr>
           <a:xfrm>
-            <a:off x="4892040" y="2011680"/>
-            <a:ext cx="3474720" cy="2103120"/>
-          </a:xfrm>
-          <a:prstGeom prst="rect">
-            <a:avLst/>
-          </a:prstGeom>
-          <a:noFill/>
-          <a:ln/>
-        </p:spPr>
-        <p:txBody>
-          <a:bodyPr wrap="square" lIns="0" tIns="0" rIns="0" bIns="0" rtlCol="0" anchor="t"/>
-          <a:lstStyle/>
-          <a:p>
-            <a:pPr marL="342900" indent="-342900">
-              <a:spcAft>
-                <a:spcPts val="600"/>
-              </a:spcAft>
-              <a:buSzPct val="100000"/>
-              <a:buChar char="•"/>
+            <a:off x="3931920" y="2441448"/>
+            <a:ext cx="4480560" cy="603504"/>
+          </a:xfrm>
+          <a:prstGeom prst="rect">
+            <a:avLst/>
+          </a:prstGeom>
+          <a:noFill/>
+          <a:ln/>
+        </p:spPr>
+        <p:txBody>
+          <a:bodyPr wrap="square" lIns="0" tIns="0" rIns="0" bIns="0" rtlCol="0" anchor="ctr"/>
+          <a:lstStyle/>
+          <a:p>
+            <a:pPr indent="0" marL="0">
+              <a:buNone/>
             </a:pPr>
             <a:r>
               <a:rPr lang="en-US" sz="1400" dirty="0">
@@ -6979,17 +6603,157 @@
                   <a:schemeClr val="tx1"/>
                 </a:solidFill>
               </a:rPr>
-              <a:t>All donors, recipients and couriers are synthetic</a:t>
+              <a:t>Time-limited offers and claims over iMessage</a:t>
             </a:r>
             <a:endParaRPr lang="en-US" sz="1400" dirty="0"/>
           </a:p>
-          <a:p>
-            <a:pPr marL="342900" indent="-342900">
-              <a:spcAft>
-                <a:spcPts val="600"/>
-              </a:spcAft>
-              <a:buSzPct val="100000"/>
-              <a:buChar char="•"/>
+        </p:txBody>
+      </p:sp>
+      <p:sp>
+        <p:nvSpPr>
+          <p:cNvPr id="13" name="track-row-3"/>
+          <p:cNvSpPr/>
+          <p:nvPr/>
+        </p:nvSpPr>
+        <p:spPr>
+          <a:xfrm>
+            <a:off x="548640" y="3291840"/>
+            <a:ext cx="8046720" cy="822960"/>
+          </a:xfrm>
+          <a:prstGeom prst="roundRect">
+            <a:avLst>
+              <a:gd name="adj" fmla="val 13333"/>
+            </a:avLst>
+          </a:prstGeom>
+          <a:solidFill>
+            <a:schemeClr val="bg1"/>
+          </a:solidFill>
+          <a:ln w="12700">
+            <a:solidFill>
+              <a:schemeClr val="bg1"/>
+            </a:solidFill>
+            <a:prstDash val="solid"/>
+          </a:ln>
+          <a:effectLst>
+            <a:outerShdw sx="100000" sy="100000" kx="0" ky="0" algn="bl" rotWithShape="0" blurRad="101600" dist="25400" dir="5400000">
+              <a:srgbClr val="17301F">
+                <a:alpha val="12000"/>
+              </a:srgbClr>
+            </a:outerShdw>
+          </a:effectLst>
+        </p:spPr>
+      </p:sp>
+      <p:sp>
+        <p:nvSpPr>
+          <p:cNvPr id="14" name="track-icon-bg-3"/>
+          <p:cNvSpPr/>
+          <p:nvPr/>
+        </p:nvSpPr>
+        <p:spPr>
+          <a:xfrm>
+            <a:off x="777240" y="3474720"/>
+            <a:ext cx="457200" cy="457200"/>
+          </a:xfrm>
+          <a:prstGeom prst="ellipse">
+            <a:avLst/>
+          </a:prstGeom>
+          <a:solidFill>
+            <a:srgbClr val="2F7D4F"/>
+          </a:solidFill>
+          <a:ln w="12700">
+            <a:solidFill>
+              <a:srgbClr val="2F7D4F"/>
+            </a:solidFill>
+            <a:prstDash val="solid"/>
+          </a:ln>
+        </p:spPr>
+      </p:sp>
+      <p:pic>
+        <p:nvPicPr>
+          <p:cNvPr id="15" name="Image 2" descr="Gemini API">    </p:cNvPr>
+          <p:cNvPicPr>
+            <a:picLocks noChangeAspect="1"/>
+          </p:cNvPicPr>
+          <p:nvPr/>
+        </p:nvPicPr>
+        <p:blipFill>
+          <a:blip r:embed="rId3"/>
+          <a:stretch>
+            <a:fillRect/>
+          </a:stretch>
+        </p:blipFill>
+        <p:spPr>
+          <a:xfrm>
+            <a:off x="914400" y="3611880"/>
+            <a:ext cx="182880" cy="182880"/>
+          </a:xfrm>
+          <a:prstGeom prst="rect">
+            <a:avLst/>
+          </a:prstGeom>
+        </p:spPr>
+      </p:pic>
+      <p:sp>
+        <p:nvSpPr>
+          <p:cNvPr id="16" name="Text 11"/>
+          <p:cNvSpPr txBox="1"/>
+          <p:nvPr/>
+        </p:nvSpPr>
+        <p:spPr>
+          <a:xfrm>
+            <a:off x="1554480" y="3401568"/>
+            <a:ext cx="2377440" cy="603504"/>
+          </a:xfrm>
+          <a:prstGeom prst="rect">
+            <a:avLst/>
+          </a:prstGeom>
+          <a:noFill/>
+          <a:ln/>
+        </p:spPr>
+        <p:txBody>
+          <a:bodyPr wrap="square" lIns="0" tIns="0" rIns="0" bIns="0" rtlCol="0" anchor="ctr"/>
+          <a:lstStyle/>
+          <a:p>
+            <a:pPr indent="0" marL="0">
+              <a:buNone/>
+            </a:pPr>
+            <a:r>
+              <a:rPr lang="en-US" sz="1800" b="1" dirty="0">
+                <a:solidFill>
+                  <a:schemeClr val="tx2"/>
+                </a:solidFill>
+                <a:latin typeface="Cambria" pitchFamily="34" charset="0"/>
+                <a:ea typeface="Cambria" pitchFamily="34" charset="-122"/>
+                <a:cs typeface="Cambria" pitchFamily="34" charset="-120"/>
+              </a:rPr>
+              <a:t>Gemini API</a:t>
+            </a:r>
+            <a:endParaRPr lang="en-US" sz="1800" dirty="0"/>
+          </a:p>
+        </p:txBody>
+      </p:sp>
+      <p:sp>
+        <p:nvSpPr>
+          <p:cNvPr id="17" name="Text 12"/>
+          <p:cNvSpPr txBox="1"/>
+          <p:nvPr/>
+        </p:nvSpPr>
+        <p:spPr>
+          <a:xfrm>
+            <a:off x="3931920" y="3401568"/>
+            <a:ext cx="4480560" cy="603504"/>
+          </a:xfrm>
+          <a:prstGeom prst="rect">
+            <a:avLst/>
+          </a:prstGeom>
+          <a:noFill/>
+          <a:ln/>
+        </p:spPr>
+        <p:txBody>
+          <a:bodyPr wrap="square" lIns="0" tIns="0" rIns="0" bIns="0" rtlCol="0" anchor="ctr"/>
+          <a:lstStyle/>
+          <a:p>
+            <a:pPr indent="0" marL="0">
+              <a:buNone/>
             </a:pPr>
             <a:r>
               <a:rPr lang="en-US" sz="1400" dirty="0">
@@ -6997,43 +6761,7 @@
                   <a:schemeClr val="tx1"/>
                 </a:solidFill>
               </a:rPr>
-              <a:t>Pickup and delivery handoff</a:t>
-            </a:r>
-            <a:endParaRPr lang="en-US" sz="1400" dirty="0"/>
-          </a:p>
-          <a:p>
-            <a:pPr marL="342900" indent="-342900">
-              <a:spcAft>
-                <a:spcPts val="600"/>
-              </a:spcAft>
-              <a:buSzPct val="100000"/>
-              <a:buChar char="•"/>
-            </a:pPr>
-            <a:r>
-              <a:rPr lang="en-US" sz="1400" dirty="0">
-                <a:solidFill>
-                  <a:schemeClr val="tx1"/>
-                </a:solidFill>
-              </a:rPr>
-              <a:t>Accelerated 60-second offer timers</a:t>
-            </a:r>
-            <a:endParaRPr lang="en-US" sz="1400" dirty="0"/>
-          </a:p>
-          <a:p>
-            <a:pPr marL="342900" indent="-342900">
-              <a:spcAft>
-                <a:spcPts val="600"/>
-              </a:spcAft>
-              <a:buSzPct val="100000"/>
-              <a:buChar char="•"/>
-            </a:pPr>
-            <a:r>
-              <a:rPr lang="en-US" sz="1400" dirty="0">
-                <a:solidFill>
-                  <a:schemeClr val="tx1"/>
-                </a:solidFill>
-              </a:rPr>
-              <a:t>Annona is a prototype, not food-safety certified</a:t>
+              <a:t>Photo to an uncertain, editable draft</a:t>
             </a:r>
             <a:endParaRPr lang="en-US" sz="1400" dirty="0"/>
           </a:p>
@@ -7111,56 +6839,18 @@
       </p:grpSpPr>
       <p:sp>
         <p:nvSpPr>
-          <p:cNvPr id="2" name="Text 0"/>
+          <p:cNvPr id="2" name="logo-card"/>
           <p:cNvSpPr/>
-          <p:nvPr>
-            <p:ph idx="100" type="title" hasCustomPrompt="1"/>
-          </p:nvPr>
-        </p:nvSpPr>
-        <p:spPr>
-          <a:xfrm>
-            <a:off x="548640" y="365760"/>
-            <a:ext cx="8046720" cy="731520"/>
-          </a:xfrm>
-          <a:prstGeom prst="rect">
-            <a:avLst/>
-          </a:prstGeom>
-          <a:noFill/>
-          <a:ln/>
-        </p:spPr>
-        <p:txBody>
-          <a:bodyPr wrap="square" lIns="0" tIns="0" rIns="0" bIns="0" rtlCol="0" anchor="ctr"/>
-          <a:lstStyle/>
-          <a:p>
-            <a:pPr indent="0" marL="0">
-              <a:buNone/>
-            </a:pPr>
-            <a:r>
-              <a:rPr lang="en-US" sz="3000" b="1" dirty="0">
-                <a:solidFill>
-                  <a:schemeClr val="tx2"/>
-                </a:solidFill>
-              </a:rPr>
-              <a:t>Built for the Community Kitchen track</a:t>
-            </a:r>
-            <a:endParaRPr lang="en-US" sz="3000" dirty="0"/>
-          </a:p>
-        </p:txBody>
-      </p:sp>
-      <p:sp>
-        <p:nvSpPr>
-          <p:cNvPr id="3" name="track-row-1"/>
-          <p:cNvSpPr/>
-          <p:nvPr/>
-        </p:nvSpPr>
-        <p:spPr>
-          <a:xfrm>
-            <a:off x="548640" y="1371600"/>
-            <a:ext cx="8046720" cy="822960"/>
+          <p:nvPr/>
+        </p:nvSpPr>
+        <p:spPr>
+          <a:xfrm>
+            <a:off x="640080" y="365760"/>
+            <a:ext cx="1554480" cy="1286540"/>
           </a:xfrm>
           <a:prstGeom prst="roundRect">
             <a:avLst>
-              <a:gd name="adj" fmla="val 13333"/>
+              <a:gd name="adj" fmla="val 9950"/>
             </a:avLst>
           </a:prstGeom>
           <a:solidFill>
@@ -7172,43 +6862,11 @@
             </a:solidFill>
             <a:prstDash val="solid"/>
           </a:ln>
-          <a:effectLst>
-            <a:outerShdw sx="100000" sy="100000" kx="0" ky="0" algn="bl" rotWithShape="0" blurRad="101600" dist="25400" dir="5400000">
-              <a:srgbClr val="17301F">
-                <a:alpha val="12000"/>
-              </a:srgbClr>
-            </a:outerShdw>
-          </a:effectLst>
-        </p:spPr>
-      </p:sp>
-      <p:sp>
-        <p:nvSpPr>
-          <p:cNvPr id="4" name="track-icon-bg-1"/>
-          <p:cNvSpPr/>
-          <p:nvPr/>
-        </p:nvSpPr>
-        <p:spPr>
-          <a:xfrm>
-            <a:off x="777240" y="1554480"/>
-            <a:ext cx="457200" cy="457200"/>
-          </a:xfrm>
-          <a:prstGeom prst="ellipse">
-            <a:avLst/>
-          </a:prstGeom>
-          <a:solidFill>
-            <a:srgbClr val="2F7D4F"/>
-          </a:solidFill>
-          <a:ln w="12700">
-            <a:solidFill>
-              <a:srgbClr val="2F7D4F"/>
-            </a:solidFill>
-            <a:prstDash val="solid"/>
-          </a:ln>
         </p:spPr>
       </p:sp>
       <p:pic>
         <p:nvPicPr>
-          <p:cNvPr id="5" name="Image 0" descr="Community Kitchen">    </p:cNvPr>
+          <p:cNvPr id="3" name="Image 0" descr="Annona logo">    </p:cNvPr>
           <p:cNvPicPr>
             <a:picLocks noChangeAspect="1"/>
           </p:cNvPicPr>
@@ -7222,8 +6880,8 @@
         </p:blipFill>
         <p:spPr>
           <a:xfrm>
-            <a:off x="914400" y="1691640"/>
-            <a:ext cx="182880" cy="182880"/>
+            <a:off x="777240" y="502920"/>
+            <a:ext cx="1280160" cy="1012220"/>
           </a:xfrm>
           <a:prstGeom prst="rect">
             <a:avLst/>
@@ -7232,38 +6890,74 @@
       </p:pic>
       <p:sp>
         <p:nvSpPr>
-          <p:cNvPr id="6" name="Text 3"/>
+          <p:cNvPr id="4" name="Text 1"/>
           <p:cNvSpPr txBox="1"/>
           <p:nvPr/>
         </p:nvSpPr>
         <p:spPr>
           <a:xfrm>
-            <a:off x="1554480" y="1481328"/>
-            <a:ext cx="2377440" cy="603504"/>
-          </a:xfrm>
-          <a:prstGeom prst="rect">
-            <a:avLst/>
-          </a:prstGeom>
-          <a:noFill/>
-          <a:ln/>
-        </p:spPr>
-        <p:txBody>
-          <a:bodyPr wrap="square" lIns="0" tIns="0" rIns="0" bIns="0" rtlCol="0" anchor="ctr"/>
+            <a:off x="640080" y="1828800"/>
+            <a:ext cx="7680960" cy="1280160"/>
+          </a:xfrm>
+          <a:prstGeom prst="rect">
+            <a:avLst/>
+          </a:prstGeom>
+          <a:noFill/>
+          <a:ln/>
+        </p:spPr>
+        <p:txBody>
+          <a:bodyPr wrap="square" lIns="0" tIns="0" rIns="0" bIns="0" rtlCol="0" anchor="t"/>
           <a:lstStyle/>
           <a:p>
             <a:pPr indent="0" marL="0">
               <a:buNone/>
             </a:pPr>
             <a:r>
-              <a:rPr lang="en-US" sz="1800" b="1" dirty="0">
-                <a:solidFill>
-                  <a:schemeClr val="tx2"/>
+              <a:rPr lang="en-US" sz="3600" b="1" dirty="0">
+                <a:solidFill>
+                  <a:schemeClr val="bg1"/>
                 </a:solidFill>
                 <a:latin typeface="Cambria" pitchFamily="34" charset="0"/>
                 <a:ea typeface="Cambria" pitchFamily="34" charset="-122"/>
                 <a:cs typeface="Cambria" pitchFamily="34" charset="-120"/>
               </a:rPr>
-              <a:t>Community Kitchen</a:t>
+              <a:t>Fast when it is safe. Stopped when it is not.</a:t>
+            </a:r>
+            <a:endParaRPr lang="en-US" sz="3600" dirty="0"/>
+          </a:p>
+        </p:txBody>
+      </p:sp>
+      <p:sp>
+        <p:nvSpPr>
+          <p:cNvPr id="5" name="Text 2"/>
+          <p:cNvSpPr txBox="1"/>
+          <p:nvPr/>
+        </p:nvSpPr>
+        <p:spPr>
+          <a:xfrm>
+            <a:off x="640080" y="3291840"/>
+            <a:ext cx="7498080" cy="457200"/>
+          </a:xfrm>
+          <a:prstGeom prst="rect">
+            <a:avLst/>
+          </a:prstGeom>
+          <a:noFill/>
+          <a:ln/>
+        </p:spPr>
+        <p:txBody>
+          <a:bodyPr wrap="square" lIns="0" tIns="0" rIns="0" bIns="0" rtlCol="0" anchor="ctr"/>
+          <a:lstStyle/>
+          <a:p>
+            <a:pPr indent="0" marL="0">
+              <a:buNone/>
+            </a:pPr>
+            <a:r>
+              <a:rPr lang="en-US" sz="1800" dirty="0">
+                <a:solidFill>
+                  <a:schemeClr val="accent3"/>
+                </a:solidFill>
+              </a:rPr>
+              <a:t>Next: partner and food-safety review before any real deployment.</a:t>
             </a:r>
             <a:endParaRPr lang="en-US" sz="1800" dirty="0"/>
           </a:p>
@@ -7271,14 +6965,14 @@
       </p:sp>
       <p:sp>
         <p:nvSpPr>
-          <p:cNvPr id="7" name="Text 4"/>
+          <p:cNvPr id="6" name="Text 3"/>
           <p:cNvSpPr txBox="1"/>
           <p:nvPr/>
         </p:nvSpPr>
         <p:spPr>
           <a:xfrm>
-            <a:off x="3931920" y="1481328"/>
-            <a:ext cx="4480560" cy="603504"/>
+            <a:off x="640080" y="4114800"/>
+            <a:ext cx="5486400" cy="365760"/>
           </a:xfrm>
           <a:prstGeom prst="rect">
             <a:avLst/>
@@ -7294,330 +6988,14 @@
               <a:buNone/>
             </a:pPr>
             <a:r>
-              <a:rPr lang="en-US" sz="1400" dirty="0">
-                <a:solidFill>
-                  <a:schemeClr val="tx1"/>
-                </a:solidFill>
-              </a:rPr>
-              <a:t>Food-rescue coordination with safety by design</a:t>
-            </a:r>
-            <a:endParaRPr lang="en-US" sz="1400" dirty="0"/>
-          </a:p>
-        </p:txBody>
-      </p:sp>
-      <p:sp>
-        <p:nvSpPr>
-          <p:cNvPr id="8" name="track-row-2"/>
-          <p:cNvSpPr/>
-          <p:nvPr/>
-        </p:nvSpPr>
-        <p:spPr>
-          <a:xfrm>
-            <a:off x="548640" y="2331720"/>
-            <a:ext cx="8046720" cy="822960"/>
-          </a:xfrm>
-          <a:prstGeom prst="roundRect">
-            <a:avLst>
-              <a:gd name="adj" fmla="val 13333"/>
-            </a:avLst>
-          </a:prstGeom>
-          <a:solidFill>
-            <a:schemeClr val="bg1"/>
-          </a:solidFill>
-          <a:ln w="12700">
-            <a:solidFill>
-              <a:schemeClr val="bg1"/>
-            </a:solidFill>
-            <a:prstDash val="solid"/>
-          </a:ln>
-          <a:effectLst>
-            <a:outerShdw sx="100000" sy="100000" kx="0" ky="0" algn="bl" rotWithShape="0" blurRad="101600" dist="25400" dir="5400000">
-              <a:srgbClr val="17301F">
-                <a:alpha val="12000"/>
-              </a:srgbClr>
-            </a:outerShdw>
-          </a:effectLst>
-        </p:spPr>
-      </p:sp>
-      <p:sp>
-        <p:nvSpPr>
-          <p:cNvPr id="9" name="track-icon-bg-2"/>
-          <p:cNvSpPr/>
-          <p:nvPr/>
-        </p:nvSpPr>
-        <p:spPr>
-          <a:xfrm>
-            <a:off x="777240" y="2514600"/>
-            <a:ext cx="457200" cy="457200"/>
-          </a:xfrm>
-          <a:prstGeom prst="ellipse">
-            <a:avLst/>
-          </a:prstGeom>
-          <a:solidFill>
-            <a:srgbClr val="2F7D4F"/>
-          </a:solidFill>
-          <a:ln w="12700">
-            <a:solidFill>
-              <a:srgbClr val="2F7D4F"/>
-            </a:solidFill>
-            <a:prstDash val="solid"/>
-          </a:ln>
-        </p:spPr>
-      </p:sp>
-      <p:pic>
-        <p:nvPicPr>
-          <p:cNvPr id="10" name="Image 1" descr="Photon">    </p:cNvPr>
-          <p:cNvPicPr>
-            <a:picLocks noChangeAspect="1"/>
-          </p:cNvPicPr>
-          <p:nvPr/>
-        </p:nvPicPr>
-        <p:blipFill>
-          <a:blip r:embed="rId2"/>
-          <a:stretch>
-            <a:fillRect/>
-          </a:stretch>
-        </p:blipFill>
-        <p:spPr>
-          <a:xfrm>
-            <a:off x="914400" y="2651760"/>
-            <a:ext cx="182880" cy="182880"/>
-          </a:xfrm>
-          <a:prstGeom prst="rect">
-            <a:avLst/>
-          </a:prstGeom>
-        </p:spPr>
-      </p:pic>
-      <p:sp>
-        <p:nvSpPr>
-          <p:cNvPr id="11" name="Text 7"/>
-          <p:cNvSpPr txBox="1"/>
-          <p:nvPr/>
-        </p:nvSpPr>
-        <p:spPr>
-          <a:xfrm>
-            <a:off x="1554480" y="2441448"/>
-            <a:ext cx="2377440" cy="603504"/>
-          </a:xfrm>
-          <a:prstGeom prst="rect">
-            <a:avLst/>
-          </a:prstGeom>
-          <a:noFill/>
-          <a:ln/>
-        </p:spPr>
-        <p:txBody>
-          <a:bodyPr wrap="square" lIns="0" tIns="0" rIns="0" bIns="0" rtlCol="0" anchor="ctr"/>
-          <a:lstStyle/>
-          <a:p>
-            <a:pPr indent="0" marL="0">
-              <a:buNone/>
-            </a:pPr>
-            <a:r>
-              <a:rPr lang="en-US" sz="1800" b="1" dirty="0">
-                <a:solidFill>
-                  <a:schemeClr val="tx2"/>
-                </a:solidFill>
-                <a:latin typeface="Cambria" pitchFamily="34" charset="0"/>
-                <a:ea typeface="Cambria" pitchFamily="34" charset="-122"/>
-                <a:cs typeface="Cambria" pitchFamily="34" charset="-120"/>
-              </a:rPr>
-              <a:t>Photon</a:t>
-            </a:r>
-            <a:endParaRPr lang="en-US" sz="1800" dirty="0"/>
-          </a:p>
-        </p:txBody>
-      </p:sp>
-      <p:sp>
-        <p:nvSpPr>
-          <p:cNvPr id="12" name="Text 8"/>
-          <p:cNvSpPr txBox="1"/>
-          <p:nvPr/>
-        </p:nvSpPr>
-        <p:spPr>
-          <a:xfrm>
-            <a:off x="3931920" y="2441448"/>
-            <a:ext cx="4480560" cy="603504"/>
-          </a:xfrm>
-          <a:prstGeom prst="rect">
-            <a:avLst/>
-          </a:prstGeom>
-          <a:noFill/>
-          <a:ln/>
-        </p:spPr>
-        <p:txBody>
-          <a:bodyPr wrap="square" lIns="0" tIns="0" rIns="0" bIns="0" rtlCol="0" anchor="ctr"/>
-          <a:lstStyle/>
-          <a:p>
-            <a:pPr indent="0" marL="0">
-              <a:buNone/>
-            </a:pPr>
-            <a:r>
-              <a:rPr lang="en-US" sz="1400" dirty="0">
-                <a:solidFill>
-                  <a:schemeClr val="tx1"/>
-                </a:solidFill>
-              </a:rPr>
-              <a:t>Time-limited offers and claims over iMessage</a:t>
-            </a:r>
-            <a:endParaRPr lang="en-US" sz="1400" dirty="0"/>
-          </a:p>
-        </p:txBody>
-      </p:sp>
-      <p:sp>
-        <p:nvSpPr>
-          <p:cNvPr id="13" name="track-row-3"/>
-          <p:cNvSpPr/>
-          <p:nvPr/>
-        </p:nvSpPr>
-        <p:spPr>
-          <a:xfrm>
-            <a:off x="548640" y="3291840"/>
-            <a:ext cx="8046720" cy="822960"/>
-          </a:xfrm>
-          <a:prstGeom prst="roundRect">
-            <a:avLst>
-              <a:gd name="adj" fmla="val 13333"/>
-            </a:avLst>
-          </a:prstGeom>
-          <a:solidFill>
-            <a:schemeClr val="bg1"/>
-          </a:solidFill>
-          <a:ln w="12700">
-            <a:solidFill>
-              <a:schemeClr val="bg1"/>
-            </a:solidFill>
-            <a:prstDash val="solid"/>
-          </a:ln>
-          <a:effectLst>
-            <a:outerShdw sx="100000" sy="100000" kx="0" ky="0" algn="bl" rotWithShape="0" blurRad="101600" dist="25400" dir="5400000">
-              <a:srgbClr val="17301F">
-                <a:alpha val="12000"/>
-              </a:srgbClr>
-            </a:outerShdw>
-          </a:effectLst>
-        </p:spPr>
-      </p:sp>
-      <p:sp>
-        <p:nvSpPr>
-          <p:cNvPr id="14" name="track-icon-bg-3"/>
-          <p:cNvSpPr/>
-          <p:nvPr/>
-        </p:nvSpPr>
-        <p:spPr>
-          <a:xfrm>
-            <a:off x="777240" y="3474720"/>
-            <a:ext cx="457200" cy="457200"/>
-          </a:xfrm>
-          <a:prstGeom prst="ellipse">
-            <a:avLst/>
-          </a:prstGeom>
-          <a:solidFill>
-            <a:srgbClr val="2F7D4F"/>
-          </a:solidFill>
-          <a:ln w="12700">
-            <a:solidFill>
-              <a:srgbClr val="2F7D4F"/>
-            </a:solidFill>
-            <a:prstDash val="solid"/>
-          </a:ln>
-        </p:spPr>
-      </p:sp>
-      <p:pic>
-        <p:nvPicPr>
-          <p:cNvPr id="15" name="Image 2" descr="Gemini API">    </p:cNvPr>
-          <p:cNvPicPr>
-            <a:picLocks noChangeAspect="1"/>
-          </p:cNvPicPr>
-          <p:nvPr/>
-        </p:nvPicPr>
-        <p:blipFill>
-          <a:blip r:embed="rId3"/>
-          <a:stretch>
-            <a:fillRect/>
-          </a:stretch>
-        </p:blipFill>
-        <p:spPr>
-          <a:xfrm>
-            <a:off x="914400" y="3611880"/>
-            <a:ext cx="182880" cy="182880"/>
-          </a:xfrm>
-          <a:prstGeom prst="rect">
-            <a:avLst/>
-          </a:prstGeom>
-        </p:spPr>
-      </p:pic>
-      <p:sp>
-        <p:nvSpPr>
-          <p:cNvPr id="16" name="Text 11"/>
-          <p:cNvSpPr txBox="1"/>
-          <p:nvPr/>
-        </p:nvSpPr>
-        <p:spPr>
-          <a:xfrm>
-            <a:off x="1554480" y="3401568"/>
-            <a:ext cx="2377440" cy="603504"/>
-          </a:xfrm>
-          <a:prstGeom prst="rect">
-            <a:avLst/>
-          </a:prstGeom>
-          <a:noFill/>
-          <a:ln/>
-        </p:spPr>
-        <p:txBody>
-          <a:bodyPr wrap="square" lIns="0" tIns="0" rIns="0" bIns="0" rtlCol="0" anchor="ctr"/>
-          <a:lstStyle/>
-          <a:p>
-            <a:pPr indent="0" marL="0">
-              <a:buNone/>
-            </a:pPr>
-            <a:r>
-              <a:rPr lang="en-US" sz="1800" b="1" dirty="0">
-                <a:solidFill>
-                  <a:schemeClr val="tx2"/>
-                </a:solidFill>
-                <a:latin typeface="Cambria" pitchFamily="34" charset="0"/>
-                <a:ea typeface="Cambria" pitchFamily="34" charset="-122"/>
-                <a:cs typeface="Cambria" pitchFamily="34" charset="-120"/>
-              </a:rPr>
-              <a:t>Gemini API</a:t>
-            </a:r>
-            <a:endParaRPr lang="en-US" sz="1800" dirty="0"/>
-          </a:p>
-        </p:txBody>
-      </p:sp>
-      <p:sp>
-        <p:nvSpPr>
-          <p:cNvPr id="17" name="Text 12"/>
-          <p:cNvSpPr txBox="1"/>
-          <p:nvPr/>
-        </p:nvSpPr>
-        <p:spPr>
-          <a:xfrm>
-            <a:off x="3931920" y="3401568"/>
-            <a:ext cx="4480560" cy="603504"/>
-          </a:xfrm>
-          <a:prstGeom prst="rect">
-            <a:avLst/>
-          </a:prstGeom>
-          <a:noFill/>
-          <a:ln/>
-        </p:spPr>
-        <p:txBody>
-          <a:bodyPr wrap="square" lIns="0" tIns="0" rIns="0" bIns="0" rtlCol="0" anchor="ctr"/>
-          <a:lstStyle/>
-          <a:p>
-            <a:pPr indent="0" marL="0">
-              <a:buNone/>
-            </a:pPr>
-            <a:r>
-              <a:rPr lang="en-US" sz="1400" dirty="0">
-                <a:solidFill>
-                  <a:schemeClr val="tx1"/>
-                </a:solidFill>
-              </a:rPr>
-              <a:t>Photo to an uncertain, editable draft</a:t>
-            </a:r>
-            <a:endParaRPr lang="en-US" sz="1400" dirty="0"/>
+              <a:rPr lang="en-US" sz="1600" dirty="0">
+                <a:solidFill>
+                  <a:schemeClr val="bg2"/>
+                </a:solidFill>
+              </a:rPr>
+              <a:t>Thank you. Questions?</a:t>
+            </a:r>
+            <a:endParaRPr lang="en-US" sz="1600" dirty="0"/>
           </a:p>
         </p:txBody>
       </p:sp>
